--- a/docs/deck/AgentScore Overview.pptx
+++ b/docs/deck/AgentScore Overview.pptx
@@ -5,26 +5,28 @@
     <p:sldMasterId id="2147483648" r:id="rId1"/>
   </p:sldMasterIdLst>
   <p:notesMasterIdLst>
-    <p:notesMasterId r:id="rId19"/>
+    <p:notesMasterId r:id="rId21"/>
   </p:notesMasterIdLst>
   <p:sldIdLst>
     <p:sldId id="256" r:id="rId2"/>
-    <p:sldId id="257" r:id="rId3"/>
-    <p:sldId id="258" r:id="rId4"/>
-    <p:sldId id="259" r:id="rId5"/>
+    <p:sldId id="258" r:id="rId3"/>
+    <p:sldId id="259" r:id="rId4"/>
+    <p:sldId id="273" r:id="rId5"/>
     <p:sldId id="260" r:id="rId6"/>
     <p:sldId id="261" r:id="rId7"/>
     <p:sldId id="262" r:id="rId8"/>
-    <p:sldId id="263" r:id="rId9"/>
-    <p:sldId id="264" r:id="rId10"/>
-    <p:sldId id="265" r:id="rId11"/>
-    <p:sldId id="266" r:id="rId12"/>
-    <p:sldId id="267" r:id="rId13"/>
-    <p:sldId id="268" r:id="rId14"/>
-    <p:sldId id="269" r:id="rId15"/>
-    <p:sldId id="270" r:id="rId16"/>
-    <p:sldId id="271" r:id="rId17"/>
-    <p:sldId id="272" r:id="rId18"/>
+    <p:sldId id="274" r:id="rId9"/>
+    <p:sldId id="263" r:id="rId10"/>
+    <p:sldId id="275" r:id="rId11"/>
+    <p:sldId id="264" r:id="rId12"/>
+    <p:sldId id="265" r:id="rId13"/>
+    <p:sldId id="266" r:id="rId14"/>
+    <p:sldId id="267" r:id="rId15"/>
+    <p:sldId id="268" r:id="rId16"/>
+    <p:sldId id="269" r:id="rId17"/>
+    <p:sldId id="270" r:id="rId18"/>
+    <p:sldId id="271" r:id="rId19"/>
+    <p:sldId id="272" r:id="rId20"/>
   </p:sldIdLst>
   <p:sldSz cx="12192000" cy="6858000"/>
   <p:notesSz cx="6858000" cy="9144000"/>
@@ -123,11 +125,16 @@
       </a:defRPr>
     </a:lvl9pPr>
   </p:defaultTextStyle>
+  <p:extLst>
+    <p:ext uri="{EFAFB233-063F-42B5-8137-9DF3F51BA10A}">
+      <p15:sldGuideLst xmlns:p15="http://schemas.microsoft.com/office/powerpoint/2012/main"/>
+    </p:ext>
+  </p:extLst>
 </p:presentation>
 </file>
 
 <file path=ppt/charts/chart1.xml><?xml version="1.0" encoding="utf-8"?>
-<c:chartSpace xmlns:c16="http://schemas.microsoft.com/office/drawing/2014/chart" xmlns:c="http://schemas.openxmlformats.org/drawingml/2006/chart" xmlns:a="http://schemas.openxmlformats.org/drawingml/2006/main" xmlns:r="http://schemas.openxmlformats.org/officeDocument/2006/relationships" xmlns:c16r2="http://schemas.microsoft.com/office/drawing/2015/06/chart">
+<c:chartSpace xmlns:c="http://schemas.openxmlformats.org/drawingml/2006/chart" xmlns:a="http://schemas.openxmlformats.org/drawingml/2006/main" xmlns:r="http://schemas.openxmlformats.org/officeDocument/2006/relationships" xmlns:c16r2="http://schemas.microsoft.com/office/drawing/2015/06/chart">
   <c:date1904 val="0"/>
   <c:lang val="en-US"/>
   <c:roundedCorners val="1"/>
@@ -152,7 +159,7 @@
                 <a:srgbClr val="0087AE"/>
               </a:solidFill>
             </c:spPr>
-            <c:extLst>
+            <c:extLst xmlns:c16="http://schemas.microsoft.com/office/drawing/2014/chart">
               <c:ext xmlns:c16="http://schemas.microsoft.com/office/drawing/2014/chart" uri="{C3380CC4-5D6E-409C-BE32-E72D297353CC}">
                 <c16:uniqueId val="{00000001-0147-074A-AD73-FDDF9CBAB963}"/>
               </c:ext>
@@ -166,7 +173,7 @@
                 <a:srgbClr val="E8EEF6"/>
               </a:solidFill>
             </c:spPr>
-            <c:extLst>
+            <c:extLst xmlns:c16="http://schemas.microsoft.com/office/drawing/2014/chart">
               <c:ext xmlns:c16="http://schemas.microsoft.com/office/drawing/2014/chart" uri="{C3380CC4-5D6E-409C-BE32-E72D297353CC}">
                 <c16:uniqueId val="{00000003-0147-074A-AD73-FDDF9CBAB963}"/>
               </c:ext>
@@ -195,7 +202,7 @@
               </c:pt>
             </c:numLit>
           </c:val>
-          <c:extLst>
+          <c:extLst xmlns:c16="http://schemas.microsoft.com/office/drawing/2014/chart">
             <c:ext xmlns:c16="http://schemas.microsoft.com/office/drawing/2014/chart" uri="{C3380CC4-5D6E-409C-BE32-E72D297353CC}">
               <c16:uniqueId val="{00000004-0147-074A-AD73-FDDF9CBAB963}"/>
             </c:ext>
@@ -222,7 +229,7 @@
 </file>
 
 <file path=ppt/charts/chart2.xml><?xml version="1.0" encoding="utf-8"?>
-<c:chartSpace xmlns:c15="http://schemas.microsoft.com/office/drawing/2012/chart" xmlns:c16="http://schemas.microsoft.com/office/drawing/2014/chart" xmlns:c="http://schemas.openxmlformats.org/drawingml/2006/chart" xmlns:a="http://schemas.openxmlformats.org/drawingml/2006/main" xmlns:r="http://schemas.openxmlformats.org/officeDocument/2006/relationships" xmlns:c16r2="http://schemas.microsoft.com/office/drawing/2015/06/chart">
+<c:chartSpace xmlns:c="http://schemas.openxmlformats.org/drawingml/2006/chart" xmlns:a="http://schemas.openxmlformats.org/drawingml/2006/main" xmlns:r="http://schemas.openxmlformats.org/officeDocument/2006/relationships" xmlns:c16r2="http://schemas.microsoft.com/office/drawing/2015/06/chart">
   <c:date1904 val="0"/>
   <c:lang val="en-US"/>
   <c:roundedCorners val="1"/>
@@ -249,11 +256,18 @@
           <c:invertIfNegative val="0"/>
           <c:dPt>
             <c:idx val="0"/>
+            <c:invertIfNegative val="1"/>
+            <c:bubble3D val="0"/>
             <c:spPr>
               <a:solidFill>
                 <a:srgbClr val="FF6C0E"/>
               </a:solidFill>
             </c:spPr>
+            <c:extLst>
+              <c:ext xmlns:c16="http://schemas.microsoft.com/office/drawing/2014/chart" uri="{C3380CC4-5D6E-409C-BE32-E72D297353CC}">
+                <c16:uniqueId val="{00000001-7C8E-9D49-AF6A-61A58C65AEFA}"/>
+              </c:ext>
+            </c:extLst>
           </c:dPt>
           <c:dLbls>
             <c:spPr>
@@ -271,7 +285,7 @@
             <c:showPercent val="0"/>
             <c:showBubbleSize val="1"/>
             <c:showLeaderLines val="0"/>
-            <c:extLst>
+            <c:extLst xmlns:c15="http://schemas.microsoft.com/office/drawing/2012/chart" xmlns:c16="http://schemas.microsoft.com/office/drawing/2014/chart">
               <c:ext xmlns:c15="http://schemas.microsoft.com/office/drawing/2012/chart" uri="{CE6537A1-D6FC-4f65-9D91-7224C49458BB}">
                 <c15:showLeaderLines val="0"/>
               </c:ext>
@@ -324,7 +338,7 @@
               </c:pt>
             </c:numLit>
           </c:val>
-          <c:extLst>
+          <c:extLst xmlns:c15="http://schemas.microsoft.com/office/drawing/2012/chart" xmlns:c16="http://schemas.microsoft.com/office/drawing/2014/chart">
             <c:ext xmlns:c16="http://schemas.microsoft.com/office/drawing/2014/chart" uri="{C3380CC4-5D6E-409C-BE32-E72D297353CC}">
               <c16:uniqueId val="{00000000-AF0B-9E45-825E-F0F12282DE53}"/>
             </c:ext>
@@ -564,7 +578,7 @@
           <a:lstStyle/>
           <a:p>
             <a:r>
-              <a:rPr lang="en-US"/>
+              <a:rPr lang="en-US" dirty="0"/>
               <a:t>Open on the tagline before anything else – it is the thesis the whole deck proves. Introduce yourself and frame this as a working session on agent quality, not a generic AI pitch.</a:t>
             </a:r>
           </a:p>
@@ -631,7 +645,7 @@
           <a:p>
             <a:r>
               <a:rPr lang="en-US"/>
-              <a:t>Be honest in the room about maturity – position as the rigor and integration path competitors don't have, not as more features than everyone. If asked directly about Decagon, acknowledge their strength in turnkey auto-generated tests for pure support use cases, then pivot to cross-domain plus statistical rigor.</a:t>
+              <a:t>Turn the defensive Q&amp;A moment into an owned talking point. Every row here is a rigor mechanism, not a hand-wave: deterministic-first, hybrid scoring, statistical confidence, inspectable reasoning, and a safety override that can't be averaged away.</a:t>
             </a:r>
           </a:p>
         </p:txBody>
@@ -696,8 +710,56 @@
           <a:lstStyle/>
           <a:p>
             <a:r>
-              <a:rPr lang="en-US"/>
-              <a:t>If the prospect asks who else uses this, be straight about where the product is in its lifecycle – pilot and design-partner framing is a legitimate and honest sales motion pre-GA. Do not imply production references that don't exist yet.</a:t>
+              <a:rPr lang="en-US" dirty="0"/>
+              <a:t>For </a:t>
+            </a:r>
+            <a:r>
+              <a:rPr lang="en-US" dirty="0" err="1"/>
+              <a:t>Tricentis</a:t>
+            </a:r>
+            <a:r>
+              <a:rPr lang="en-US" dirty="0"/>
+              <a:t>-installed-base prospects, lead with the Tosca/</a:t>
+            </a:r>
+            <a:r>
+              <a:rPr lang="en-US" dirty="0" err="1"/>
+              <a:t>qTest</a:t>
+            </a:r>
+            <a:r>
+              <a:rPr lang="en-US" dirty="0"/>
+              <a:t> surfacing – it is the wedge a standalone eval vendor cannot offer. No proprietary SDK means it bolts onto </a:t>
+            </a:r>
+            <a:r>
+              <a:rPr lang="en-US" dirty="0" err="1"/>
+              <a:t>LangChain</a:t>
+            </a:r>
+            <a:r>
+              <a:rPr lang="en-US" dirty="0"/>
+              <a:t>, </a:t>
+            </a:r>
+            <a:r>
+              <a:rPr lang="en-US" dirty="0" err="1"/>
+              <a:t>LangGraph</a:t>
+            </a:r>
+            <a:r>
+              <a:rPr lang="en-US" dirty="0"/>
+              <a:t>, OpenAI Agents SDK, </a:t>
+            </a:r>
+            <a:r>
+              <a:rPr lang="en-US" dirty="0" err="1"/>
+              <a:t>AutoGen</a:t>
+            </a:r>
+            <a:r>
+              <a:rPr lang="en-US" dirty="0"/>
+              <a:t>, </a:t>
+            </a:r>
+            <a:r>
+              <a:rPr lang="en-US" dirty="0" err="1"/>
+              <a:t>CrewAI</a:t>
+            </a:r>
+            <a:r>
+              <a:rPr lang="en-US" dirty="0"/>
+              <a:t>, or a custom loop.</a:t>
             </a:r>
           </a:p>
         </p:txBody>
@@ -762,8 +824,8 @@
           <a:lstStyle/>
           <a:p>
             <a:r>
-              <a:rPr lang="en-US"/>
-              <a:t>Keep this directional. Exact credit-to-dollar conversion is not finalized – do not quote numbers that are not approved.</a:t>
+              <a:rPr lang="en-US" dirty="0"/>
+              <a:t>Be honest in the room about maturity – position as the rigor and integration path competitors don't have, not as more features than everyone. If asked directly about Decagon, acknowledge their strength in turnkey auto-generated tests for pure support use cases, then pivot to cross-domain plus statistical rigor.</a:t>
             </a:r>
           </a:p>
         </p:txBody>
@@ -828,8 +890,8 @@
           <a:lstStyle/>
           <a:p>
             <a:r>
-              <a:rPr lang="en-US"/>
-              <a:t>Keep this slide light and directional – it is a we are listening to design partners moment, not a committed roadmap.</a:t>
+              <a:rPr lang="en-US" dirty="0"/>
+              <a:t>If the prospect asks who else uses this, be straight about where the product is in its lifecycle – pilot and design-partner framing is a legitimate and honest sales motion pre-GA. Do not imply production references that don't exist yet.</a:t>
             </a:r>
           </a:p>
         </p:txBody>
@@ -894,8 +956,8 @@
           <a:lstStyle/>
           <a:p>
             <a:r>
-              <a:rPr lang="en-US"/>
-              <a:t>Close on the exact line from the video's CTA scene – it is the tagline everyone should leave remembering. Concrete next step: schedule a 30-minute technical walkthrough, or connect a sandbox OTel trace live in the room.</a:t>
+              <a:rPr lang="en-US" dirty="0"/>
+              <a:t>Keep this directional. Exact credit-to-dollar conversion is not finalized – do not quote numbers that are not approved.</a:t>
             </a:r>
           </a:p>
         </p:txBody>
@@ -960,8 +1022,8 @@
           <a:lstStyle/>
           <a:p>
             <a:r>
-              <a:rPr lang="en-US"/>
-              <a:t>Leave-behind slides for technical follow-up questions – not presented live unless asked.</a:t>
+              <a:rPr lang="en-US" dirty="0"/>
+              <a:t>Keep this slide light and directional – it is a we are listening to design partners moment, not a committed roadmap.</a:t>
             </a:r>
           </a:p>
         </p:txBody>
@@ -1026,8 +1088,16 @@
           <a:lstStyle/>
           <a:p>
             <a:r>
-              <a:rPr lang="en-US"/>
-              <a:t>Reference only – pull up if a technical stakeholder asks what the extended dimensions cover beyond the six shown on the live score demo.</a:t>
+              <a:rPr lang="en-US" dirty="0"/>
+              <a:t>Close on the exact line from the video's CTA scene – it is the tagline everyone should leave remembering. Concrete next step: schedule a 30-minute technical walkthrough, or connect a sandbox </a:t>
+            </a:r>
+            <a:r>
+              <a:rPr lang="en-US" dirty="0" err="1"/>
+              <a:t>OTel</a:t>
+            </a:r>
+            <a:r>
+              <a:rPr lang="en-US" dirty="0"/>
+              <a:t> trace live in the room.</a:t>
             </a:r>
           </a:p>
         </p:txBody>
@@ -1093,6 +1163,138 @@
           <a:p>
             <a:r>
               <a:rPr lang="en-US"/>
+              <a:t>Leave-behind slides for technical follow-up questions – not presented live unless asked.</a:t>
+            </a:r>
+          </a:p>
+        </p:txBody>
+      </p:sp>
+    </p:spTree>
+  </p:cSld>
+  <p:clrMapOvr>
+    <a:masterClrMapping/>
+  </p:clrMapOvr>
+</p:notes>
+</file>
+
+<file path=ppt/notesSlides/notesSlide18.xml><?xml version="1.0" encoding="utf-8"?>
+<p:notes xmlns:a="http://schemas.openxmlformats.org/drawingml/2006/main" xmlns:r="http://schemas.openxmlformats.org/officeDocument/2006/relationships" xmlns:p="http://schemas.openxmlformats.org/presentationml/2006/main">
+  <p:cSld>
+    <p:spTree>
+      <p:nvGrpSpPr>
+        <p:cNvPr id="1" name=""/>
+        <p:cNvGrpSpPr/>
+        <p:nvPr/>
+      </p:nvGrpSpPr>
+      <p:grpSpPr>
+        <a:xfrm>
+          <a:off x="0" y="0"/>
+          <a:ext cx="0" cy="0"/>
+          <a:chOff x="0" y="0"/>
+          <a:chExt cx="0" cy="0"/>
+        </a:xfrm>
+      </p:grpSpPr>
+      <p:sp>
+        <p:nvSpPr>
+          <p:cNvPr id="2" name="Slide Image Placeholder 1"/>
+          <p:cNvSpPr>
+            <a:spLocks noGrp="1" noRot="1" noChangeAspect="1"/>
+          </p:cNvSpPr>
+          <p:nvPr>
+            <p:ph type="sldImg"/>
+          </p:nvPr>
+        </p:nvSpPr>
+        <p:spPr/>
+        <p:txBody>
+          <a:bodyPr/>
+          <a:lstStyle/>
+          <a:p>
+            <a:endParaRPr/>
+          </a:p>
+        </p:txBody>
+      </p:sp>
+      <p:sp>
+        <p:nvSpPr>
+          <p:cNvPr id="3" name="Notes Placeholder 2"/>
+          <p:cNvSpPr>
+            <a:spLocks noGrp="1"/>
+          </p:cNvSpPr>
+          <p:nvPr>
+            <p:ph type="body" idx="1"/>
+          </p:nvPr>
+        </p:nvSpPr>
+        <p:spPr/>
+        <p:txBody>
+          <a:bodyPr/>
+          <a:lstStyle/>
+          <a:p>
+            <a:r>
+              <a:rPr lang="en-US"/>
+              <a:t>Reference only – pull up if a technical stakeholder asks what the extended dimensions cover beyond the six shown on the live score demo.</a:t>
+            </a:r>
+          </a:p>
+        </p:txBody>
+      </p:sp>
+    </p:spTree>
+  </p:cSld>
+  <p:clrMapOvr>
+    <a:masterClrMapping/>
+  </p:clrMapOvr>
+</p:notes>
+</file>
+
+<file path=ppt/notesSlides/notesSlide19.xml><?xml version="1.0" encoding="utf-8"?>
+<p:notes xmlns:a="http://schemas.openxmlformats.org/drawingml/2006/main" xmlns:r="http://schemas.openxmlformats.org/officeDocument/2006/relationships" xmlns:p="http://schemas.openxmlformats.org/presentationml/2006/main">
+  <p:cSld>
+    <p:spTree>
+      <p:nvGrpSpPr>
+        <p:cNvPr id="1" name=""/>
+        <p:cNvGrpSpPr/>
+        <p:nvPr/>
+      </p:nvGrpSpPr>
+      <p:grpSpPr>
+        <a:xfrm>
+          <a:off x="0" y="0"/>
+          <a:ext cx="0" cy="0"/>
+          <a:chOff x="0" y="0"/>
+          <a:chExt cx="0" cy="0"/>
+        </a:xfrm>
+      </p:grpSpPr>
+      <p:sp>
+        <p:nvSpPr>
+          <p:cNvPr id="2" name="Slide Image Placeholder 1"/>
+          <p:cNvSpPr>
+            <a:spLocks noGrp="1" noRot="1" noChangeAspect="1"/>
+          </p:cNvSpPr>
+          <p:nvPr>
+            <p:ph type="sldImg"/>
+          </p:nvPr>
+        </p:nvSpPr>
+        <p:spPr/>
+        <p:txBody>
+          <a:bodyPr/>
+          <a:lstStyle/>
+          <a:p>
+            <a:endParaRPr/>
+          </a:p>
+        </p:txBody>
+      </p:sp>
+      <p:sp>
+        <p:nvSpPr>
+          <p:cNvPr id="3" name="Notes Placeholder 2"/>
+          <p:cNvSpPr>
+            <a:spLocks noGrp="1"/>
+          </p:cNvSpPr>
+          <p:nvPr>
+            <p:ph type="body" idx="1"/>
+          </p:nvPr>
+        </p:nvSpPr>
+        <p:spPr/>
+        <p:txBody>
+          <a:bodyPr/>
+          <a:lstStyle/>
+          <a:p>
+            <a:r>
+              <a:rPr lang="en-US"/>
               <a:t>Architecture leans client-side storage with cloud processing and a configurable proxy, still being validated against customer interviews per the product plan – do not overstate this as finalized.</a:t>
             </a:r>
           </a:p>
@@ -1158,8 +1360,8 @@
           <a:lstStyle/>
           <a:p>
             <a:r>
-              <a:rPr lang="en-US"/>
-              <a:t>Skip this slide for pitches under 15 minutes. Otherwise move through it quickly – it is a map, not content.</a:t>
+              <a:rPr lang="en-US" dirty="0"/>
+              <a:t>Pause after the question – let it sit uncomfortably. Do not answer it yet, that comes on the Problem slide. If you know the prospect's own agents, gesture at them here.</a:t>
             </a:r>
           </a:p>
         </p:txBody>
@@ -1224,8 +1426,8 @@
           <a:lstStyle/>
           <a:p>
             <a:r>
-              <a:rPr lang="en-US"/>
-              <a:t>Pause after the question – let it sit uncomfortably. Do not answer it yet, that comes on the Problem slide. If you know the prospect's own agents, gesture at them here.</a:t>
+              <a:rPr lang="en-US" dirty="0"/>
+              <a:t>Ground this in the prospect's own agents if you know them (support bot, coding assistant, test generator). Keep it domain-agnostic if you don't – it lands for any team running agents.</a:t>
             </a:r>
           </a:p>
         </p:txBody>
@@ -1291,7 +1493,7 @@
           <a:p>
             <a:r>
               <a:rPr lang="en-US"/>
-              <a:t>Ground this in the prospect's own agents if you know them (support bot, coding assistant, test generator). Keep it domain-agnostic if you don't – it lands for any team running agents.</a:t>
+              <a:t>This is the fix for the #1 confusion from the Workday session: testing vs. grading. Say it plainly - we do not write or run tests, we grade what already ran. Land this before any mechanics slide.</a:t>
             </a:r>
           </a:p>
         </p:txBody>
@@ -1356,8 +1558,16 @@
           <a:lstStyle/>
           <a:p>
             <a:r>
-              <a:rPr lang="en-US"/>
-              <a:t>This is the how pivot of the pitch. Emphasize zero lift to start – plug in the OTel exporter they likely already have and get signal immediately, no manual spec-writing up front.</a:t>
+              <a:rPr lang="en-US" dirty="0"/>
+              <a:t>This is the how pivot of the pitch. Emphasize zero lift to start – plug in the </a:t>
+            </a:r>
+            <a:r>
+              <a:rPr lang="en-US" dirty="0" err="1"/>
+              <a:t>OTel</a:t>
+            </a:r>
+            <a:r>
+              <a:rPr lang="en-US" dirty="0"/>
+              <a:t> exporter they likely already have and get signal immediately, no manual spec-writing up front.</a:t>
             </a:r>
           </a:p>
         </p:txBody>
@@ -1422,7 +1632,7 @@
           <a:lstStyle/>
           <a:p>
             <a:r>
-              <a:rPr lang="en-US"/>
+              <a:rPr lang="en-US" dirty="0"/>
               <a:t>This is a simplified, presentation-friendly version of the full engineering flow (profile assignment, eval selection, scoring). The complete diagram with every decision branch is available as a technical appendix on request – don't overclaim detail live, point to the leave-behind.</a:t>
             </a:r>
           </a:p>
@@ -1488,7 +1698,7 @@
           <a:lstStyle/>
           <a:p>
             <a:r>
-              <a:rPr lang="en-US"/>
+              <a:rPr lang="en-US" dirty="0"/>
               <a:t>This is the credibility slide. Confidence intervals and minimum-sample gating are the sharpest differentiator versus every named competitor – say so explicitly. Walk through the dimension bars and call out that Tool Use is the one to watch, then explain the safety-override rule: a single unsafe signal can force a fail regardless of the composite.</a:t>
             </a:r>
           </a:p>
@@ -1555,7 +1765,7 @@
           <a:p>
             <a:r>
               <a:rPr lang="en-US"/>
-              <a:t>Contrast with a plain pass/fail dashboard. Most eval tools stop at the red X – AgentScore traces back to the failing step, shows the evidence chain, and recommends exactly what to fix. Debugging an agent stops being guesswork and starts being an answer.</a:t>
+              <a:t>Pre-empt the single most important QA-buyer question before it's asked. Three tiers, in order of rigor: exact where possible, statistical where not, curated ground truth to anchor it all.</a:t>
             </a:r>
           </a:p>
         </p:txBody>
@@ -1620,8 +1830,16 @@
           <a:lstStyle/>
           <a:p>
             <a:r>
-              <a:rPr lang="en-US"/>
-              <a:t>For Tricentis-installed-base prospects, lead with the Tosca/qTest surfacing – it is the wedge a standalone eval vendor cannot offer. No proprietary SDK means it bolts onto LangChain, LangGraph, OpenAI Agents SDK, AutoGen, CrewAI, or a custom loop.</a:t>
+              <a:rPr lang="en-US" dirty="0"/>
+              <a:t>Contrast with a plain pass/fail dashboard. Most eval tools stop at the red X – </a:t>
+            </a:r>
+            <a:r>
+              <a:rPr lang="en-US" dirty="0" err="1"/>
+              <a:t>AgentScore</a:t>
+            </a:r>
+            <a:r>
+              <a:rPr lang="en-US" dirty="0"/>
+              <a:t> traces back to the failing step, shows the evidence chain, and recommends exactly what to fix. Debugging an agent stops being guesswork and starts being an answer.</a:t>
             </a:r>
           </a:p>
         </p:txBody>
@@ -2410,7 +2628,7 @@
         <p:spPr>
           <a:xfrm>
             <a:off x="720000" y="4428000"/>
-            <a:ext cx="10753200" cy="720000"/>
+            <a:ext cx="10753200" cy="1080000"/>
           </a:xfrm>
           <a:prstGeom prst="rect">
             <a:avLst/>
@@ -2423,6 +2641,20 @@
           <a:p>
             <a:pPr algn="ctr"/>
             <a:r>
+              <a:rPr lang="en-US" sz="1800" b="1" dirty="0">
+                <a:solidFill>
+                  <a:srgbClr val="59C8E6"/>
+                </a:solidFill>
+                <a:latin typeface="Calibri"/>
+                <a:ea typeface="Calibri"/>
+              </a:rPr>
+              <a:t>Automated grading for AI agents</a:t>
+            </a:r>
+            <a:endParaRPr lang="en-US" dirty="0"/>
+          </a:p>
+          <a:p>
+            <a:pPr algn="ctr"/>
+            <a:r>
               <a:rPr lang="en-US" sz="1600" dirty="0" err="1">
                 <a:solidFill>
                   <a:srgbClr val="CADCFC"/>
@@ -2433,15 +2665,18 @@
               <a:t>AgentScore</a:t>
             </a:r>
             <a:r>
-              <a:rPr lang="en-US" sz="1600">
+              <a:rPr lang="en-US" sz="1600" dirty="0">
                 <a:solidFill>
                   <a:srgbClr val="CADCFC"/>
                 </a:solidFill>
                 <a:latin typeface="Calibri"/>
                 <a:ea typeface="Calibri"/>
               </a:rPr>
-              <a:t> - </a:t>
-            </a:r>
+              <a:t> - Evaluation Platform for AI Agents</a:t>
+            </a:r>
+          </a:p>
+          <a:p>
+            <a:pPr algn="ctr"/>
             <a:r>
               <a:rPr lang="en-US" sz="1600" dirty="0">
                 <a:solidFill>
@@ -2450,58 +2685,7 @@
                 <a:latin typeface="Calibri"/>
                 <a:ea typeface="Calibri"/>
               </a:rPr>
-              <a:t>Evaluation Platform for AI Agents</a:t>
-            </a:r>
-          </a:p>
-          <a:p>
-            <a:pPr algn="ctr"/>
-            <a:r>
-              <a:rPr lang="en-US" sz="1600" dirty="0">
-                <a:solidFill>
-                  <a:srgbClr val="CADCFC"/>
-                </a:solidFill>
-                <a:latin typeface="Calibri"/>
-                <a:ea typeface="Calibri"/>
-              </a:rPr>
-              <a:t>Product Overview  ·  22 July 2026</a:t>
-            </a:r>
-          </a:p>
-        </p:txBody>
-      </p:sp>
-      <p:sp>
-        <p:nvSpPr>
-          <p:cNvPr id="100004" name="CTAPill"/>
-          <p:cNvSpPr/>
-          <p:nvPr/>
-        </p:nvSpPr>
-        <p:spPr>
-          <a:xfrm>
-            <a:off x="4836600" y="5508000"/>
-            <a:ext cx="2520000" cy="504000"/>
-          </a:xfrm>
-          <a:prstGeom prst="roundRect">
-            <a:avLst>
-              <a:gd name="adj" fmla="val 50000"/>
-            </a:avLst>
-          </a:prstGeom>
-          <a:solidFill>
-            <a:srgbClr val="FF6C0E"/>
-          </a:solidFill>
-        </p:spPr>
-        <p:txBody>
-          <a:bodyPr/>
-          <a:lstStyle/>
-          <a:p>
-            <a:pPr algn="ctr"/>
-            <a:r>
-              <a:rPr lang="en-US" sz="1800" b="1">
-                <a:solidFill>
-                  <a:srgbClr val="FFFFFF"/>
-                </a:solidFill>
-                <a:latin typeface="Calibri"/>
-                <a:ea typeface="Calibri"/>
-              </a:rPr>
-              <a:t>Request access</a:t>
+              <a:t>Product Overview  ·  27 July 2026</a:t>
             </a:r>
           </a:p>
         </p:txBody>
@@ -2515,7 +2699,7 @@
 </file>
 
 <file path=ppt/slides/slide10.xml><?xml version="1.0" encoding="utf-8"?>
-<p:sld xmlns:a16="http://schemas.microsoft.com/office/drawing/2014/main" xmlns:a="http://schemas.openxmlformats.org/drawingml/2006/main" xmlns:r="http://schemas.openxmlformats.org/officeDocument/2006/relationships" xmlns:p="http://schemas.openxmlformats.org/presentationml/2006/main">
+<p:sld xmlns:a="http://schemas.openxmlformats.org/drawingml/2006/main" xmlns:r="http://schemas.openxmlformats.org/officeDocument/2006/relationships" xmlns:p="http://schemas.openxmlformats.org/presentationml/2006/main">
   <p:cSld>
     <p:bg>
       <p:bgPr>
@@ -2541,8 +2725,8 @@
       </p:grpSpPr>
       <p:sp>
         <p:nvSpPr>
-          <p:cNvPr id="100110" name="TextBox 1"/>
-          <p:cNvSpPr txBox="1"/>
+          <p:cNvPr id="100192" name="TextBox 1"/>
+          <p:cNvSpPr/>
           <p:nvPr/>
         </p:nvSpPr>
         <p:spPr>
@@ -2567,20 +2751,20 @@
                 <a:latin typeface="Trebuchet MS"/>
                 <a:ea typeface="Trebuchet MS"/>
               </a:rPr>
-              <a:t>Why AgentScore</a:t>
+              <a:t>Why trust the judge</a:t>
             </a:r>
           </a:p>
         </p:txBody>
       </p:sp>
       <p:graphicFrame>
         <p:nvGraphicFramePr>
-          <p:cNvPr id="100111" name="Table 1"/>
+          <p:cNvPr id="100193" name="Table 1"/>
           <p:cNvGraphicFramePr/>
           <p:nvPr/>
         </p:nvGraphicFramePr>
         <p:xfrm>
           <a:off x="540000" y="1296000"/>
-          <a:ext cx="11113200" cy="4967998"/>
+          <a:ext cx="11113200" cy="4255200"/>
         </p:xfrm>
         <a:graphic>
           <a:graphicData uri="http://schemas.openxmlformats.org/drawingml/2006/table">
@@ -2604,7 +2788,999 @@
                   </a:extLst>
                 </a:gridCol>
               </a:tblGrid>
-              <a:tr h="709714">
+              <a:tr h="709200">
+                <a:tc>
+                  <a:txBody>
+                    <a:bodyPr/>
+                    <a:lstStyle/>
+                    <a:p>
+                      <a:r>
+                        <a:rPr lang="en-US" sz="1800" b="1">
+                          <a:solidFill>
+                            <a:srgbClr val="FFFFFF"/>
+                          </a:solidFill>
+                        </a:rPr>
+                        <a:t>Judge principle</a:t>
+                      </a:r>
+                    </a:p>
+                  </a:txBody>
+                  <a:tcPr anchor="ctr">
+                    <a:solidFill>
+                      <a:srgbClr val="1B365D"/>
+                    </a:solidFill>
+                  </a:tcPr>
+                </a:tc>
+                <a:tc>
+                  <a:txBody>
+                    <a:bodyPr/>
+                    <a:lstStyle/>
+                    <a:p>
+                      <a:r>
+                        <a:rPr lang="en-US" sz="1800" b="1">
+                          <a:solidFill>
+                            <a:srgbClr val="FFFFFF"/>
+                          </a:solidFill>
+                        </a:rPr>
+                        <a:t>What it means</a:t>
+                      </a:r>
+                    </a:p>
+                  </a:txBody>
+                  <a:tcPr anchor="ctr">
+                    <a:solidFill>
+                      <a:srgbClr val="1B365D"/>
+                    </a:solidFill>
+                  </a:tcPr>
+                </a:tc>
+                <a:extLst>
+                  <a:ext uri="{0D108BD9-81ED-4DB2-BD59-A6C34878D82A}">
+                    <a16:rowId xmlns:a16="http://schemas.microsoft.com/office/drawing/2014/main" val="10000"/>
+                  </a:ext>
+                </a:extLst>
+              </a:tr>
+              <a:tr h="709200">
+                <a:tc>
+                  <a:txBody>
+                    <a:bodyPr/>
+                    <a:lstStyle/>
+                    <a:p>
+                      <a:r>
+                        <a:rPr lang="en-US" sz="1600" b="1">
+                          <a:solidFill>
+                            <a:srgbClr val="1B365D"/>
+                          </a:solidFill>
+                        </a:rPr>
+                        <a:t>Deterministic where possible</a:t>
+                      </a:r>
+                    </a:p>
+                  </a:txBody>
+                  <a:tcPr anchor="ctr">
+                    <a:solidFill>
+                      <a:srgbClr val="F4F7FB"/>
+                    </a:solidFill>
+                  </a:tcPr>
+                </a:tc>
+                <a:tc>
+                  <a:txBody>
+                    <a:bodyPr/>
+                    <a:lstStyle/>
+                    <a:p>
+                      <a:r>
+                        <a:rPr lang="en-US" sz="1600">
+                          <a:solidFill>
+                            <a:srgbClr val="333333"/>
+                          </a:solidFill>
+                        </a:rPr>
+                        <a:t>Exact checks run first – the LLM judge is only invoked where no ground truth exists.</a:t>
+                      </a:r>
+                    </a:p>
+                  </a:txBody>
+                  <a:tcPr anchor="ctr">
+                    <a:solidFill>
+                      <a:srgbClr val="F4F7FB"/>
+                    </a:solidFill>
+                  </a:tcPr>
+                </a:tc>
+                <a:extLst>
+                  <a:ext uri="{0D108BD9-81ED-4DB2-BD59-A6C34878D82A}">
+                    <a16:rowId xmlns:a16="http://schemas.microsoft.com/office/drawing/2014/main" val="10001"/>
+                  </a:ext>
+                </a:extLst>
+              </a:tr>
+              <a:tr h="709200">
+                <a:tc>
+                  <a:txBody>
+                    <a:bodyPr/>
+                    <a:lstStyle/>
+                    <a:p>
+                      <a:r>
+                        <a:rPr lang="en-US" sz="1600" b="1">
+                          <a:solidFill>
+                            <a:srgbClr val="1B365D"/>
+                          </a:solidFill>
+                        </a:rPr>
+                        <a:t>Hybrid evals</a:t>
+                      </a:r>
+                    </a:p>
+                  </a:txBody>
+                  <a:tcPr anchor="ctr">
+                    <a:solidFill>
+                      <a:srgbClr val="FFFFFF"/>
+                    </a:solidFill>
+                  </a:tcPr>
+                </a:tc>
+                <a:tc>
+                  <a:txBody>
+                    <a:bodyPr/>
+                    <a:lstStyle/>
+                    <a:p>
+                      <a:r>
+                        <a:rPr lang="en-US" sz="1600">
+                          <a:solidFill>
+                            <a:srgbClr val="333333"/>
+                          </a:solidFill>
+                        </a:rPr>
+                        <a:t>Deterministic and judge-based scoring combine within a single eval, not one-or-the-other.</a:t>
+                      </a:r>
+                    </a:p>
+                  </a:txBody>
+                  <a:tcPr anchor="ctr">
+                    <a:solidFill>
+                      <a:srgbClr val="FFFFFF"/>
+                    </a:solidFill>
+                  </a:tcPr>
+                </a:tc>
+                <a:extLst>
+                  <a:ext uri="{0D108BD9-81ED-4DB2-BD59-A6C34878D82A}">
+                    <a16:rowId xmlns:a16="http://schemas.microsoft.com/office/drawing/2014/main" val="10002"/>
+                  </a:ext>
+                </a:extLst>
+              </a:tr>
+              <a:tr h="709200">
+                <a:tc>
+                  <a:txBody>
+                    <a:bodyPr/>
+                    <a:lstStyle/>
+                    <a:p>
+                      <a:r>
+                        <a:rPr lang="en-US" sz="1600" b="1">
+                          <a:solidFill>
+                            <a:srgbClr val="1B365D"/>
+                          </a:solidFill>
+                        </a:rPr>
+                        <a:t>Confidence intervals</a:t>
+                      </a:r>
+                    </a:p>
+                  </a:txBody>
+                  <a:tcPr anchor="ctr">
+                    <a:solidFill>
+                      <a:srgbClr val="F4F7FB"/>
+                    </a:solidFill>
+                  </a:tcPr>
+                </a:tc>
+                <a:tc>
+                  <a:txBody>
+                    <a:bodyPr/>
+                    <a:lstStyle/>
+                    <a:p>
+                      <a:r>
+                        <a:rPr lang="en-US" sz="1600">
+                          <a:solidFill>
+                            <a:srgbClr val="333333"/>
+                          </a:solidFill>
+                        </a:rPr>
+                        <a:t>Every judge score ships with a statistical range, not a bare number.</a:t>
+                      </a:r>
+                    </a:p>
+                  </a:txBody>
+                  <a:tcPr anchor="ctr">
+                    <a:solidFill>
+                      <a:srgbClr val="F4F7FB"/>
+                    </a:solidFill>
+                  </a:tcPr>
+                </a:tc>
+                <a:extLst>
+                  <a:ext uri="{0D108BD9-81ED-4DB2-BD59-A6C34878D82A}">
+                    <a16:rowId xmlns:a16="http://schemas.microsoft.com/office/drawing/2014/main" val="10003"/>
+                  </a:ext>
+                </a:extLst>
+              </a:tr>
+              <a:tr h="709200">
+                <a:tc>
+                  <a:txBody>
+                    <a:bodyPr/>
+                    <a:lstStyle/>
+                    <a:p>
+                      <a:r>
+                        <a:rPr lang="en-US" sz="1600" b="1">
+                          <a:solidFill>
+                            <a:srgbClr val="1B365D"/>
+                          </a:solidFill>
+                        </a:rPr>
+                        <a:t>Decision-tree transparency</a:t>
+                      </a:r>
+                    </a:p>
+                  </a:txBody>
+                  <a:tcPr anchor="ctr">
+                    <a:solidFill>
+                      <a:srgbClr val="FFFFFF"/>
+                    </a:solidFill>
+                  </a:tcPr>
+                </a:tc>
+                <a:tc>
+                  <a:txBody>
+                    <a:bodyPr/>
+                    <a:lstStyle/>
+                    <a:p>
+                      <a:r>
+                        <a:rPr lang="en-US" sz="1600">
+                          <a:solidFill>
+                            <a:srgbClr val="333333"/>
+                          </a:solidFill>
+                        </a:rPr>
+                        <a:t>The judge's reasoning path is inspectable, not a black box.</a:t>
+                      </a:r>
+                    </a:p>
+                  </a:txBody>
+                  <a:tcPr anchor="ctr">
+                    <a:solidFill>
+                      <a:srgbClr val="FFFFFF"/>
+                    </a:solidFill>
+                  </a:tcPr>
+                </a:tc>
+                <a:extLst>
+                  <a:ext uri="{0D108BD9-81ED-4DB2-BD59-A6C34878D82A}">
+                    <a16:rowId xmlns:a16="http://schemas.microsoft.com/office/drawing/2014/main" val="10004"/>
+                  </a:ext>
+                </a:extLst>
+              </a:tr>
+              <a:tr h="709200">
+                <a:tc>
+                  <a:txBody>
+                    <a:bodyPr/>
+                    <a:lstStyle/>
+                    <a:p>
+                      <a:r>
+                        <a:rPr lang="en-US" sz="1600" b="1">
+                          <a:solidFill>
+                            <a:srgbClr val="1B365D"/>
+                          </a:solidFill>
+                        </a:rPr>
+                        <a:t>Safety hard-fail override</a:t>
+                      </a:r>
+                    </a:p>
+                  </a:txBody>
+                  <a:tcPr anchor="ctr">
+                    <a:solidFill>
+                      <a:srgbClr val="F4F7FB"/>
+                    </a:solidFill>
+                  </a:tcPr>
+                </a:tc>
+                <a:tc>
+                  <a:txBody>
+                    <a:bodyPr/>
+                    <a:lstStyle/>
+                    <a:p>
+                      <a:r>
+                        <a:rPr lang="en-US" sz="1600">
+                          <a:solidFill>
+                            <a:srgbClr val="333333"/>
+                          </a:solidFill>
+                        </a:rPr>
+                        <a:t>One unsafe signal forces a fail regardless of composite score.</a:t>
+                      </a:r>
+                    </a:p>
+                  </a:txBody>
+                  <a:tcPr anchor="ctr">
+                    <a:solidFill>
+                      <a:srgbClr val="F4F7FB"/>
+                    </a:solidFill>
+                  </a:tcPr>
+                </a:tc>
+                <a:extLst>
+                  <a:ext uri="{0D108BD9-81ED-4DB2-BD59-A6C34878D82A}">
+                    <a16:rowId xmlns:a16="http://schemas.microsoft.com/office/drawing/2014/main" val="10005"/>
+                  </a:ext>
+                </a:extLst>
+              </a:tr>
+            </a:tbl>
+          </a:graphicData>
+        </a:graphic>
+      </p:graphicFrame>
+    </p:spTree>
+  </p:cSld>
+  <p:clrMapOvr>
+    <a:masterClrMapping/>
+  </p:clrMapOvr>
+</p:sld>
+</file>
+
+<file path=ppt/slides/slide11.xml><?xml version="1.0" encoding="utf-8"?>
+<p:sld xmlns:a="http://schemas.openxmlformats.org/drawingml/2006/main" xmlns:r="http://schemas.openxmlformats.org/officeDocument/2006/relationships" xmlns:p="http://schemas.openxmlformats.org/presentationml/2006/main">
+  <p:cSld>
+    <p:bg>
+      <p:bgPr>
+        <a:solidFill>
+          <a:srgbClr val="F4F7FB"/>
+        </a:solidFill>
+        <a:effectLst/>
+      </p:bgPr>
+    </p:bg>
+    <p:spTree>
+      <p:nvGrpSpPr>
+        <p:cNvPr id="1" name=""/>
+        <p:cNvGrpSpPr/>
+        <p:nvPr/>
+      </p:nvGrpSpPr>
+      <p:grpSpPr>
+        <a:xfrm>
+          <a:off x="0" y="0"/>
+          <a:ext cx="0" cy="0"/>
+          <a:chOff x="0" y="0"/>
+          <a:chExt cx="0" cy="0"/>
+        </a:xfrm>
+      </p:grpSpPr>
+      <p:sp>
+        <p:nvSpPr>
+          <p:cNvPr id="100093" name="TextBox 1"/>
+          <p:cNvSpPr txBox="1"/>
+          <p:nvPr/>
+        </p:nvSpPr>
+        <p:spPr>
+          <a:xfrm>
+            <a:off x="540000" y="468000"/>
+            <a:ext cx="10800000" cy="792000"/>
+          </a:xfrm>
+          <a:prstGeom prst="rect">
+            <a:avLst/>
+          </a:prstGeom>
+          <a:noFill/>
+        </p:spPr>
+        <p:txBody>
+          <a:bodyPr/>
+          <a:lstStyle/>
+          <a:p>
+            <a:pPr algn="ctr"/>
+            <a:r>
+              <a:rPr lang="en-US" sz="3600" b="1">
+                <a:solidFill>
+                  <a:srgbClr val="1B365D"/>
+                </a:solidFill>
+                <a:latin typeface="Trebuchet MS"/>
+                <a:ea typeface="Trebuchet MS"/>
+              </a:rPr>
+              <a:t>How it fits your stack</a:t>
+            </a:r>
+          </a:p>
+        </p:txBody>
+      </p:sp>
+      <p:sp>
+        <p:nvSpPr>
+          <p:cNvPr id="100094" name="Flow1"/>
+          <p:cNvSpPr/>
+          <p:nvPr/>
+        </p:nvSpPr>
+        <p:spPr>
+          <a:xfrm>
+            <a:off x="457200" y="1620000"/>
+            <a:ext cx="3577320" cy="2340000"/>
+          </a:xfrm>
+          <a:prstGeom prst="roundRect">
+            <a:avLst>
+              <a:gd name="adj" fmla="val 6000"/>
+            </a:avLst>
+          </a:prstGeom>
+          <a:solidFill>
+            <a:srgbClr val="FFFFFF"/>
+          </a:solidFill>
+          <a:ln w="25400">
+            <a:solidFill>
+              <a:srgbClr val="004C97"/>
+            </a:solidFill>
+          </a:ln>
+        </p:spPr>
+        <p:txBody>
+          <a:bodyPr/>
+          <a:lstStyle/>
+          <a:p>
+            <a:endParaRPr/>
+          </a:p>
+        </p:txBody>
+      </p:sp>
+      <p:sp>
+        <p:nvSpPr>
+          <p:cNvPr id="100095" name="TextBox 3"/>
+          <p:cNvSpPr/>
+          <p:nvPr/>
+        </p:nvSpPr>
+        <p:spPr>
+          <a:xfrm>
+            <a:off x="1886400" y="1872000"/>
+            <a:ext cx="720000" cy="720000"/>
+          </a:xfrm>
+          <a:prstGeom prst="ellipse">
+            <a:avLst/>
+          </a:prstGeom>
+          <a:solidFill>
+            <a:srgbClr val="004C97"/>
+          </a:solidFill>
+        </p:spPr>
+        <p:txBody>
+          <a:bodyPr/>
+          <a:lstStyle/>
+          <a:p>
+            <a:pPr algn="ctr"/>
+            <a:r>
+              <a:rPr lang="en-US" sz="2800" b="1">
+                <a:solidFill>
+                  <a:srgbClr val="FFFFFF"/>
+                </a:solidFill>
+                <a:latin typeface="Calibri"/>
+                <a:ea typeface="Calibri"/>
+              </a:rPr>
+              <a:t>1</a:t>
+            </a:r>
+          </a:p>
+        </p:txBody>
+      </p:sp>
+      <p:sp>
+        <p:nvSpPr>
+          <p:cNvPr id="100096" name="TextBox 4"/>
+          <p:cNvSpPr txBox="1"/>
+          <p:nvPr/>
+        </p:nvSpPr>
+        <p:spPr>
+          <a:xfrm>
+            <a:off x="457200" y="2772000"/>
+            <a:ext cx="3577320" cy="504000"/>
+          </a:xfrm>
+          <a:prstGeom prst="rect">
+            <a:avLst/>
+          </a:prstGeom>
+          <a:noFill/>
+        </p:spPr>
+        <p:txBody>
+          <a:bodyPr/>
+          <a:lstStyle/>
+          <a:p>
+            <a:pPr algn="ctr"/>
+            <a:r>
+              <a:rPr lang="en-US" sz="2600" b="1">
+                <a:solidFill>
+                  <a:srgbClr val="1B365D"/>
+                </a:solidFill>
+                <a:latin typeface="Trebuchet MS"/>
+                <a:ea typeface="Trebuchet MS"/>
+              </a:rPr>
+              <a:t>Connect</a:t>
+            </a:r>
+          </a:p>
+        </p:txBody>
+      </p:sp>
+      <p:sp>
+        <p:nvSpPr>
+          <p:cNvPr id="100097" name="TextBox 5"/>
+          <p:cNvSpPr txBox="1"/>
+          <p:nvPr/>
+        </p:nvSpPr>
+        <p:spPr>
+          <a:xfrm>
+            <a:off x="457200" y="3276000"/>
+            <a:ext cx="3577320" cy="360000"/>
+          </a:xfrm>
+          <a:prstGeom prst="rect">
+            <a:avLst/>
+          </a:prstGeom>
+          <a:noFill/>
+        </p:spPr>
+        <p:txBody>
+          <a:bodyPr/>
+          <a:lstStyle/>
+          <a:p>
+            <a:pPr algn="ctr"/>
+            <a:r>
+              <a:rPr lang="en-US" sz="1700">
+                <a:solidFill>
+                  <a:srgbClr val="0087AE"/>
+                </a:solidFill>
+                <a:latin typeface="Calibri"/>
+                <a:ea typeface="Calibri"/>
+              </a:rPr>
+              <a:t>via OpenTelemetry</a:t>
+            </a:r>
+          </a:p>
+        </p:txBody>
+      </p:sp>
+      <p:sp>
+        <p:nvSpPr>
+          <p:cNvPr id="100098" name="Flow2"/>
+          <p:cNvSpPr/>
+          <p:nvPr/>
+        </p:nvSpPr>
+        <p:spPr>
+          <a:xfrm>
+            <a:off x="4308120" y="1620000"/>
+            <a:ext cx="3577320" cy="2340000"/>
+          </a:xfrm>
+          <a:prstGeom prst="roundRect">
+            <a:avLst>
+              <a:gd name="adj" fmla="val 6000"/>
+            </a:avLst>
+          </a:prstGeom>
+          <a:solidFill>
+            <a:srgbClr val="FFFFFF"/>
+          </a:solidFill>
+          <a:ln w="25400">
+            <a:solidFill>
+              <a:srgbClr val="0087AE"/>
+            </a:solidFill>
+          </a:ln>
+        </p:spPr>
+        <p:txBody>
+          <a:bodyPr/>
+          <a:lstStyle/>
+          <a:p>
+            <a:endParaRPr/>
+          </a:p>
+        </p:txBody>
+      </p:sp>
+      <p:sp>
+        <p:nvSpPr>
+          <p:cNvPr id="100099" name="TextBox 7"/>
+          <p:cNvSpPr/>
+          <p:nvPr/>
+        </p:nvSpPr>
+        <p:spPr>
+          <a:xfrm>
+            <a:off x="5737320" y="1872000"/>
+            <a:ext cx="720000" cy="720000"/>
+          </a:xfrm>
+          <a:prstGeom prst="ellipse">
+            <a:avLst/>
+          </a:prstGeom>
+          <a:solidFill>
+            <a:srgbClr val="0087AE"/>
+          </a:solidFill>
+        </p:spPr>
+        <p:txBody>
+          <a:bodyPr/>
+          <a:lstStyle/>
+          <a:p>
+            <a:pPr algn="ctr"/>
+            <a:r>
+              <a:rPr lang="en-US" sz="2800" b="1">
+                <a:solidFill>
+                  <a:srgbClr val="FFFFFF"/>
+                </a:solidFill>
+                <a:latin typeface="Calibri"/>
+                <a:ea typeface="Calibri"/>
+              </a:rPr>
+              <a:t>2</a:t>
+            </a:r>
+          </a:p>
+        </p:txBody>
+      </p:sp>
+      <p:sp>
+        <p:nvSpPr>
+          <p:cNvPr id="100100" name="TextBox 8"/>
+          <p:cNvSpPr txBox="1"/>
+          <p:nvPr/>
+        </p:nvSpPr>
+        <p:spPr>
+          <a:xfrm>
+            <a:off x="4308120" y="2772000"/>
+            <a:ext cx="3577320" cy="504000"/>
+          </a:xfrm>
+          <a:prstGeom prst="rect">
+            <a:avLst/>
+          </a:prstGeom>
+          <a:noFill/>
+        </p:spPr>
+        <p:txBody>
+          <a:bodyPr/>
+          <a:lstStyle/>
+          <a:p>
+            <a:pPr algn="ctr"/>
+            <a:r>
+              <a:rPr lang="en-US" sz="2600" b="1">
+                <a:solidFill>
+                  <a:srgbClr val="1B365D"/>
+                </a:solidFill>
+                <a:latin typeface="Trebuchet MS"/>
+                <a:ea typeface="Trebuchet MS"/>
+              </a:rPr>
+              <a:t>Gate</a:t>
+            </a:r>
+          </a:p>
+        </p:txBody>
+      </p:sp>
+      <p:sp>
+        <p:nvSpPr>
+          <p:cNvPr id="100101" name="TextBox 9"/>
+          <p:cNvSpPr txBox="1"/>
+          <p:nvPr/>
+        </p:nvSpPr>
+        <p:spPr>
+          <a:xfrm>
+            <a:off x="4308120" y="3276000"/>
+            <a:ext cx="3577320" cy="360000"/>
+          </a:xfrm>
+          <a:prstGeom prst="rect">
+            <a:avLst/>
+          </a:prstGeom>
+          <a:noFill/>
+        </p:spPr>
+        <p:txBody>
+          <a:bodyPr/>
+          <a:lstStyle/>
+          <a:p>
+            <a:pPr algn="ctr"/>
+            <a:r>
+              <a:rPr lang="en-US" sz="1700">
+                <a:solidFill>
+                  <a:srgbClr val="0087AE"/>
+                </a:solidFill>
+                <a:latin typeface="Calibri"/>
+                <a:ea typeface="Calibri"/>
+              </a:rPr>
+              <a:t>your CI pipeline</a:t>
+            </a:r>
+          </a:p>
+        </p:txBody>
+      </p:sp>
+      <p:sp>
+        <p:nvSpPr>
+          <p:cNvPr id="100102" name="Flow3"/>
+          <p:cNvSpPr/>
+          <p:nvPr/>
+        </p:nvSpPr>
+        <p:spPr>
+          <a:xfrm>
+            <a:off x="8159040" y="1620000"/>
+            <a:ext cx="3577320" cy="2340000"/>
+          </a:xfrm>
+          <a:prstGeom prst="roundRect">
+            <a:avLst>
+              <a:gd name="adj" fmla="val 6000"/>
+            </a:avLst>
+          </a:prstGeom>
+          <a:solidFill>
+            <a:srgbClr val="FFFFFF"/>
+          </a:solidFill>
+          <a:ln w="25400">
+            <a:solidFill>
+              <a:srgbClr val="FF6C0E"/>
+            </a:solidFill>
+          </a:ln>
+        </p:spPr>
+        <p:txBody>
+          <a:bodyPr/>
+          <a:lstStyle/>
+          <a:p>
+            <a:endParaRPr/>
+          </a:p>
+        </p:txBody>
+      </p:sp>
+      <p:sp>
+        <p:nvSpPr>
+          <p:cNvPr id="100103" name="TextBox 11"/>
+          <p:cNvSpPr/>
+          <p:nvPr/>
+        </p:nvSpPr>
+        <p:spPr>
+          <a:xfrm>
+            <a:off x="9588240" y="1872000"/>
+            <a:ext cx="720000" cy="720000"/>
+          </a:xfrm>
+          <a:prstGeom prst="ellipse">
+            <a:avLst/>
+          </a:prstGeom>
+          <a:solidFill>
+            <a:srgbClr val="FF6C0E"/>
+          </a:solidFill>
+        </p:spPr>
+        <p:txBody>
+          <a:bodyPr/>
+          <a:lstStyle/>
+          <a:p>
+            <a:pPr algn="ctr"/>
+            <a:r>
+              <a:rPr lang="en-US" sz="2800" b="1">
+                <a:solidFill>
+                  <a:srgbClr val="FFFFFF"/>
+                </a:solidFill>
+                <a:latin typeface="Calibri"/>
+                <a:ea typeface="Calibri"/>
+              </a:rPr>
+              <a:t>3</a:t>
+            </a:r>
+          </a:p>
+        </p:txBody>
+      </p:sp>
+      <p:sp>
+        <p:nvSpPr>
+          <p:cNvPr id="100104" name="TextBox 12"/>
+          <p:cNvSpPr txBox="1"/>
+          <p:nvPr/>
+        </p:nvSpPr>
+        <p:spPr>
+          <a:xfrm>
+            <a:off x="8159040" y="2772000"/>
+            <a:ext cx="3577320" cy="504000"/>
+          </a:xfrm>
+          <a:prstGeom prst="rect">
+            <a:avLst/>
+          </a:prstGeom>
+          <a:noFill/>
+        </p:spPr>
+        <p:txBody>
+          <a:bodyPr/>
+          <a:lstStyle/>
+          <a:p>
+            <a:pPr algn="ctr"/>
+            <a:r>
+              <a:rPr lang="en-US" sz="2600" b="1">
+                <a:solidFill>
+                  <a:srgbClr val="1B365D"/>
+                </a:solidFill>
+                <a:latin typeface="Trebuchet MS"/>
+                <a:ea typeface="Trebuchet MS"/>
+              </a:rPr>
+              <a:t>Track</a:t>
+            </a:r>
+          </a:p>
+        </p:txBody>
+      </p:sp>
+      <p:sp>
+        <p:nvSpPr>
+          <p:cNvPr id="100105" name="TextBox 13"/>
+          <p:cNvSpPr txBox="1"/>
+          <p:nvPr/>
+        </p:nvSpPr>
+        <p:spPr>
+          <a:xfrm>
+            <a:off x="8159040" y="3276000"/>
+            <a:ext cx="3577320" cy="360000"/>
+          </a:xfrm>
+          <a:prstGeom prst="rect">
+            <a:avLst/>
+          </a:prstGeom>
+          <a:noFill/>
+        </p:spPr>
+        <p:txBody>
+          <a:bodyPr/>
+          <a:lstStyle/>
+          <a:p>
+            <a:pPr algn="ctr"/>
+            <a:r>
+              <a:rPr lang="en-US" sz="1700">
+                <a:solidFill>
+                  <a:srgbClr val="0087AE"/>
+                </a:solidFill>
+                <a:latin typeface="Calibri"/>
+                <a:ea typeface="Calibri"/>
+              </a:rPr>
+              <a:t>quality over time</a:t>
+            </a:r>
+          </a:p>
+        </p:txBody>
+      </p:sp>
+      <p:cxnSp>
+        <p:nvCxnSpPr>
+          <p:cNvPr id="100106" name="Connector 1"/>
+          <p:cNvCxnSpPr>
+            <a:stCxn id="100094" idx="0"/>
+            <a:endCxn id="100098" idx="0"/>
+          </p:cNvCxnSpPr>
+          <p:nvPr/>
+        </p:nvCxnSpPr>
+        <p:spPr>
+          <a:xfrm>
+            <a:off x="4034520" y="2790000"/>
+            <a:ext cx="273600" cy="0"/>
+          </a:xfrm>
+          <a:prstGeom prst="straightConnector1">
+            <a:avLst/>
+          </a:prstGeom>
+          <a:ln w="25400">
+            <a:solidFill>
+              <a:srgbClr val="1B365D"/>
+            </a:solidFill>
+            <a:tailEnd type="triangle"/>
+          </a:ln>
+        </p:spPr>
+      </p:cxnSp>
+      <p:cxnSp>
+        <p:nvCxnSpPr>
+          <p:cNvPr id="100107" name="Connector 2"/>
+          <p:cNvCxnSpPr>
+            <a:stCxn id="100098" idx="0"/>
+            <a:endCxn id="100102" idx="0"/>
+          </p:cNvCxnSpPr>
+          <p:nvPr/>
+        </p:nvCxnSpPr>
+        <p:spPr>
+          <a:xfrm>
+            <a:off x="7885440" y="2790000"/>
+            <a:ext cx="273600" cy="0"/>
+          </a:xfrm>
+          <a:prstGeom prst="straightConnector1">
+            <a:avLst/>
+          </a:prstGeom>
+          <a:ln w="25400">
+            <a:solidFill>
+              <a:srgbClr val="1B365D"/>
+            </a:solidFill>
+            <a:tailEnd type="triangle"/>
+          </a:ln>
+        </p:spPr>
+      </p:cxnSp>
+      <p:sp>
+        <p:nvSpPr>
+          <p:cNvPr id="100108" name="TextBox 14"/>
+          <p:cNvSpPr txBox="1"/>
+          <p:nvPr/>
+        </p:nvSpPr>
+        <p:spPr>
+          <a:xfrm>
+            <a:off x="720000" y="4536000"/>
+            <a:ext cx="10753200" cy="504000"/>
+          </a:xfrm>
+          <a:prstGeom prst="rect">
+            <a:avLst/>
+          </a:prstGeom>
+          <a:noFill/>
+        </p:spPr>
+        <p:txBody>
+          <a:bodyPr/>
+          <a:lstStyle/>
+          <a:p>
+            <a:pPr algn="ctr"/>
+            <a:r>
+              <a:rPr lang="en-US" sz="2000">
+                <a:solidFill>
+                  <a:srgbClr val="333333"/>
+                </a:solidFill>
+                <a:latin typeface="Calibri"/>
+                <a:ea typeface="Calibri"/>
+              </a:rPr>
+              <a:t>Surfaced inside Tosca, qTest, and AI Workspace – no new tool to learn.</a:t>
+            </a:r>
+          </a:p>
+        </p:txBody>
+      </p:sp>
+      <p:sp>
+        <p:nvSpPr>
+          <p:cNvPr id="100109" name="TextBox 15"/>
+          <p:cNvSpPr txBox="1"/>
+          <p:nvPr/>
+        </p:nvSpPr>
+        <p:spPr>
+          <a:xfrm>
+            <a:off x="720000" y="5184000"/>
+            <a:ext cx="10753200" cy="648000"/>
+          </a:xfrm>
+          <a:prstGeom prst="rect">
+            <a:avLst/>
+          </a:prstGeom>
+          <a:noFill/>
+        </p:spPr>
+        <p:txBody>
+          <a:bodyPr/>
+          <a:lstStyle/>
+          <a:p>
+            <a:pPr algn="ctr"/>
+            <a:r>
+              <a:rPr lang="en-US" sz="2800" b="1">
+                <a:solidFill>
+                  <a:srgbClr val="FF6C0E"/>
+                </a:solidFill>
+                <a:latin typeface="Trebuchet MS"/>
+                <a:ea typeface="Trebuchet MS"/>
+              </a:rPr>
+              <a:t>One shared standard, for every agent, on every team.</a:t>
+            </a:r>
+          </a:p>
+        </p:txBody>
+      </p:sp>
+    </p:spTree>
+  </p:cSld>
+  <p:clrMapOvr>
+    <a:masterClrMapping/>
+  </p:clrMapOvr>
+</p:sld>
+</file>
+
+<file path=ppt/slides/slide12.xml><?xml version="1.0" encoding="utf-8"?>
+<p:sld xmlns:a="http://schemas.openxmlformats.org/drawingml/2006/main" xmlns:r="http://schemas.openxmlformats.org/officeDocument/2006/relationships" xmlns:p="http://schemas.openxmlformats.org/presentationml/2006/main">
+  <p:cSld>
+    <p:bg>
+      <p:bgPr>
+        <a:solidFill>
+          <a:srgbClr val="FFFFFF"/>
+        </a:solidFill>
+        <a:effectLst/>
+      </p:bgPr>
+    </p:bg>
+    <p:spTree>
+      <p:nvGrpSpPr>
+        <p:cNvPr id="1" name=""/>
+        <p:cNvGrpSpPr/>
+        <p:nvPr/>
+      </p:nvGrpSpPr>
+      <p:grpSpPr>
+        <a:xfrm>
+          <a:off x="0" y="0"/>
+          <a:ext cx="0" cy="0"/>
+          <a:chOff x="0" y="0"/>
+          <a:chExt cx="0" cy="0"/>
+        </a:xfrm>
+      </p:grpSpPr>
+      <p:sp>
+        <p:nvSpPr>
+          <p:cNvPr id="100110" name="TextBox 1"/>
+          <p:cNvSpPr txBox="1"/>
+          <p:nvPr/>
+        </p:nvSpPr>
+        <p:spPr>
+          <a:xfrm>
+            <a:off x="540000" y="432000"/>
+            <a:ext cx="10800000" cy="720000"/>
+          </a:xfrm>
+          <a:prstGeom prst="rect">
+            <a:avLst/>
+          </a:prstGeom>
+          <a:noFill/>
+        </p:spPr>
+        <p:txBody>
+          <a:bodyPr/>
+          <a:lstStyle/>
+          <a:p>
+            <a:r>
+              <a:rPr lang="en-US" sz="3400" b="1">
+                <a:solidFill>
+                  <a:srgbClr val="1B365D"/>
+                </a:solidFill>
+                <a:latin typeface="Trebuchet MS"/>
+                <a:ea typeface="Trebuchet MS"/>
+              </a:rPr>
+              <a:t>Why AgentScore</a:t>
+            </a:r>
+          </a:p>
+        </p:txBody>
+      </p:sp>
+      <p:graphicFrame>
+        <p:nvGraphicFramePr>
+          <p:cNvPr id="100111" name="Table 1"/>
+          <p:cNvGraphicFramePr/>
+          <p:nvPr/>
+        </p:nvGraphicFramePr>
+        <p:xfrm>
+          <a:off x="540000" y="1296000"/>
+          <a:ext cx="11113200" cy="5040000"/>
+        </p:xfrm>
+        <a:graphic>
+          <a:graphicData uri="http://schemas.openxmlformats.org/drawingml/2006/table">
+            <a:tbl>
+              <a:tblPr firstRow="1" bandRow="1">
+                <a:tableStyleId>{2D5ABB26-0587-4C30-8999-92F81FD0307C}</a:tableStyleId>
+              </a:tblPr>
+              <a:tblGrid>
+                <a:gridCol w="3960000">
+                  <a:extLst>
+                    <a:ext uri="{9D8B030D-6E8A-4147-A177-3AD203B41FA5}">
+                      <a16:colId xmlns:a16="http://schemas.microsoft.com/office/drawing/2014/main" val="20000"/>
+                    </a:ext>
+                  </a:extLst>
+                </a:gridCol>
+                <a:gridCol w="7153200">
+                  <a:extLst>
+                    <a:ext uri="{9D8B030D-6E8A-4147-A177-3AD203B41FA5}">
+                      <a16:colId xmlns:a16="http://schemas.microsoft.com/office/drawing/2014/main" val="20001"/>
+                    </a:ext>
+                  </a:extLst>
+                </a:gridCol>
+              </a:tblGrid>
+              <a:tr h="630000">
                 <a:tc>
                   <a:txBody>
                     <a:bodyPr/>
@@ -2653,7 +3829,7 @@
                   </a:ext>
                 </a:extLst>
               </a:tr>
-              <a:tr h="709714">
+              <a:tr h="630000">
                 <a:tc>
                   <a:txBody>
                     <a:bodyPr/>
@@ -2702,7 +3878,7 @@
                   </a:ext>
                 </a:extLst>
               </a:tr>
-              <a:tr h="709714">
+              <a:tr h="630000">
                 <a:tc>
                   <a:txBody>
                     <a:bodyPr/>
@@ -2751,7 +3927,7 @@
                   </a:ext>
                 </a:extLst>
               </a:tr>
-              <a:tr h="709714">
+              <a:tr h="630000">
                 <a:tc>
                   <a:txBody>
                     <a:bodyPr/>
@@ -2800,7 +3976,7 @@
                   </a:ext>
                 </a:extLst>
               </a:tr>
-              <a:tr h="709714">
+              <a:tr h="630000">
                 <a:tc>
                   <a:txBody>
                     <a:bodyPr/>
@@ -2849,7 +4025,7 @@
                   </a:ext>
                 </a:extLst>
               </a:tr>
-              <a:tr h="709714">
+              <a:tr h="630000">
                 <a:tc>
                   <a:txBody>
                     <a:bodyPr/>
@@ -2898,7 +4074,7 @@
                   </a:ext>
                 </a:extLst>
               </a:tr>
-              <a:tr h="709714">
+              <a:tr h="630000">
                 <a:tc>
                   <a:txBody>
                     <a:bodyPr/>
@@ -2947,787 +4123,59 @@
                   </a:ext>
                 </a:extLst>
               </a:tr>
+              <a:tr h="630000">
+                <a:tc>
+                  <a:txBody>
+                    <a:bodyPr/>
+                    <a:lstStyle/>
+                    <a:p>
+                      <a:r>
+                        <a:rPr lang="en-US" sz="1600" b="1">
+                          <a:solidFill>
+                            <a:srgbClr val="1B365D"/>
+                          </a:solidFill>
+                        </a:rPr>
+                        <a:t>Golden-dataset curation</a:t>
+                      </a:r>
+                    </a:p>
+                  </a:txBody>
+                  <a:tcPr anchor="ctr">
+                    <a:solidFill>
+                      <a:srgbClr val="F4F7FB"/>
+                    </a:solidFill>
+                  </a:tcPr>
+                </a:tc>
+                <a:tc>
+                  <a:txBody>
+                    <a:bodyPr/>
+                    <a:lstStyle/>
+                    <a:p>
+                      <a:r>
+                        <a:rPr lang="en-US" sz="1600">
+                          <a:solidFill>
+                            <a:srgbClr val="333333"/>
+                          </a:solidFill>
+                        </a:rPr>
+                        <a:t>Admin-curated example sets anchor scoring to real judgment calls – not just statistical averages</a:t>
+                      </a:r>
+                    </a:p>
+                  </a:txBody>
+                  <a:tcPr anchor="ctr">
+                    <a:solidFill>
+                      <a:srgbClr val="F4F7FB"/>
+                    </a:solidFill>
+                  </a:tcPr>
+                </a:tc>
+                <a:extLst>
+                  <a:ext uri="{0D108BD9-81ED-4DB2-BD59-A6C34878D82A}">
+                    <a16:rowId xmlns:a16="http://schemas.microsoft.com/office/drawing/2014/main" val="10007"/>
+                  </a:ext>
+                </a:extLst>
+              </a:tr>
             </a:tbl>
           </a:graphicData>
         </a:graphic>
       </p:graphicFrame>
-    </p:spTree>
-  </p:cSld>
-  <p:clrMapOvr>
-    <a:masterClrMapping/>
-  </p:clrMapOvr>
-</p:sld>
-</file>
-
-<file path=ppt/slides/slide11.xml><?xml version="1.0" encoding="utf-8"?>
-<p:sld xmlns:a="http://schemas.openxmlformats.org/drawingml/2006/main" xmlns:r="http://schemas.openxmlformats.org/officeDocument/2006/relationships" xmlns:p="http://schemas.openxmlformats.org/presentationml/2006/main">
-  <p:cSld>
-    <p:bg>
-      <p:bgPr>
-        <a:solidFill>
-          <a:srgbClr val="F4F7FB"/>
-        </a:solidFill>
-        <a:effectLst/>
-      </p:bgPr>
-    </p:bg>
-    <p:spTree>
-      <p:nvGrpSpPr>
-        <p:cNvPr id="1" name=""/>
-        <p:cNvGrpSpPr/>
-        <p:nvPr/>
-      </p:nvGrpSpPr>
-      <p:grpSpPr>
-        <a:xfrm>
-          <a:off x="0" y="0"/>
-          <a:ext cx="0" cy="0"/>
-          <a:chOff x="0" y="0"/>
-          <a:chExt cx="0" cy="0"/>
-        </a:xfrm>
-      </p:grpSpPr>
-      <p:sp>
-        <p:nvSpPr>
-          <p:cNvPr id="100112" name="TextBox 1"/>
-          <p:cNvSpPr txBox="1"/>
-          <p:nvPr/>
-        </p:nvSpPr>
-        <p:spPr>
-          <a:xfrm>
-            <a:off x="540000" y="468000"/>
-            <a:ext cx="10800000" cy="792000"/>
-          </a:xfrm>
-          <a:prstGeom prst="rect">
-            <a:avLst/>
-          </a:prstGeom>
-          <a:noFill/>
-        </p:spPr>
-        <p:txBody>
-          <a:bodyPr/>
-          <a:lstStyle/>
-          <a:p>
-            <a:r>
-              <a:rPr lang="en-US" sz="3600" b="1">
-                <a:solidFill>
-                  <a:srgbClr val="1B365D"/>
-                </a:solidFill>
-                <a:latin typeface="Trebuchet MS"/>
-                <a:ea typeface="Trebuchet MS"/>
-              </a:rPr>
-              <a:t>Path to value</a:t>
-            </a:r>
-          </a:p>
-        </p:txBody>
-      </p:sp>
-      <p:sp>
-        <p:nvSpPr>
-          <p:cNvPr id="100113" name="TextBox 2"/>
-          <p:cNvSpPr/>
-          <p:nvPr/>
-        </p:nvSpPr>
-        <p:spPr>
-          <a:xfrm>
-            <a:off x="900000" y="1656000"/>
-            <a:ext cx="720000" cy="720000"/>
-          </a:xfrm>
-          <a:prstGeom prst="ellipse">
-            <a:avLst/>
-          </a:prstGeom>
-          <a:solidFill>
-            <a:srgbClr val="004C97"/>
-          </a:solidFill>
-        </p:spPr>
-        <p:txBody>
-          <a:bodyPr/>
-          <a:lstStyle/>
-          <a:p>
-            <a:pPr algn="ctr"/>
-            <a:r>
-              <a:rPr lang="en-US" sz="2600" b="1">
-                <a:solidFill>
-                  <a:srgbClr val="FFFFFF"/>
-                </a:solidFill>
-                <a:latin typeface="Calibri"/>
-                <a:ea typeface="Calibri"/>
-              </a:rPr>
-              <a:t>1</a:t>
-            </a:r>
-          </a:p>
-        </p:txBody>
-      </p:sp>
-      <p:sp>
-        <p:nvSpPr>
-          <p:cNvPr id="100114" name="TextBox 3"/>
-          <p:cNvSpPr txBox="1"/>
-          <p:nvPr/>
-        </p:nvSpPr>
-        <p:spPr>
-          <a:xfrm>
-            <a:off x="1908000" y="1620000"/>
-            <a:ext cx="9000000" cy="468000"/>
-          </a:xfrm>
-          <a:prstGeom prst="rect">
-            <a:avLst/>
-          </a:prstGeom>
-          <a:noFill/>
-        </p:spPr>
-        <p:txBody>
-          <a:bodyPr/>
-          <a:lstStyle/>
-          <a:p>
-            <a:r>
-              <a:rPr lang="en-US" sz="2200" b="1">
-                <a:solidFill>
-                  <a:srgbClr val="1B365D"/>
-                </a:solidFill>
-                <a:latin typeface="Trebuchet MS"/>
-                <a:ea typeface="Trebuchet MS"/>
-              </a:rPr>
-              <a:t>Connect your OTel traces</a:t>
-            </a:r>
-          </a:p>
-        </p:txBody>
-      </p:sp>
-      <p:sp>
-        <p:nvSpPr>
-          <p:cNvPr id="100115" name="TextBox 4"/>
-          <p:cNvSpPr txBox="1"/>
-          <p:nvPr/>
-        </p:nvSpPr>
-        <p:spPr>
-          <a:xfrm>
-            <a:off x="1908000" y="2088000"/>
-            <a:ext cx="9000000" cy="666000"/>
-          </a:xfrm>
-          <a:prstGeom prst="rect">
-            <a:avLst/>
-          </a:prstGeom>
-          <a:noFill/>
-        </p:spPr>
-        <p:txBody>
-          <a:bodyPr/>
-          <a:lstStyle/>
-          <a:p>
-            <a:r>
-              <a:rPr lang="en-US" sz="1800">
-                <a:solidFill>
-                  <a:srgbClr val="333333"/>
-                </a:solidFill>
-                <a:latin typeface="Calibri"/>
-                <a:ea typeface="Calibri"/>
-              </a:rPr>
-              <a:t>No code changes to the agent itself – plug in the exporter you likely already have.</a:t>
-            </a:r>
-          </a:p>
-        </p:txBody>
-      </p:sp>
-      <p:sp>
-        <p:nvSpPr>
-          <p:cNvPr id="100116" name="TextBox 5"/>
-          <p:cNvSpPr/>
-          <p:nvPr/>
-        </p:nvSpPr>
-        <p:spPr>
-          <a:xfrm>
-            <a:off x="900000" y="3024000"/>
-            <a:ext cx="720000" cy="720000"/>
-          </a:xfrm>
-          <a:prstGeom prst="ellipse">
-            <a:avLst/>
-          </a:prstGeom>
-          <a:solidFill>
-            <a:srgbClr val="0087AE"/>
-          </a:solidFill>
-        </p:spPr>
-        <p:txBody>
-          <a:bodyPr/>
-          <a:lstStyle/>
-          <a:p>
-            <a:pPr algn="ctr"/>
-            <a:r>
-              <a:rPr lang="en-US" sz="2600" b="1">
-                <a:solidFill>
-                  <a:srgbClr val="FFFFFF"/>
-                </a:solidFill>
-                <a:latin typeface="Calibri"/>
-                <a:ea typeface="Calibri"/>
-              </a:rPr>
-              <a:t>2</a:t>
-            </a:r>
-          </a:p>
-        </p:txBody>
-      </p:sp>
-      <p:sp>
-        <p:nvSpPr>
-          <p:cNvPr id="100117" name="TextBox 6"/>
-          <p:cNvSpPr txBox="1"/>
-          <p:nvPr/>
-        </p:nvSpPr>
-        <p:spPr>
-          <a:xfrm>
-            <a:off x="1908000" y="2988000"/>
-            <a:ext cx="9000000" cy="468000"/>
-          </a:xfrm>
-          <a:prstGeom prst="rect">
-            <a:avLst/>
-          </a:prstGeom>
-          <a:noFill/>
-        </p:spPr>
-        <p:txBody>
-          <a:bodyPr/>
-          <a:lstStyle/>
-          <a:p>
-            <a:r>
-              <a:rPr lang="en-US" sz="2200" b="1">
-                <a:solidFill>
-                  <a:srgbClr val="1B365D"/>
-                </a:solidFill>
-                <a:latin typeface="Trebuchet MS"/>
-                <a:ea typeface="Trebuchet MS"/>
-              </a:rPr>
-              <a:t>Get a scored baseline in days</a:t>
-            </a:r>
-          </a:p>
-        </p:txBody>
-      </p:sp>
-      <p:sp>
-        <p:nvSpPr>
-          <p:cNvPr id="100118" name="TextBox 7"/>
-          <p:cNvSpPr txBox="1"/>
-          <p:nvPr/>
-        </p:nvSpPr>
-        <p:spPr>
-          <a:xfrm>
-            <a:off x="1908000" y="3456000"/>
-            <a:ext cx="9000000" cy="666000"/>
-          </a:xfrm>
-          <a:prstGeom prst="rect">
-            <a:avLst/>
-          </a:prstGeom>
-          <a:noFill/>
-        </p:spPr>
-        <p:txBody>
-          <a:bodyPr/>
-          <a:lstStyle/>
-          <a:p>
-            <a:r>
-              <a:rPr lang="en-US" sz="1800">
-                <a:solidFill>
-                  <a:srgbClr val="333333"/>
-                </a:solidFill>
-                <a:latin typeface="Calibri"/>
-                <a:ea typeface="Calibri"/>
-              </a:rPr>
-              <a:t>Dimension scores and verdicts start surfacing as soon as sessions are ingested.</a:t>
-            </a:r>
-          </a:p>
-        </p:txBody>
-      </p:sp>
-      <p:sp>
-        <p:nvSpPr>
-          <p:cNvPr id="100119" name="TextBox 8"/>
-          <p:cNvSpPr/>
-          <p:nvPr/>
-        </p:nvSpPr>
-        <p:spPr>
-          <a:xfrm>
-            <a:off x="900000" y="4392000"/>
-            <a:ext cx="720000" cy="720000"/>
-          </a:xfrm>
-          <a:prstGeom prst="ellipse">
-            <a:avLst/>
-          </a:prstGeom>
-          <a:solidFill>
-            <a:srgbClr val="FF6C0E"/>
-          </a:solidFill>
-        </p:spPr>
-        <p:txBody>
-          <a:bodyPr/>
-          <a:lstStyle/>
-          <a:p>
-            <a:pPr algn="ctr"/>
-            <a:r>
-              <a:rPr lang="en-US" sz="2600" b="1">
-                <a:solidFill>
-                  <a:srgbClr val="FFFFFF"/>
-                </a:solidFill>
-                <a:latin typeface="Calibri"/>
-                <a:ea typeface="Calibri"/>
-              </a:rPr>
-              <a:t>3</a:t>
-            </a:r>
-          </a:p>
-        </p:txBody>
-      </p:sp>
-      <p:sp>
-        <p:nvSpPr>
-          <p:cNvPr id="100120" name="TextBox 9"/>
-          <p:cNvSpPr txBox="1"/>
-          <p:nvPr/>
-        </p:nvSpPr>
-        <p:spPr>
-          <a:xfrm>
-            <a:off x="1908000" y="4356000"/>
-            <a:ext cx="9000000" cy="468000"/>
-          </a:xfrm>
-          <a:prstGeom prst="rect">
-            <a:avLst/>
-          </a:prstGeom>
-          <a:noFill/>
-        </p:spPr>
-        <p:txBody>
-          <a:bodyPr/>
-          <a:lstStyle/>
-          <a:p>
-            <a:r>
-              <a:rPr lang="en-US" sz="2200" b="1">
-                <a:solidFill>
-                  <a:srgbClr val="1B365D"/>
-                </a:solidFill>
-                <a:latin typeface="Trebuchet MS"/>
-                <a:ea typeface="Trebuchet MS"/>
-              </a:rPr>
-              <a:t>Define pilot success together</a:t>
-            </a:r>
-          </a:p>
-        </p:txBody>
-      </p:sp>
-      <p:sp>
-        <p:nvSpPr>
-          <p:cNvPr id="100121" name="TextBox 10"/>
-          <p:cNvSpPr txBox="1"/>
-          <p:nvPr/>
-        </p:nvSpPr>
-        <p:spPr>
-          <a:xfrm>
-            <a:off x="1908000" y="4824000"/>
-            <a:ext cx="9000000" cy="666000"/>
-          </a:xfrm>
-          <a:prstGeom prst="rect">
-            <a:avLst/>
-          </a:prstGeom>
-          <a:noFill/>
-        </p:spPr>
-        <p:txBody>
-          <a:bodyPr/>
-          <a:lstStyle/>
-          <a:p>
-            <a:r>
-              <a:rPr lang="en-US" sz="1800">
-                <a:solidFill>
-                  <a:srgbClr val="333333"/>
-                </a:solidFill>
-                <a:latin typeface="Calibri"/>
-                <a:ea typeface="Calibri"/>
-              </a:rPr>
-              <a:t>Sessions scored, ship / no-ship decisions informed, and time saved on manual root-cause work.</a:t>
-            </a:r>
-          </a:p>
-        </p:txBody>
-      </p:sp>
-    </p:spTree>
-  </p:cSld>
-  <p:clrMapOvr>
-    <a:masterClrMapping/>
-  </p:clrMapOvr>
-</p:sld>
-</file>
-
-<file path=ppt/slides/slide12.xml><?xml version="1.0" encoding="utf-8"?>
-<p:sld xmlns:a="http://schemas.openxmlformats.org/drawingml/2006/main" xmlns:r="http://schemas.openxmlformats.org/officeDocument/2006/relationships" xmlns:p="http://schemas.openxmlformats.org/presentationml/2006/main">
-  <p:cSld>
-    <p:bg>
-      <p:bgPr>
-        <a:solidFill>
-          <a:srgbClr val="FFFFFF"/>
-        </a:solidFill>
-        <a:effectLst/>
-      </p:bgPr>
-    </p:bg>
-    <p:spTree>
-      <p:nvGrpSpPr>
-        <p:cNvPr id="1" name=""/>
-        <p:cNvGrpSpPr/>
-        <p:nvPr/>
-      </p:nvGrpSpPr>
-      <p:grpSpPr>
-        <a:xfrm>
-          <a:off x="0" y="0"/>
-          <a:ext cx="0" cy="0"/>
-          <a:chOff x="0" y="0"/>
-          <a:chExt cx="0" cy="0"/>
-        </a:xfrm>
-      </p:grpSpPr>
-      <p:sp>
-        <p:nvSpPr>
-          <p:cNvPr id="100122" name="TextBox 1"/>
-          <p:cNvSpPr txBox="1"/>
-          <p:nvPr/>
-        </p:nvSpPr>
-        <p:spPr>
-          <a:xfrm>
-            <a:off x="540000" y="468000"/>
-            <a:ext cx="10800000" cy="792000"/>
-          </a:xfrm>
-          <a:prstGeom prst="rect">
-            <a:avLst/>
-          </a:prstGeom>
-          <a:noFill/>
-        </p:spPr>
-        <p:txBody>
-          <a:bodyPr/>
-          <a:lstStyle/>
-          <a:p>
-            <a:r>
-              <a:rPr lang="en-US" sz="3600" b="1">
-                <a:solidFill>
-                  <a:srgbClr val="1B365D"/>
-                </a:solidFill>
-                <a:latin typeface="Trebuchet MS"/>
-                <a:ea typeface="Trebuchet MS"/>
-              </a:rPr>
-              <a:t>Packaging, directionally</a:t>
-            </a:r>
-          </a:p>
-        </p:txBody>
-      </p:sp>
-      <p:sp>
-        <p:nvSpPr>
-          <p:cNvPr id="100123" name="TextBox 2"/>
-          <p:cNvSpPr/>
-          <p:nvPr/>
-        </p:nvSpPr>
-        <p:spPr>
-          <a:xfrm>
-            <a:off x="900000" y="1656000"/>
-            <a:ext cx="720000" cy="720000"/>
-          </a:xfrm>
-          <a:prstGeom prst="ellipse">
-            <a:avLst/>
-          </a:prstGeom>
-          <a:solidFill>
-            <a:srgbClr val="004C97"/>
-          </a:solidFill>
-        </p:spPr>
-        <p:txBody>
-          <a:bodyPr/>
-          <a:lstStyle/>
-          <a:p>
-            <a:pPr algn="ctr"/>
-            <a:r>
-              <a:rPr lang="en-US" sz="2600" b="1">
-                <a:solidFill>
-                  <a:srgbClr val="FFFFFF"/>
-                </a:solidFill>
-                <a:latin typeface="Calibri"/>
-                <a:ea typeface="Calibri"/>
-              </a:rPr>
-              <a:t>1</a:t>
-            </a:r>
-          </a:p>
-        </p:txBody>
-      </p:sp>
-      <p:sp>
-        <p:nvSpPr>
-          <p:cNvPr id="100124" name="TextBox 3"/>
-          <p:cNvSpPr txBox="1"/>
-          <p:nvPr/>
-        </p:nvSpPr>
-        <p:spPr>
-          <a:xfrm>
-            <a:off x="1908000" y="1620000"/>
-            <a:ext cx="9000000" cy="468000"/>
-          </a:xfrm>
-          <a:prstGeom prst="rect">
-            <a:avLst/>
-          </a:prstGeom>
-          <a:noFill/>
-        </p:spPr>
-        <p:txBody>
-          <a:bodyPr/>
-          <a:lstStyle/>
-          <a:p>
-            <a:r>
-              <a:rPr lang="en-US" sz="2200" b="1">
-                <a:solidFill>
-                  <a:srgbClr val="1B365D"/>
-                </a:solidFill>
-                <a:latin typeface="Trebuchet MS"/>
-                <a:ea typeface="Trebuchet MS"/>
-              </a:rPr>
-              <a:t>Ingestion is free</a:t>
-            </a:r>
-          </a:p>
-        </p:txBody>
-      </p:sp>
-      <p:sp>
-        <p:nvSpPr>
-          <p:cNvPr id="100125" name="TextBox 4"/>
-          <p:cNvSpPr txBox="1"/>
-          <p:nvPr/>
-        </p:nvSpPr>
-        <p:spPr>
-          <a:xfrm>
-            <a:off x="1908000" y="2088000"/>
-            <a:ext cx="9000000" cy="666000"/>
-          </a:xfrm>
-          <a:prstGeom prst="rect">
-            <a:avLst/>
-          </a:prstGeom>
-          <a:noFill/>
-        </p:spPr>
-        <p:txBody>
-          <a:bodyPr/>
-          <a:lstStyle/>
-          <a:p>
-            <a:r>
-              <a:rPr lang="en-US" sz="1800">
-                <a:solidFill>
-                  <a:srgbClr val="333333"/>
-                </a:solidFill>
-                <a:latin typeface="Calibri"/>
-                <a:ea typeface="Calibri"/>
-              </a:rPr>
-              <a:t>No reason to gate the OpenTelemetry on-ramp – pipe in traces without limits.</a:t>
-            </a:r>
-          </a:p>
-        </p:txBody>
-      </p:sp>
-      <p:sp>
-        <p:nvSpPr>
-          <p:cNvPr id="100126" name="TextBox 5"/>
-          <p:cNvSpPr/>
-          <p:nvPr/>
-        </p:nvSpPr>
-        <p:spPr>
-          <a:xfrm>
-            <a:off x="900000" y="3024000"/>
-            <a:ext cx="720000" cy="720000"/>
-          </a:xfrm>
-          <a:prstGeom prst="ellipse">
-            <a:avLst/>
-          </a:prstGeom>
-          <a:solidFill>
-            <a:srgbClr val="0087AE"/>
-          </a:solidFill>
-        </p:spPr>
-        <p:txBody>
-          <a:bodyPr/>
-          <a:lstStyle/>
-          <a:p>
-            <a:pPr algn="ctr"/>
-            <a:r>
-              <a:rPr lang="en-US" sz="2600" b="1">
-                <a:solidFill>
-                  <a:srgbClr val="FFFFFF"/>
-                </a:solidFill>
-                <a:latin typeface="Calibri"/>
-                <a:ea typeface="Calibri"/>
-              </a:rPr>
-              <a:t>2</a:t>
-            </a:r>
-          </a:p>
-        </p:txBody>
-      </p:sp>
-      <p:sp>
-        <p:nvSpPr>
-          <p:cNvPr id="100127" name="TextBox 6"/>
-          <p:cNvSpPr txBox="1"/>
-          <p:nvPr/>
-        </p:nvSpPr>
-        <p:spPr>
-          <a:xfrm>
-            <a:off x="1908000" y="2988000"/>
-            <a:ext cx="9000000" cy="468000"/>
-          </a:xfrm>
-          <a:prstGeom prst="rect">
-            <a:avLst/>
-          </a:prstGeom>
-          <a:noFill/>
-        </p:spPr>
-        <p:txBody>
-          <a:bodyPr/>
-          <a:lstStyle/>
-          <a:p>
-            <a:r>
-              <a:rPr lang="en-US" sz="2200" b="1">
-                <a:solidFill>
-                  <a:srgbClr val="1B365D"/>
-                </a:solidFill>
-                <a:latin typeface="Trebuchet MS"/>
-                <a:ea typeface="Trebuchet MS"/>
-              </a:rPr>
-              <a:t>Scoring runs are the metered unit</a:t>
-            </a:r>
-          </a:p>
-        </p:txBody>
-      </p:sp>
-      <p:sp>
-        <p:nvSpPr>
-          <p:cNvPr id="100128" name="TextBox 7"/>
-          <p:cNvSpPr txBox="1"/>
-          <p:nvPr/>
-        </p:nvSpPr>
-        <p:spPr>
-          <a:xfrm>
-            <a:off x="1908000" y="3456000"/>
-            <a:ext cx="9000000" cy="468000"/>
-          </a:xfrm>
-          <a:prstGeom prst="rect">
-            <a:avLst/>
-          </a:prstGeom>
-          <a:noFill/>
-        </p:spPr>
-        <p:txBody>
-          <a:bodyPr/>
-          <a:lstStyle/>
-          <a:p>
-            <a:r>
-              <a:rPr lang="en-US" sz="1800">
-                <a:solidFill>
-                  <a:srgbClr val="333333"/>
-                </a:solidFill>
-                <a:latin typeface="Calibri"/>
-                <a:ea typeface="Calibri"/>
-              </a:rPr>
-              <a:t>Billed in credits, scaling with the number of LLM judge calls per run.</a:t>
-            </a:r>
-          </a:p>
-        </p:txBody>
-      </p:sp>
-      <p:sp>
-        <p:nvSpPr>
-          <p:cNvPr id="100129" name="TextBox 8"/>
-          <p:cNvSpPr/>
-          <p:nvPr/>
-        </p:nvSpPr>
-        <p:spPr>
-          <a:xfrm>
-            <a:off x="900000" y="4392000"/>
-            <a:ext cx="720000" cy="720000"/>
-          </a:xfrm>
-          <a:prstGeom prst="ellipse">
-            <a:avLst/>
-          </a:prstGeom>
-          <a:solidFill>
-            <a:srgbClr val="FF6C0E"/>
-          </a:solidFill>
-        </p:spPr>
-        <p:txBody>
-          <a:bodyPr/>
-          <a:lstStyle/>
-          <a:p>
-            <a:pPr algn="ctr"/>
-            <a:r>
-              <a:rPr lang="en-US" sz="2600" b="1">
-                <a:solidFill>
-                  <a:srgbClr val="FFFFFF"/>
-                </a:solidFill>
-                <a:latin typeface="Calibri"/>
-                <a:ea typeface="Calibri"/>
-              </a:rPr>
-              <a:t>3</a:t>
-            </a:r>
-          </a:p>
-        </p:txBody>
-      </p:sp>
-      <p:sp>
-        <p:nvSpPr>
-          <p:cNvPr id="100130" name="TextBox 9"/>
-          <p:cNvSpPr txBox="1"/>
-          <p:nvPr/>
-        </p:nvSpPr>
-        <p:spPr>
-          <a:xfrm>
-            <a:off x="1908000" y="4356000"/>
-            <a:ext cx="9000000" cy="468000"/>
-          </a:xfrm>
-          <a:prstGeom prst="rect">
-            <a:avLst/>
-          </a:prstGeom>
-          <a:noFill/>
-        </p:spPr>
-        <p:txBody>
-          <a:bodyPr/>
-          <a:lstStyle/>
-          <a:p>
-            <a:r>
-              <a:rPr lang="en-US" sz="2200" b="1">
-                <a:solidFill>
-                  <a:srgbClr val="1B365D"/>
-                </a:solidFill>
-                <a:latin typeface="Trebuchet MS"/>
-                <a:ea typeface="Trebuchet MS"/>
-              </a:rPr>
-              <a:t>Unlimited seats</a:t>
-            </a:r>
-          </a:p>
-        </p:txBody>
-      </p:sp>
-      <p:sp>
-        <p:nvSpPr>
-          <p:cNvPr id="100131" name="TextBox 10"/>
-          <p:cNvSpPr txBox="1"/>
-          <p:nvPr/>
-        </p:nvSpPr>
-        <p:spPr>
-          <a:xfrm>
-            <a:off x="1908000" y="4824000"/>
-            <a:ext cx="9000000" cy="468000"/>
-          </a:xfrm>
-          <a:prstGeom prst="rect">
-            <a:avLst/>
-          </a:prstGeom>
-          <a:noFill/>
-        </p:spPr>
-        <p:txBody>
-          <a:bodyPr/>
-          <a:lstStyle/>
-          <a:p>
-            <a:r>
-              <a:rPr lang="en-US" sz="1800">
-                <a:solidFill>
-                  <a:srgbClr val="333333"/>
-                </a:solidFill>
-                <a:latin typeface="Calibri"/>
-                <a:ea typeface="Calibri"/>
-              </a:rPr>
-              <a:t>Usage tracks agent and team footprint, not headcount.</a:t>
-            </a:r>
-          </a:p>
-        </p:txBody>
-      </p:sp>
-      <p:sp>
-        <p:nvSpPr>
-          <p:cNvPr id="100132" name="TextBox 11"/>
-          <p:cNvSpPr txBox="1"/>
-          <p:nvPr/>
-        </p:nvSpPr>
-        <p:spPr>
-          <a:xfrm>
-            <a:off x="540000" y="5760000"/>
-            <a:ext cx="10800000" cy="432000"/>
-          </a:xfrm>
-          <a:prstGeom prst="rect">
-            <a:avLst/>
-          </a:prstGeom>
-          <a:noFill/>
-        </p:spPr>
-        <p:txBody>
-          <a:bodyPr/>
-          <a:lstStyle/>
-          <a:p>
-            <a:r>
-              <a:rPr lang="en-US" sz="1400">
-                <a:solidFill>
-                  <a:srgbClr val="6B7B93"/>
-                </a:solidFill>
-                <a:latin typeface="Calibri"/>
-                <a:ea typeface="Calibri"/>
-              </a:rPr>
-              <a:t>Directional only – final pricing is not yet finalized.</a:t>
-            </a:r>
-          </a:p>
-        </p:txBody>
-      </p:sp>
     </p:spTree>
   </p:cSld>
   <p:clrMapOvr>
@@ -3763,7 +4211,7 @@
       </p:grpSpPr>
       <p:sp>
         <p:nvSpPr>
-          <p:cNvPr id="100133" name="TextBox 1"/>
+          <p:cNvPr id="100112" name="TextBox 1"/>
           <p:cNvSpPr txBox="1"/>
           <p:nvPr/>
         </p:nvSpPr>
@@ -3789,14 +4237,14 @@
                 <a:latin typeface="Trebuchet MS"/>
                 <a:ea typeface="Trebuchet MS"/>
               </a:rPr>
-              <a:t>What's next</a:t>
-            </a:r>
-          </a:p>
-        </p:txBody>
-      </p:sp>
-      <p:sp>
-        <p:nvSpPr>
-          <p:cNvPr id="100134" name="TextBox 2"/>
+              <a:t>Path to value</a:t>
+            </a:r>
+          </a:p>
+        </p:txBody>
+      </p:sp>
+      <p:sp>
+        <p:nvSpPr>
+          <p:cNvPr id="100113" name="TextBox 2"/>
           <p:cNvSpPr/>
           <p:nvPr/>
         </p:nvSpPr>
@@ -3832,7 +4280,7 @@
       </p:sp>
       <p:sp>
         <p:nvSpPr>
-          <p:cNvPr id="100135" name="TextBox 3"/>
+          <p:cNvPr id="100114" name="TextBox 3"/>
           <p:cNvSpPr txBox="1"/>
           <p:nvPr/>
         </p:nvSpPr>
@@ -3858,14 +4306,14 @@
                 <a:latin typeface="Trebuchet MS"/>
                 <a:ea typeface="Trebuchet MS"/>
               </a:rPr>
-              <a:t>Deeper CI/CD gating</a:t>
-            </a:r>
-          </a:p>
-        </p:txBody>
-      </p:sp>
-      <p:sp>
-        <p:nvSpPr>
-          <p:cNvPr id="100136" name="TextBox 4"/>
+              <a:t>Connect your OTel traces</a:t>
+            </a:r>
+          </a:p>
+        </p:txBody>
+      </p:sp>
+      <p:sp>
+        <p:nvSpPr>
+          <p:cNvPr id="100115" name="TextBox 4"/>
           <p:cNvSpPr txBox="1"/>
           <p:nvPr/>
         </p:nvSpPr>
@@ -3891,14 +4339,14 @@
                 <a:latin typeface="Calibri"/>
                 <a:ea typeface="Calibri"/>
               </a:rPr>
-              <a:t>Finer-grained verdict bands and reproducibility guarantees across profile versions.</a:t>
-            </a:r>
-          </a:p>
-        </p:txBody>
-      </p:sp>
-      <p:sp>
-        <p:nvSpPr>
-          <p:cNvPr id="100137" name="TextBox 5"/>
+              <a:t>No code changes to the agent itself – plug in the exporter you likely already have.</a:t>
+            </a:r>
+          </a:p>
+        </p:txBody>
+      </p:sp>
+      <p:sp>
+        <p:nvSpPr>
+          <p:cNvPr id="100116" name="TextBox 5"/>
           <p:cNvSpPr/>
           <p:nvPr/>
         </p:nvSpPr>
@@ -3934,7 +4382,7 @@
       </p:sp>
       <p:sp>
         <p:nvSpPr>
-          <p:cNvPr id="100138" name="TextBox 6"/>
+          <p:cNvPr id="100117" name="TextBox 6"/>
           <p:cNvSpPr txBox="1"/>
           <p:nvPr/>
         </p:nvSpPr>
@@ -3960,14 +4408,14 @@
                 <a:latin typeface="Trebuchet MS"/>
                 <a:ea typeface="Trebuchet MS"/>
               </a:rPr>
-              <a:t>Trend-level regression detection</a:t>
-            </a:r>
-          </a:p>
-        </p:txBody>
-      </p:sp>
-      <p:sp>
-        <p:nvSpPr>
-          <p:cNvPr id="100139" name="TextBox 7"/>
+              <a:t>Get a scored baseline in days</a:t>
+            </a:r>
+          </a:p>
+        </p:txBody>
+      </p:sp>
+      <p:sp>
+        <p:nvSpPr>
+          <p:cNvPr id="100118" name="TextBox 7"/>
           <p:cNvSpPr txBox="1"/>
           <p:nvPr/>
         </p:nvSpPr>
@@ -3993,14 +4441,14 @@
                 <a:latin typeface="Calibri"/>
                 <a:ea typeface="Calibri"/>
               </a:rPr>
-              <a:t>Moving beyond single-session root cause toward drift detection across runs.</a:t>
-            </a:r>
-          </a:p>
-        </p:txBody>
-      </p:sp>
-      <p:sp>
-        <p:nvSpPr>
-          <p:cNvPr id="100140" name="TextBox 8"/>
+              <a:t>Dimension scores and verdicts start surfacing as soon as sessions are ingested.</a:t>
+            </a:r>
+          </a:p>
+        </p:txBody>
+      </p:sp>
+      <p:sp>
+        <p:nvSpPr>
+          <p:cNvPr id="100119" name="TextBox 8"/>
           <p:cNvSpPr/>
           <p:nvPr/>
         </p:nvSpPr>
@@ -4036,7 +4484,7 @@
       </p:sp>
       <p:sp>
         <p:nvSpPr>
-          <p:cNvPr id="100141" name="TextBox 9"/>
+          <p:cNvPr id="100120" name="TextBox 9"/>
           <p:cNvSpPr txBox="1"/>
           <p:nvPr/>
         </p:nvSpPr>
@@ -4062,21 +4510,21 @@
                 <a:latin typeface="Trebuchet MS"/>
                 <a:ea typeface="Trebuchet MS"/>
               </a:rPr>
-              <a:t>More host-surface integrations</a:t>
-            </a:r>
-          </a:p>
-        </p:txBody>
-      </p:sp>
-      <p:sp>
-        <p:nvSpPr>
-          <p:cNvPr id="100142" name="TextBox 10"/>
+              <a:t>Define pilot success together</a:t>
+            </a:r>
+          </a:p>
+        </p:txBody>
+      </p:sp>
+      <p:sp>
+        <p:nvSpPr>
+          <p:cNvPr id="100121" name="TextBox 10"/>
           <p:cNvSpPr txBox="1"/>
           <p:nvPr/>
         </p:nvSpPr>
         <p:spPr>
           <a:xfrm>
             <a:off x="1908000" y="4824000"/>
-            <a:ext cx="9000000" cy="468000"/>
+            <a:ext cx="9000000" cy="666000"/>
           </a:xfrm>
           <a:prstGeom prst="rect">
             <a:avLst/>
@@ -4095,40 +4543,7 @@
                 <a:latin typeface="Calibri"/>
                 <a:ea typeface="Calibri"/>
               </a:rPr>
-              <a:t>Beyond Tosca, qTest, and AI Workspace, based on design-partner demand.</a:t>
-            </a:r>
-          </a:p>
-        </p:txBody>
-      </p:sp>
-      <p:sp>
-        <p:nvSpPr>
-          <p:cNvPr id="100143" name="TextBox 11"/>
-          <p:cNvSpPr txBox="1"/>
-          <p:nvPr/>
-        </p:nvSpPr>
-        <p:spPr>
-          <a:xfrm>
-            <a:off x="540000" y="5760000"/>
-            <a:ext cx="10800000" cy="432000"/>
-          </a:xfrm>
-          <a:prstGeom prst="rect">
-            <a:avLst/>
-          </a:prstGeom>
-          <a:noFill/>
-        </p:spPr>
-        <p:txBody>
-          <a:bodyPr/>
-          <a:lstStyle/>
-          <a:p>
-            <a:r>
-              <a:rPr lang="en-US" sz="1400">
-                <a:solidFill>
-                  <a:srgbClr val="6B7B93"/>
-                </a:solidFill>
-                <a:latin typeface="Calibri"/>
-                <a:ea typeface="Calibri"/>
-              </a:rPr>
-              <a:t>Shaped by design-partner feedback, not a fixed commitment.</a:t>
+              <a:t>Sessions scored, ship / no-ship decisions informed, and time saved on manual root-cause work.</a:t>
             </a:r>
           </a:p>
         </p:txBody>
@@ -4142,6 +4557,816 @@
 </file>
 
 <file path=ppt/slides/slide14.xml><?xml version="1.0" encoding="utf-8"?>
+<p:sld xmlns:a="http://schemas.openxmlformats.org/drawingml/2006/main" xmlns:r="http://schemas.openxmlformats.org/officeDocument/2006/relationships" xmlns:p="http://schemas.openxmlformats.org/presentationml/2006/main">
+  <p:cSld>
+    <p:bg>
+      <p:bgPr>
+        <a:solidFill>
+          <a:srgbClr val="FFFFFF"/>
+        </a:solidFill>
+        <a:effectLst/>
+      </p:bgPr>
+    </p:bg>
+    <p:spTree>
+      <p:nvGrpSpPr>
+        <p:cNvPr id="1" name=""/>
+        <p:cNvGrpSpPr/>
+        <p:nvPr/>
+      </p:nvGrpSpPr>
+      <p:grpSpPr>
+        <a:xfrm>
+          <a:off x="0" y="0"/>
+          <a:ext cx="0" cy="0"/>
+          <a:chOff x="0" y="0"/>
+          <a:chExt cx="0" cy="0"/>
+        </a:xfrm>
+      </p:grpSpPr>
+      <p:sp>
+        <p:nvSpPr>
+          <p:cNvPr id="100122" name="TextBox 1"/>
+          <p:cNvSpPr txBox="1"/>
+          <p:nvPr/>
+        </p:nvSpPr>
+        <p:spPr>
+          <a:xfrm>
+            <a:off x="540000" y="468000"/>
+            <a:ext cx="10800000" cy="792000"/>
+          </a:xfrm>
+          <a:prstGeom prst="rect">
+            <a:avLst/>
+          </a:prstGeom>
+          <a:noFill/>
+        </p:spPr>
+        <p:txBody>
+          <a:bodyPr/>
+          <a:lstStyle/>
+          <a:p>
+            <a:r>
+              <a:rPr lang="en-US" sz="3600" b="1">
+                <a:solidFill>
+                  <a:srgbClr val="1B365D"/>
+                </a:solidFill>
+                <a:latin typeface="Trebuchet MS"/>
+                <a:ea typeface="Trebuchet MS"/>
+              </a:rPr>
+              <a:t>Packaging, directionally</a:t>
+            </a:r>
+          </a:p>
+        </p:txBody>
+      </p:sp>
+      <p:sp>
+        <p:nvSpPr>
+          <p:cNvPr id="100123" name="TextBox 2"/>
+          <p:cNvSpPr/>
+          <p:nvPr/>
+        </p:nvSpPr>
+        <p:spPr>
+          <a:xfrm>
+            <a:off x="900000" y="1656000"/>
+            <a:ext cx="720000" cy="720000"/>
+          </a:xfrm>
+          <a:prstGeom prst="ellipse">
+            <a:avLst/>
+          </a:prstGeom>
+          <a:solidFill>
+            <a:srgbClr val="004C97"/>
+          </a:solidFill>
+        </p:spPr>
+        <p:txBody>
+          <a:bodyPr/>
+          <a:lstStyle/>
+          <a:p>
+            <a:pPr algn="ctr"/>
+            <a:r>
+              <a:rPr lang="en-US" sz="2600" b="1">
+                <a:solidFill>
+                  <a:srgbClr val="FFFFFF"/>
+                </a:solidFill>
+                <a:latin typeface="Calibri"/>
+                <a:ea typeface="Calibri"/>
+              </a:rPr>
+              <a:t>1</a:t>
+            </a:r>
+          </a:p>
+        </p:txBody>
+      </p:sp>
+      <p:sp>
+        <p:nvSpPr>
+          <p:cNvPr id="100124" name="TextBox 3"/>
+          <p:cNvSpPr txBox="1"/>
+          <p:nvPr/>
+        </p:nvSpPr>
+        <p:spPr>
+          <a:xfrm>
+            <a:off x="1908000" y="1620000"/>
+            <a:ext cx="9000000" cy="468000"/>
+          </a:xfrm>
+          <a:prstGeom prst="rect">
+            <a:avLst/>
+          </a:prstGeom>
+          <a:noFill/>
+        </p:spPr>
+        <p:txBody>
+          <a:bodyPr/>
+          <a:lstStyle/>
+          <a:p>
+            <a:r>
+              <a:rPr lang="en-US" sz="2200" b="1">
+                <a:solidFill>
+                  <a:srgbClr val="1B365D"/>
+                </a:solidFill>
+                <a:latin typeface="Trebuchet MS"/>
+                <a:ea typeface="Trebuchet MS"/>
+              </a:rPr>
+              <a:t>Ingestion is free</a:t>
+            </a:r>
+          </a:p>
+        </p:txBody>
+      </p:sp>
+      <p:sp>
+        <p:nvSpPr>
+          <p:cNvPr id="100125" name="TextBox 4"/>
+          <p:cNvSpPr txBox="1"/>
+          <p:nvPr/>
+        </p:nvSpPr>
+        <p:spPr>
+          <a:xfrm>
+            <a:off x="1908000" y="2088000"/>
+            <a:ext cx="9000000" cy="666000"/>
+          </a:xfrm>
+          <a:prstGeom prst="rect">
+            <a:avLst/>
+          </a:prstGeom>
+          <a:noFill/>
+        </p:spPr>
+        <p:txBody>
+          <a:bodyPr/>
+          <a:lstStyle/>
+          <a:p>
+            <a:r>
+              <a:rPr lang="en-US" sz="1800">
+                <a:solidFill>
+                  <a:srgbClr val="333333"/>
+                </a:solidFill>
+                <a:latin typeface="Calibri"/>
+                <a:ea typeface="Calibri"/>
+              </a:rPr>
+              <a:t>No reason to gate the OpenTelemetry on-ramp – pipe in traces without limits.</a:t>
+            </a:r>
+          </a:p>
+        </p:txBody>
+      </p:sp>
+      <p:sp>
+        <p:nvSpPr>
+          <p:cNvPr id="100126" name="TextBox 5"/>
+          <p:cNvSpPr/>
+          <p:nvPr/>
+        </p:nvSpPr>
+        <p:spPr>
+          <a:xfrm>
+            <a:off x="900000" y="3024000"/>
+            <a:ext cx="720000" cy="720000"/>
+          </a:xfrm>
+          <a:prstGeom prst="ellipse">
+            <a:avLst/>
+          </a:prstGeom>
+          <a:solidFill>
+            <a:srgbClr val="0087AE"/>
+          </a:solidFill>
+        </p:spPr>
+        <p:txBody>
+          <a:bodyPr/>
+          <a:lstStyle/>
+          <a:p>
+            <a:pPr algn="ctr"/>
+            <a:r>
+              <a:rPr lang="en-US" sz="2600" b="1">
+                <a:solidFill>
+                  <a:srgbClr val="FFFFFF"/>
+                </a:solidFill>
+                <a:latin typeface="Calibri"/>
+                <a:ea typeface="Calibri"/>
+              </a:rPr>
+              <a:t>2</a:t>
+            </a:r>
+          </a:p>
+        </p:txBody>
+      </p:sp>
+      <p:sp>
+        <p:nvSpPr>
+          <p:cNvPr id="100127" name="TextBox 6"/>
+          <p:cNvSpPr txBox="1"/>
+          <p:nvPr/>
+        </p:nvSpPr>
+        <p:spPr>
+          <a:xfrm>
+            <a:off x="1908000" y="2988000"/>
+            <a:ext cx="9000000" cy="468000"/>
+          </a:xfrm>
+          <a:prstGeom prst="rect">
+            <a:avLst/>
+          </a:prstGeom>
+          <a:noFill/>
+        </p:spPr>
+        <p:txBody>
+          <a:bodyPr/>
+          <a:lstStyle/>
+          <a:p>
+            <a:r>
+              <a:rPr lang="en-US" sz="2200" b="1">
+                <a:solidFill>
+                  <a:srgbClr val="1B365D"/>
+                </a:solidFill>
+                <a:latin typeface="Trebuchet MS"/>
+                <a:ea typeface="Trebuchet MS"/>
+              </a:rPr>
+              <a:t>Scoring runs are the metered unit</a:t>
+            </a:r>
+          </a:p>
+        </p:txBody>
+      </p:sp>
+      <p:sp>
+        <p:nvSpPr>
+          <p:cNvPr id="100128" name="TextBox 7"/>
+          <p:cNvSpPr txBox="1"/>
+          <p:nvPr/>
+        </p:nvSpPr>
+        <p:spPr>
+          <a:xfrm>
+            <a:off x="1908000" y="3456000"/>
+            <a:ext cx="9000000" cy="468000"/>
+          </a:xfrm>
+          <a:prstGeom prst="rect">
+            <a:avLst/>
+          </a:prstGeom>
+          <a:noFill/>
+        </p:spPr>
+        <p:txBody>
+          <a:bodyPr/>
+          <a:lstStyle/>
+          <a:p>
+            <a:r>
+              <a:rPr lang="en-US" sz="1800">
+                <a:solidFill>
+                  <a:srgbClr val="333333"/>
+                </a:solidFill>
+                <a:latin typeface="Calibri"/>
+                <a:ea typeface="Calibri"/>
+              </a:rPr>
+              <a:t>Billed in credits, scaling with the number of LLM judge calls per run.</a:t>
+            </a:r>
+          </a:p>
+        </p:txBody>
+      </p:sp>
+      <p:sp>
+        <p:nvSpPr>
+          <p:cNvPr id="100129" name="TextBox 8"/>
+          <p:cNvSpPr/>
+          <p:nvPr/>
+        </p:nvSpPr>
+        <p:spPr>
+          <a:xfrm>
+            <a:off x="900000" y="4392000"/>
+            <a:ext cx="720000" cy="720000"/>
+          </a:xfrm>
+          <a:prstGeom prst="ellipse">
+            <a:avLst/>
+          </a:prstGeom>
+          <a:solidFill>
+            <a:srgbClr val="FF6C0E"/>
+          </a:solidFill>
+        </p:spPr>
+        <p:txBody>
+          <a:bodyPr/>
+          <a:lstStyle/>
+          <a:p>
+            <a:pPr algn="ctr"/>
+            <a:r>
+              <a:rPr lang="en-US" sz="2600" b="1">
+                <a:solidFill>
+                  <a:srgbClr val="FFFFFF"/>
+                </a:solidFill>
+                <a:latin typeface="Calibri"/>
+                <a:ea typeface="Calibri"/>
+              </a:rPr>
+              <a:t>3</a:t>
+            </a:r>
+          </a:p>
+        </p:txBody>
+      </p:sp>
+      <p:sp>
+        <p:nvSpPr>
+          <p:cNvPr id="100130" name="TextBox 9"/>
+          <p:cNvSpPr txBox="1"/>
+          <p:nvPr/>
+        </p:nvSpPr>
+        <p:spPr>
+          <a:xfrm>
+            <a:off x="1908000" y="4356000"/>
+            <a:ext cx="9000000" cy="468000"/>
+          </a:xfrm>
+          <a:prstGeom prst="rect">
+            <a:avLst/>
+          </a:prstGeom>
+          <a:noFill/>
+        </p:spPr>
+        <p:txBody>
+          <a:bodyPr/>
+          <a:lstStyle/>
+          <a:p>
+            <a:r>
+              <a:rPr lang="en-US" sz="2200" b="1">
+                <a:solidFill>
+                  <a:srgbClr val="1B365D"/>
+                </a:solidFill>
+                <a:latin typeface="Trebuchet MS"/>
+                <a:ea typeface="Trebuchet MS"/>
+              </a:rPr>
+              <a:t>Unlimited seats</a:t>
+            </a:r>
+          </a:p>
+        </p:txBody>
+      </p:sp>
+      <p:sp>
+        <p:nvSpPr>
+          <p:cNvPr id="100131" name="TextBox 10"/>
+          <p:cNvSpPr txBox="1"/>
+          <p:nvPr/>
+        </p:nvSpPr>
+        <p:spPr>
+          <a:xfrm>
+            <a:off x="1908000" y="4824000"/>
+            <a:ext cx="9000000" cy="468000"/>
+          </a:xfrm>
+          <a:prstGeom prst="rect">
+            <a:avLst/>
+          </a:prstGeom>
+          <a:noFill/>
+        </p:spPr>
+        <p:txBody>
+          <a:bodyPr/>
+          <a:lstStyle/>
+          <a:p>
+            <a:r>
+              <a:rPr lang="en-US" sz="1800">
+                <a:solidFill>
+                  <a:srgbClr val="333333"/>
+                </a:solidFill>
+                <a:latin typeface="Calibri"/>
+                <a:ea typeface="Calibri"/>
+              </a:rPr>
+              <a:t>Usage tracks agent and team footprint, not headcount.</a:t>
+            </a:r>
+          </a:p>
+        </p:txBody>
+      </p:sp>
+      <p:sp>
+        <p:nvSpPr>
+          <p:cNvPr id="100132" name="TextBox 11"/>
+          <p:cNvSpPr txBox="1"/>
+          <p:nvPr/>
+        </p:nvSpPr>
+        <p:spPr>
+          <a:xfrm>
+            <a:off x="540000" y="5760000"/>
+            <a:ext cx="10800000" cy="432000"/>
+          </a:xfrm>
+          <a:prstGeom prst="rect">
+            <a:avLst/>
+          </a:prstGeom>
+          <a:noFill/>
+        </p:spPr>
+        <p:txBody>
+          <a:bodyPr/>
+          <a:lstStyle/>
+          <a:p>
+            <a:r>
+              <a:rPr lang="en-US" sz="1400">
+                <a:solidFill>
+                  <a:srgbClr val="6B7B93"/>
+                </a:solidFill>
+                <a:latin typeface="Calibri"/>
+                <a:ea typeface="Calibri"/>
+              </a:rPr>
+              <a:t>Directional only – final pricing is not yet finalized.</a:t>
+            </a:r>
+          </a:p>
+        </p:txBody>
+      </p:sp>
+    </p:spTree>
+  </p:cSld>
+  <p:clrMapOvr>
+    <a:masterClrMapping/>
+  </p:clrMapOvr>
+</p:sld>
+</file>
+
+<file path=ppt/slides/slide15.xml><?xml version="1.0" encoding="utf-8"?>
+<p:sld xmlns:a="http://schemas.openxmlformats.org/drawingml/2006/main" xmlns:r="http://schemas.openxmlformats.org/officeDocument/2006/relationships" xmlns:p="http://schemas.openxmlformats.org/presentationml/2006/main">
+  <p:cSld>
+    <p:bg>
+      <p:bgPr>
+        <a:solidFill>
+          <a:srgbClr val="F4F7FB"/>
+        </a:solidFill>
+        <a:effectLst/>
+      </p:bgPr>
+    </p:bg>
+    <p:spTree>
+      <p:nvGrpSpPr>
+        <p:cNvPr id="1" name=""/>
+        <p:cNvGrpSpPr/>
+        <p:nvPr/>
+      </p:nvGrpSpPr>
+      <p:grpSpPr>
+        <a:xfrm>
+          <a:off x="0" y="0"/>
+          <a:ext cx="0" cy="0"/>
+          <a:chOff x="0" y="0"/>
+          <a:chExt cx="0" cy="0"/>
+        </a:xfrm>
+      </p:grpSpPr>
+      <p:sp>
+        <p:nvSpPr>
+          <p:cNvPr id="100133" name="TextBox 1"/>
+          <p:cNvSpPr txBox="1"/>
+          <p:nvPr/>
+        </p:nvSpPr>
+        <p:spPr>
+          <a:xfrm>
+            <a:off x="540000" y="468000"/>
+            <a:ext cx="10800000" cy="792000"/>
+          </a:xfrm>
+          <a:prstGeom prst="rect">
+            <a:avLst/>
+          </a:prstGeom>
+          <a:noFill/>
+        </p:spPr>
+        <p:txBody>
+          <a:bodyPr/>
+          <a:lstStyle/>
+          <a:p>
+            <a:r>
+              <a:rPr lang="en-US" sz="3600" b="1">
+                <a:solidFill>
+                  <a:srgbClr val="1B365D"/>
+                </a:solidFill>
+                <a:latin typeface="Trebuchet MS"/>
+                <a:ea typeface="Trebuchet MS"/>
+              </a:rPr>
+              <a:t>What's next</a:t>
+            </a:r>
+          </a:p>
+        </p:txBody>
+      </p:sp>
+      <p:sp>
+        <p:nvSpPr>
+          <p:cNvPr id="100134" name="TextBox 2"/>
+          <p:cNvSpPr/>
+          <p:nvPr/>
+        </p:nvSpPr>
+        <p:spPr>
+          <a:xfrm>
+            <a:off x="900000" y="1656000"/>
+            <a:ext cx="720000" cy="720000"/>
+          </a:xfrm>
+          <a:prstGeom prst="ellipse">
+            <a:avLst/>
+          </a:prstGeom>
+          <a:solidFill>
+            <a:srgbClr val="004C97"/>
+          </a:solidFill>
+        </p:spPr>
+        <p:txBody>
+          <a:bodyPr/>
+          <a:lstStyle/>
+          <a:p>
+            <a:pPr algn="ctr"/>
+            <a:r>
+              <a:rPr lang="en-US" sz="2600" b="1">
+                <a:solidFill>
+                  <a:srgbClr val="FFFFFF"/>
+                </a:solidFill>
+                <a:latin typeface="Calibri"/>
+                <a:ea typeface="Calibri"/>
+              </a:rPr>
+              <a:t>1</a:t>
+            </a:r>
+          </a:p>
+        </p:txBody>
+      </p:sp>
+      <p:sp>
+        <p:nvSpPr>
+          <p:cNvPr id="100135" name="TextBox 3"/>
+          <p:cNvSpPr txBox="1"/>
+          <p:nvPr/>
+        </p:nvSpPr>
+        <p:spPr>
+          <a:xfrm>
+            <a:off x="1908000" y="1620000"/>
+            <a:ext cx="9000000" cy="468000"/>
+          </a:xfrm>
+          <a:prstGeom prst="rect">
+            <a:avLst/>
+          </a:prstGeom>
+          <a:noFill/>
+        </p:spPr>
+        <p:txBody>
+          <a:bodyPr/>
+          <a:lstStyle/>
+          <a:p>
+            <a:r>
+              <a:rPr lang="en-US" sz="2200" b="1">
+                <a:solidFill>
+                  <a:srgbClr val="1B365D"/>
+                </a:solidFill>
+                <a:latin typeface="Trebuchet MS"/>
+                <a:ea typeface="Trebuchet MS"/>
+              </a:rPr>
+              <a:t>Deeper CI/CD gating</a:t>
+            </a:r>
+          </a:p>
+        </p:txBody>
+      </p:sp>
+      <p:sp>
+        <p:nvSpPr>
+          <p:cNvPr id="100136" name="TextBox 4"/>
+          <p:cNvSpPr txBox="1"/>
+          <p:nvPr/>
+        </p:nvSpPr>
+        <p:spPr>
+          <a:xfrm>
+            <a:off x="1908000" y="2088000"/>
+            <a:ext cx="9000000" cy="666000"/>
+          </a:xfrm>
+          <a:prstGeom prst="rect">
+            <a:avLst/>
+          </a:prstGeom>
+          <a:noFill/>
+        </p:spPr>
+        <p:txBody>
+          <a:bodyPr/>
+          <a:lstStyle/>
+          <a:p>
+            <a:r>
+              <a:rPr lang="en-US" sz="1800">
+                <a:solidFill>
+                  <a:srgbClr val="333333"/>
+                </a:solidFill>
+                <a:latin typeface="Calibri"/>
+                <a:ea typeface="Calibri"/>
+              </a:rPr>
+              <a:t>Finer-grained verdict bands and reproducibility guarantees across profile versions.</a:t>
+            </a:r>
+          </a:p>
+        </p:txBody>
+      </p:sp>
+      <p:sp>
+        <p:nvSpPr>
+          <p:cNvPr id="100137" name="TextBox 5"/>
+          <p:cNvSpPr/>
+          <p:nvPr/>
+        </p:nvSpPr>
+        <p:spPr>
+          <a:xfrm>
+            <a:off x="900000" y="3024000"/>
+            <a:ext cx="720000" cy="720000"/>
+          </a:xfrm>
+          <a:prstGeom prst="ellipse">
+            <a:avLst/>
+          </a:prstGeom>
+          <a:solidFill>
+            <a:srgbClr val="0087AE"/>
+          </a:solidFill>
+        </p:spPr>
+        <p:txBody>
+          <a:bodyPr/>
+          <a:lstStyle/>
+          <a:p>
+            <a:pPr algn="ctr"/>
+            <a:r>
+              <a:rPr lang="en-US" sz="2600" b="1">
+                <a:solidFill>
+                  <a:srgbClr val="FFFFFF"/>
+                </a:solidFill>
+                <a:latin typeface="Calibri"/>
+                <a:ea typeface="Calibri"/>
+              </a:rPr>
+              <a:t>2</a:t>
+            </a:r>
+          </a:p>
+        </p:txBody>
+      </p:sp>
+      <p:sp>
+        <p:nvSpPr>
+          <p:cNvPr id="100138" name="TextBox 6"/>
+          <p:cNvSpPr txBox="1"/>
+          <p:nvPr/>
+        </p:nvSpPr>
+        <p:spPr>
+          <a:xfrm>
+            <a:off x="1908000" y="2988000"/>
+            <a:ext cx="9000000" cy="468000"/>
+          </a:xfrm>
+          <a:prstGeom prst="rect">
+            <a:avLst/>
+          </a:prstGeom>
+          <a:noFill/>
+        </p:spPr>
+        <p:txBody>
+          <a:bodyPr/>
+          <a:lstStyle/>
+          <a:p>
+            <a:r>
+              <a:rPr lang="en-US" sz="2200" b="1">
+                <a:solidFill>
+                  <a:srgbClr val="1B365D"/>
+                </a:solidFill>
+                <a:latin typeface="Trebuchet MS"/>
+                <a:ea typeface="Trebuchet MS"/>
+              </a:rPr>
+              <a:t>Trend-level regression detection</a:t>
+            </a:r>
+          </a:p>
+        </p:txBody>
+      </p:sp>
+      <p:sp>
+        <p:nvSpPr>
+          <p:cNvPr id="100139" name="TextBox 7"/>
+          <p:cNvSpPr txBox="1"/>
+          <p:nvPr/>
+        </p:nvSpPr>
+        <p:spPr>
+          <a:xfrm>
+            <a:off x="1908000" y="3456000"/>
+            <a:ext cx="9000000" cy="666000"/>
+          </a:xfrm>
+          <a:prstGeom prst="rect">
+            <a:avLst/>
+          </a:prstGeom>
+          <a:noFill/>
+        </p:spPr>
+        <p:txBody>
+          <a:bodyPr/>
+          <a:lstStyle/>
+          <a:p>
+            <a:r>
+              <a:rPr lang="en-US" sz="1800">
+                <a:solidFill>
+                  <a:srgbClr val="333333"/>
+                </a:solidFill>
+                <a:latin typeface="Calibri"/>
+                <a:ea typeface="Calibri"/>
+              </a:rPr>
+              <a:t>Moving beyond single-session root cause toward drift detection across runs.</a:t>
+            </a:r>
+          </a:p>
+        </p:txBody>
+      </p:sp>
+      <p:sp>
+        <p:nvSpPr>
+          <p:cNvPr id="100140" name="TextBox 8"/>
+          <p:cNvSpPr/>
+          <p:nvPr/>
+        </p:nvSpPr>
+        <p:spPr>
+          <a:xfrm>
+            <a:off x="900000" y="4392000"/>
+            <a:ext cx="720000" cy="720000"/>
+          </a:xfrm>
+          <a:prstGeom prst="ellipse">
+            <a:avLst/>
+          </a:prstGeom>
+          <a:solidFill>
+            <a:srgbClr val="FF6C0E"/>
+          </a:solidFill>
+        </p:spPr>
+        <p:txBody>
+          <a:bodyPr/>
+          <a:lstStyle/>
+          <a:p>
+            <a:pPr algn="ctr"/>
+            <a:r>
+              <a:rPr lang="en-US" sz="2600" b="1">
+                <a:solidFill>
+                  <a:srgbClr val="FFFFFF"/>
+                </a:solidFill>
+                <a:latin typeface="Calibri"/>
+                <a:ea typeface="Calibri"/>
+              </a:rPr>
+              <a:t>3</a:t>
+            </a:r>
+          </a:p>
+        </p:txBody>
+      </p:sp>
+      <p:sp>
+        <p:nvSpPr>
+          <p:cNvPr id="100141" name="TextBox 9"/>
+          <p:cNvSpPr txBox="1"/>
+          <p:nvPr/>
+        </p:nvSpPr>
+        <p:spPr>
+          <a:xfrm>
+            <a:off x="1908000" y="4356000"/>
+            <a:ext cx="9000000" cy="468000"/>
+          </a:xfrm>
+          <a:prstGeom prst="rect">
+            <a:avLst/>
+          </a:prstGeom>
+          <a:noFill/>
+        </p:spPr>
+        <p:txBody>
+          <a:bodyPr/>
+          <a:lstStyle/>
+          <a:p>
+            <a:r>
+              <a:rPr lang="en-US" sz="2200" b="1">
+                <a:solidFill>
+                  <a:srgbClr val="1B365D"/>
+                </a:solidFill>
+                <a:latin typeface="Trebuchet MS"/>
+                <a:ea typeface="Trebuchet MS"/>
+              </a:rPr>
+              <a:t>More host-surface integrations</a:t>
+            </a:r>
+          </a:p>
+        </p:txBody>
+      </p:sp>
+      <p:sp>
+        <p:nvSpPr>
+          <p:cNvPr id="100142" name="TextBox 10"/>
+          <p:cNvSpPr txBox="1"/>
+          <p:nvPr/>
+        </p:nvSpPr>
+        <p:spPr>
+          <a:xfrm>
+            <a:off x="1908000" y="4824000"/>
+            <a:ext cx="9000000" cy="936000"/>
+          </a:xfrm>
+          <a:prstGeom prst="rect">
+            <a:avLst/>
+          </a:prstGeom>
+          <a:noFill/>
+        </p:spPr>
+        <p:txBody>
+          <a:bodyPr/>
+          <a:lstStyle/>
+          <a:p>
+            <a:r>
+              <a:rPr lang="en-US" sz="1800">
+                <a:solidFill>
+                  <a:srgbClr val="333333"/>
+                </a:solidFill>
+                <a:latin typeface="Calibri"/>
+                <a:ea typeface="Calibri"/>
+              </a:rPr>
+              <a:t>Beyond Tosca, qTest, and AI Workspace, based on design-partner demand – Agentforce / Salesforce-native surfacing is on the roadmap, given direct account interest.</a:t>
+            </a:r>
+          </a:p>
+        </p:txBody>
+      </p:sp>
+      <p:sp>
+        <p:nvSpPr>
+          <p:cNvPr id="100143" name="TextBox 11"/>
+          <p:cNvSpPr txBox="1"/>
+          <p:nvPr/>
+        </p:nvSpPr>
+        <p:spPr>
+          <a:xfrm>
+            <a:off x="540000" y="5760000"/>
+            <a:ext cx="10800000" cy="432000"/>
+          </a:xfrm>
+          <a:prstGeom prst="rect">
+            <a:avLst/>
+          </a:prstGeom>
+          <a:noFill/>
+        </p:spPr>
+        <p:txBody>
+          <a:bodyPr/>
+          <a:lstStyle/>
+          <a:p>
+            <a:r>
+              <a:rPr lang="en-US" sz="1400">
+                <a:solidFill>
+                  <a:srgbClr val="6B7B93"/>
+                </a:solidFill>
+                <a:latin typeface="Calibri"/>
+                <a:ea typeface="Calibri"/>
+              </a:rPr>
+              <a:t>Shaped by design-partner feedback, not a fixed commitment.</a:t>
+            </a:r>
+          </a:p>
+        </p:txBody>
+      </p:sp>
+    </p:spTree>
+  </p:cSld>
+  <p:clrMapOvr>
+    <a:masterClrMapping/>
+  </p:clrMapOvr>
+</p:sld>
+</file>
+
+<file path=ppt/slides/slide16.xml><?xml version="1.0" encoding="utf-8"?>
 <p:sld xmlns:a="http://schemas.openxmlformats.org/drawingml/2006/main" xmlns:r="http://schemas.openxmlformats.org/officeDocument/2006/relationships" xmlns:p="http://schemas.openxmlformats.org/presentationml/2006/main">
   <p:cSld>
     <p:bg>
@@ -4356,7 +5581,7 @@
 </p:sld>
 </file>
 
-<file path=ppt/slides/slide15.xml><?xml version="1.0" encoding="utf-8"?>
+<file path=ppt/slides/slide17.xml><?xml version="1.0" encoding="utf-8"?>
 <p:sld xmlns:a="http://schemas.openxmlformats.org/drawingml/2006/main" xmlns:r="http://schemas.openxmlformats.org/officeDocument/2006/relationships" xmlns:p="http://schemas.openxmlformats.org/presentationml/2006/main">
   <p:cSld>
     <p:bg>
@@ -4423,7 +5648,7 @@
 </p:sld>
 </file>
 
-<file path=ppt/slides/slide16.xml><?xml version="1.0" encoding="utf-8"?>
+<file path=ppt/slides/slide18.xml><?xml version="1.0" encoding="utf-8"?>
 <p:sld xmlns:a="http://schemas.openxmlformats.org/drawingml/2006/main" xmlns:r="http://schemas.openxmlformats.org/officeDocument/2006/relationships" xmlns:p="http://schemas.openxmlformats.org/presentationml/2006/main">
   <p:cSld>
     <p:bg>
@@ -4810,7 +6035,7 @@
 </p:sld>
 </file>
 
-<file path=ppt/slides/slide17.xml><?xml version="1.0" encoding="utf-8"?>
+<file path=ppt/slides/slide19.xml><?xml version="1.0" encoding="utf-8"?>
 <p:sld xmlns:a="http://schemas.openxmlformats.org/drawingml/2006/main" xmlns:r="http://schemas.openxmlformats.org/officeDocument/2006/relationships" xmlns:p="http://schemas.openxmlformats.org/presentationml/2006/main">
   <p:cSld>
     <p:bg>
@@ -5216,486 +6441,6 @@
 </file>
 
 <file path=ppt/slides/slide2.xml><?xml version="1.0" encoding="utf-8"?>
-<p:sld xmlns:a="http://schemas.openxmlformats.org/drawingml/2006/main" xmlns:r="http://schemas.openxmlformats.org/officeDocument/2006/relationships" xmlns:p="http://schemas.openxmlformats.org/presentationml/2006/main">
-  <p:cSld>
-    <p:bg>
-      <p:bgPr>
-        <a:solidFill>
-          <a:srgbClr val="FFFFFF"/>
-        </a:solidFill>
-        <a:effectLst/>
-      </p:bgPr>
-    </p:bg>
-    <p:spTree>
-      <p:nvGrpSpPr>
-        <p:cNvPr id="1" name=""/>
-        <p:cNvGrpSpPr/>
-        <p:nvPr/>
-      </p:nvGrpSpPr>
-      <p:grpSpPr>
-        <a:xfrm>
-          <a:off x="0" y="0"/>
-          <a:ext cx="0" cy="0"/>
-          <a:chOff x="0" y="0"/>
-          <a:chExt cx="0" cy="0"/>
-        </a:xfrm>
-      </p:grpSpPr>
-      <p:sp>
-        <p:nvSpPr>
-          <p:cNvPr id="100005" name="TextBox 1"/>
-          <p:cNvSpPr txBox="1"/>
-          <p:nvPr/>
-        </p:nvSpPr>
-        <p:spPr>
-          <a:xfrm>
-            <a:off x="540000" y="468000"/>
-            <a:ext cx="10800000" cy="792000"/>
-          </a:xfrm>
-          <a:prstGeom prst="rect">
-            <a:avLst/>
-          </a:prstGeom>
-          <a:noFill/>
-        </p:spPr>
-        <p:txBody>
-          <a:bodyPr/>
-          <a:lstStyle/>
-          <a:p>
-            <a:r>
-              <a:rPr lang="en-US" sz="4000" b="1">
-                <a:solidFill>
-                  <a:srgbClr val="1B365D"/>
-                </a:solidFill>
-                <a:latin typeface="Trebuchet MS"/>
-                <a:ea typeface="Trebuchet MS"/>
-              </a:rPr>
-              <a:t>What we'll cover</a:t>
-            </a:r>
-          </a:p>
-        </p:txBody>
-      </p:sp>
-      <p:sp>
-        <p:nvSpPr>
-          <p:cNvPr id="100006" name="AC1"/>
-          <p:cNvSpPr/>
-          <p:nvPr/>
-        </p:nvSpPr>
-        <p:spPr>
-          <a:xfrm>
-            <a:off x="900000" y="1620000"/>
-            <a:ext cx="576000" cy="576000"/>
-          </a:xfrm>
-          <a:prstGeom prst="ellipse">
-            <a:avLst/>
-          </a:prstGeom>
-          <a:solidFill>
-            <a:srgbClr val="FF6C0E"/>
-          </a:solidFill>
-        </p:spPr>
-        <p:txBody>
-          <a:bodyPr/>
-          <a:lstStyle/>
-          <a:p>
-            <a:pPr algn="ctr"/>
-            <a:r>
-              <a:rPr lang="en-US" sz="2000" b="1">
-                <a:solidFill>
-                  <a:srgbClr val="FFFFFF"/>
-                </a:solidFill>
-                <a:latin typeface="Calibri"/>
-                <a:ea typeface="Calibri"/>
-              </a:rPr>
-              <a:t>1</a:t>
-            </a:r>
-          </a:p>
-        </p:txBody>
-      </p:sp>
-      <p:sp>
-        <p:nvSpPr>
-          <p:cNvPr id="100007" name="TextBox 3"/>
-          <p:cNvSpPr txBox="1"/>
-          <p:nvPr/>
-        </p:nvSpPr>
-        <p:spPr>
-          <a:xfrm>
-            <a:off x="1548000" y="1602000"/>
-            <a:ext cx="9720000" cy="504000"/>
-          </a:xfrm>
-          <a:prstGeom prst="rect">
-            <a:avLst/>
-          </a:prstGeom>
-          <a:noFill/>
-        </p:spPr>
-        <p:txBody>
-          <a:bodyPr/>
-          <a:lstStyle/>
-          <a:p>
-            <a:r>
-              <a:rPr lang="en-US" sz="2200">
-                <a:solidFill>
-                  <a:srgbClr val="333333"/>
-                </a:solidFill>
-                <a:latin typeface="Calibri"/>
-                <a:ea typeface="Calibri"/>
-              </a:rPr>
-              <a:t>The problem every team running agents in production hits</a:t>
-            </a:r>
-          </a:p>
-        </p:txBody>
-      </p:sp>
-      <p:sp>
-        <p:nvSpPr>
-          <p:cNvPr id="100008" name="AC2"/>
-          <p:cNvSpPr/>
-          <p:nvPr/>
-        </p:nvSpPr>
-        <p:spPr>
-          <a:xfrm>
-            <a:off x="900000" y="2340000"/>
-            <a:ext cx="576000" cy="576000"/>
-          </a:xfrm>
-          <a:prstGeom prst="ellipse">
-            <a:avLst/>
-          </a:prstGeom>
-          <a:solidFill>
-            <a:srgbClr val="FF6C0E"/>
-          </a:solidFill>
-        </p:spPr>
-        <p:txBody>
-          <a:bodyPr/>
-          <a:lstStyle/>
-          <a:p>
-            <a:pPr algn="ctr"/>
-            <a:r>
-              <a:rPr lang="en-US" sz="2000" b="1">
-                <a:solidFill>
-                  <a:srgbClr val="FFFFFF"/>
-                </a:solidFill>
-                <a:latin typeface="Calibri"/>
-                <a:ea typeface="Calibri"/>
-              </a:rPr>
-              <a:t>2</a:t>
-            </a:r>
-          </a:p>
-        </p:txBody>
-      </p:sp>
-      <p:sp>
-        <p:nvSpPr>
-          <p:cNvPr id="100009" name="TextBox 5"/>
-          <p:cNvSpPr txBox="1"/>
-          <p:nvPr/>
-        </p:nvSpPr>
-        <p:spPr>
-          <a:xfrm>
-            <a:off x="1548000" y="2322000"/>
-            <a:ext cx="9720000" cy="504000"/>
-          </a:xfrm>
-          <a:prstGeom prst="rect">
-            <a:avLst/>
-          </a:prstGeom>
-          <a:noFill/>
-        </p:spPr>
-        <p:txBody>
-          <a:bodyPr/>
-          <a:lstStyle/>
-          <a:p>
-            <a:r>
-              <a:rPr lang="en-US" sz="2200">
-                <a:solidFill>
-                  <a:srgbClr val="333333"/>
-                </a:solidFill>
-                <a:latin typeface="Calibri"/>
-                <a:ea typeface="Calibri"/>
-              </a:rPr>
-              <a:t>How AgentScore solves it</a:t>
-            </a:r>
-          </a:p>
-        </p:txBody>
-      </p:sp>
-      <p:sp>
-        <p:nvSpPr>
-          <p:cNvPr id="100010" name="AC3"/>
-          <p:cNvSpPr/>
-          <p:nvPr/>
-        </p:nvSpPr>
-        <p:spPr>
-          <a:xfrm>
-            <a:off x="900000" y="3060000"/>
-            <a:ext cx="576000" cy="576000"/>
-          </a:xfrm>
-          <a:prstGeom prst="ellipse">
-            <a:avLst/>
-          </a:prstGeom>
-          <a:solidFill>
-            <a:srgbClr val="FF6C0E"/>
-          </a:solidFill>
-        </p:spPr>
-        <p:txBody>
-          <a:bodyPr/>
-          <a:lstStyle/>
-          <a:p>
-            <a:pPr algn="ctr"/>
-            <a:r>
-              <a:rPr lang="en-US" sz="2000" b="1">
-                <a:solidFill>
-                  <a:srgbClr val="FFFFFF"/>
-                </a:solidFill>
-                <a:latin typeface="Calibri"/>
-                <a:ea typeface="Calibri"/>
-              </a:rPr>
-              <a:t>3</a:t>
-            </a:r>
-          </a:p>
-        </p:txBody>
-      </p:sp>
-      <p:sp>
-        <p:nvSpPr>
-          <p:cNvPr id="100011" name="TextBox 7"/>
-          <p:cNvSpPr txBox="1"/>
-          <p:nvPr/>
-        </p:nvSpPr>
-        <p:spPr>
-          <a:xfrm>
-            <a:off x="1548000" y="3042000"/>
-            <a:ext cx="9720000" cy="504000"/>
-          </a:xfrm>
-          <a:prstGeom prst="rect">
-            <a:avLst/>
-          </a:prstGeom>
-          <a:noFill/>
-        </p:spPr>
-        <p:txBody>
-          <a:bodyPr/>
-          <a:lstStyle/>
-          <a:p>
-            <a:r>
-              <a:rPr lang="en-US" sz="2200">
-                <a:solidFill>
-                  <a:srgbClr val="333333"/>
-                </a:solidFill>
-                <a:latin typeface="Calibri"/>
-                <a:ea typeface="Calibri"/>
-              </a:rPr>
-              <a:t>What the grade actually looks like</a:t>
-            </a:r>
-          </a:p>
-        </p:txBody>
-      </p:sp>
-      <p:sp>
-        <p:nvSpPr>
-          <p:cNvPr id="100012" name="AC4"/>
-          <p:cNvSpPr/>
-          <p:nvPr/>
-        </p:nvSpPr>
-        <p:spPr>
-          <a:xfrm>
-            <a:off x="900000" y="3780000"/>
-            <a:ext cx="576000" cy="576000"/>
-          </a:xfrm>
-          <a:prstGeom prst="ellipse">
-            <a:avLst/>
-          </a:prstGeom>
-          <a:solidFill>
-            <a:srgbClr val="FF6C0E"/>
-          </a:solidFill>
-        </p:spPr>
-        <p:txBody>
-          <a:bodyPr/>
-          <a:lstStyle/>
-          <a:p>
-            <a:pPr algn="ctr"/>
-            <a:r>
-              <a:rPr lang="en-US" sz="2000" b="1">
-                <a:solidFill>
-                  <a:srgbClr val="FFFFFF"/>
-                </a:solidFill>
-                <a:latin typeface="Calibri"/>
-                <a:ea typeface="Calibri"/>
-              </a:rPr>
-              <a:t>4</a:t>
-            </a:r>
-          </a:p>
-        </p:txBody>
-      </p:sp>
-      <p:sp>
-        <p:nvSpPr>
-          <p:cNvPr id="100013" name="TextBox 9"/>
-          <p:cNvSpPr txBox="1"/>
-          <p:nvPr/>
-        </p:nvSpPr>
-        <p:spPr>
-          <a:xfrm>
-            <a:off x="1548000" y="3762000"/>
-            <a:ext cx="9720000" cy="504000"/>
-          </a:xfrm>
-          <a:prstGeom prst="rect">
-            <a:avLst/>
-          </a:prstGeom>
-          <a:noFill/>
-        </p:spPr>
-        <p:txBody>
-          <a:bodyPr/>
-          <a:lstStyle/>
-          <a:p>
-            <a:r>
-              <a:rPr lang="en-US" sz="2200">
-                <a:solidFill>
-                  <a:srgbClr val="333333"/>
-                </a:solidFill>
-                <a:latin typeface="Calibri"/>
-                <a:ea typeface="Calibri"/>
-              </a:rPr>
-              <a:t>Root-cause attribution, not just pass/fail</a:t>
-            </a:r>
-          </a:p>
-        </p:txBody>
-      </p:sp>
-      <p:sp>
-        <p:nvSpPr>
-          <p:cNvPr id="100014" name="AC5"/>
-          <p:cNvSpPr/>
-          <p:nvPr/>
-        </p:nvSpPr>
-        <p:spPr>
-          <a:xfrm>
-            <a:off x="900000" y="4500000"/>
-            <a:ext cx="576000" cy="576000"/>
-          </a:xfrm>
-          <a:prstGeom prst="ellipse">
-            <a:avLst/>
-          </a:prstGeom>
-          <a:solidFill>
-            <a:srgbClr val="FF6C0E"/>
-          </a:solidFill>
-        </p:spPr>
-        <p:txBody>
-          <a:bodyPr/>
-          <a:lstStyle/>
-          <a:p>
-            <a:pPr algn="ctr"/>
-            <a:r>
-              <a:rPr lang="en-US" sz="2000" b="1">
-                <a:solidFill>
-                  <a:srgbClr val="FFFFFF"/>
-                </a:solidFill>
-                <a:latin typeface="Calibri"/>
-                <a:ea typeface="Calibri"/>
-              </a:rPr>
-              <a:t>5</a:t>
-            </a:r>
-          </a:p>
-        </p:txBody>
-      </p:sp>
-      <p:sp>
-        <p:nvSpPr>
-          <p:cNvPr id="100015" name="TextBox 11"/>
-          <p:cNvSpPr txBox="1"/>
-          <p:nvPr/>
-        </p:nvSpPr>
-        <p:spPr>
-          <a:xfrm>
-            <a:off x="1548000" y="4482000"/>
-            <a:ext cx="9720000" cy="504000"/>
-          </a:xfrm>
-          <a:prstGeom prst="rect">
-            <a:avLst/>
-          </a:prstGeom>
-          <a:noFill/>
-        </p:spPr>
-        <p:txBody>
-          <a:bodyPr/>
-          <a:lstStyle/>
-          <a:p>
-            <a:r>
-              <a:rPr lang="en-US" sz="2200">
-                <a:solidFill>
-                  <a:srgbClr val="333333"/>
-                </a:solidFill>
-                <a:latin typeface="Calibri"/>
-                <a:ea typeface="Calibri"/>
-              </a:rPr>
-              <a:t>How it fits your stack</a:t>
-            </a:r>
-          </a:p>
-        </p:txBody>
-      </p:sp>
-      <p:sp>
-        <p:nvSpPr>
-          <p:cNvPr id="100016" name="AC6"/>
-          <p:cNvSpPr/>
-          <p:nvPr/>
-        </p:nvSpPr>
-        <p:spPr>
-          <a:xfrm>
-            <a:off x="900000" y="5220000"/>
-            <a:ext cx="576000" cy="576000"/>
-          </a:xfrm>
-          <a:prstGeom prst="ellipse">
-            <a:avLst/>
-          </a:prstGeom>
-          <a:solidFill>
-            <a:srgbClr val="FF6C0E"/>
-          </a:solidFill>
-        </p:spPr>
-        <p:txBody>
-          <a:bodyPr/>
-          <a:lstStyle/>
-          <a:p>
-            <a:pPr algn="ctr"/>
-            <a:r>
-              <a:rPr lang="en-US" sz="2000" b="1">
-                <a:solidFill>
-                  <a:srgbClr val="FFFFFF"/>
-                </a:solidFill>
-                <a:latin typeface="Calibri"/>
-                <a:ea typeface="Calibri"/>
-              </a:rPr>
-              <a:t>6</a:t>
-            </a:r>
-          </a:p>
-        </p:txBody>
-      </p:sp>
-      <p:sp>
-        <p:nvSpPr>
-          <p:cNvPr id="100017" name="TextBox 13"/>
-          <p:cNvSpPr txBox="1"/>
-          <p:nvPr/>
-        </p:nvSpPr>
-        <p:spPr>
-          <a:xfrm>
-            <a:off x="1548000" y="5202000"/>
-            <a:ext cx="9720000" cy="504000"/>
-          </a:xfrm>
-          <a:prstGeom prst="rect">
-            <a:avLst/>
-          </a:prstGeom>
-          <a:noFill/>
-        </p:spPr>
-        <p:txBody>
-          <a:bodyPr/>
-          <a:lstStyle/>
-          <a:p>
-            <a:r>
-              <a:rPr lang="en-US" sz="2200">
-                <a:solidFill>
-                  <a:srgbClr val="333333"/>
-                </a:solidFill>
-                <a:latin typeface="Calibri"/>
-                <a:ea typeface="Calibri"/>
-              </a:rPr>
-              <a:t>Why AgentScore, and next steps</a:t>
-            </a:r>
-          </a:p>
-        </p:txBody>
-      </p:sp>
-    </p:spTree>
-  </p:cSld>
-  <p:clrMapOvr>
-    <a:masterClrMapping/>
-  </p:clrMapOvr>
-</p:sld>
-</file>
-
-<file path=ppt/slides/slide3.xml><?xml version="1.0" encoding="utf-8"?>
 <p:sld xmlns:a="http://schemas.openxmlformats.org/drawingml/2006/main" xmlns:r="http://schemas.openxmlformats.org/officeDocument/2006/relationships" xmlns:p="http://schemas.openxmlformats.org/presentationml/2006/main">
   <p:cSld>
     <p:bg>
@@ -5818,6 +6563,505 @@
                 <a:ea typeface="Trebuchet MS"/>
               </a:rPr>
               <a:t>But is it actually working?</a:t>
+            </a:r>
+          </a:p>
+        </p:txBody>
+      </p:sp>
+    </p:spTree>
+  </p:cSld>
+  <p:clrMapOvr>
+    <a:masterClrMapping/>
+  </p:clrMapOvr>
+</p:sld>
+</file>
+
+<file path=ppt/slides/slide3.xml><?xml version="1.0" encoding="utf-8"?>
+<p:sld xmlns:a="http://schemas.openxmlformats.org/drawingml/2006/main" xmlns:r="http://schemas.openxmlformats.org/officeDocument/2006/relationships" xmlns:p="http://schemas.openxmlformats.org/presentationml/2006/main">
+  <p:cSld>
+    <p:bg>
+      <p:bgPr>
+        <a:solidFill>
+          <a:srgbClr val="FFFFFF"/>
+        </a:solidFill>
+        <a:effectLst/>
+      </p:bgPr>
+    </p:bg>
+    <p:spTree>
+      <p:nvGrpSpPr>
+        <p:cNvPr id="1" name=""/>
+        <p:cNvGrpSpPr/>
+        <p:nvPr/>
+      </p:nvGrpSpPr>
+      <p:grpSpPr>
+        <a:xfrm>
+          <a:off x="0" y="0"/>
+          <a:ext cx="0" cy="0"/>
+          <a:chOff x="0" y="0"/>
+          <a:chExt cx="0" cy="0"/>
+        </a:xfrm>
+      </p:grpSpPr>
+      <p:sp>
+        <p:nvSpPr>
+          <p:cNvPr id="100021" name="TextBox 1"/>
+          <p:cNvSpPr txBox="1"/>
+          <p:nvPr/>
+        </p:nvSpPr>
+        <p:spPr>
+          <a:xfrm>
+            <a:off x="540000" y="432000"/>
+            <a:ext cx="10800000" cy="792000"/>
+          </a:xfrm>
+          <a:prstGeom prst="rect">
+            <a:avLst/>
+          </a:prstGeom>
+          <a:noFill/>
+        </p:spPr>
+        <p:txBody>
+          <a:bodyPr/>
+          <a:lstStyle/>
+          <a:p>
+            <a:r>
+              <a:rPr lang="en-US" sz="4000" b="1">
+                <a:solidFill>
+                  <a:srgbClr val="1B365D"/>
+                </a:solidFill>
+                <a:latin typeface="Trebuchet MS"/>
+                <a:ea typeface="Trebuchet MS"/>
+              </a:rPr>
+              <a:t>Evaluating AI agents is hard.</a:t>
+            </a:r>
+          </a:p>
+        </p:txBody>
+      </p:sp>
+      <p:sp>
+        <p:nvSpPr>
+          <p:cNvPr id="100022" name="Card1"/>
+          <p:cNvSpPr/>
+          <p:nvPr/>
+        </p:nvSpPr>
+        <p:spPr>
+          <a:xfrm>
+            <a:off x="457200" y="1620000"/>
+            <a:ext cx="3578400" cy="3564000"/>
+          </a:xfrm>
+          <a:prstGeom prst="roundRect">
+            <a:avLst/>
+          </a:prstGeom>
+          <a:solidFill>
+            <a:srgbClr val="F4F7FB"/>
+          </a:solidFill>
+          <a:ln>
+            <a:solidFill>
+              <a:srgbClr val="E8EEF6"/>
+            </a:solidFill>
+          </a:ln>
+        </p:spPr>
+        <p:txBody>
+          <a:bodyPr/>
+          <a:lstStyle/>
+          <a:p>
+            <a:endParaRPr/>
+          </a:p>
+        </p:txBody>
+      </p:sp>
+      <p:sp>
+        <p:nvSpPr>
+          <p:cNvPr id="100023" name="Icon1"/>
+          <p:cNvSpPr/>
+          <p:nvPr/>
+        </p:nvSpPr>
+        <p:spPr>
+          <a:xfrm>
+            <a:off x="745200" y="1908000"/>
+            <a:ext cx="756000" cy="756000"/>
+          </a:xfrm>
+          <a:prstGeom prst="ellipse">
+            <a:avLst/>
+          </a:prstGeom>
+          <a:solidFill>
+            <a:srgbClr val="FF6C0E"/>
+          </a:solidFill>
+        </p:spPr>
+        <p:txBody>
+          <a:bodyPr/>
+          <a:lstStyle/>
+          <a:p>
+            <a:pPr algn="ctr"/>
+            <a:r>
+              <a:rPr lang="en-US" sz="2800" b="1">
+                <a:solidFill>
+                  <a:srgbClr val="FFFFFF"/>
+                </a:solidFill>
+                <a:latin typeface="Calibri"/>
+                <a:ea typeface="Calibri"/>
+              </a:rPr>
+              <a:t>?</a:t>
+            </a:r>
+          </a:p>
+        </p:txBody>
+      </p:sp>
+      <p:sp>
+        <p:nvSpPr>
+          <p:cNvPr id="100024" name="TextBox 4"/>
+          <p:cNvSpPr txBox="1"/>
+          <p:nvPr/>
+        </p:nvSpPr>
+        <p:spPr>
+          <a:xfrm>
+            <a:off x="745200" y="2664000"/>
+            <a:ext cx="2988000" cy="792000"/>
+          </a:xfrm>
+          <a:prstGeom prst="rect">
+            <a:avLst/>
+          </a:prstGeom>
+          <a:noFill/>
+        </p:spPr>
+        <p:txBody>
+          <a:bodyPr/>
+          <a:lstStyle/>
+          <a:p>
+            <a:r>
+              <a:rPr lang="en-US" sz="2400" b="1">
+                <a:solidFill>
+                  <a:srgbClr val="1B365D"/>
+                </a:solidFill>
+                <a:latin typeface="Trebuchet MS"/>
+                <a:ea typeface="Trebuchet MS"/>
+              </a:rPr>
+              <a:t>The blank-page problem</a:t>
+            </a:r>
+          </a:p>
+        </p:txBody>
+      </p:sp>
+      <p:sp>
+        <p:nvSpPr>
+          <p:cNvPr id="100025" name="TextBox 5"/>
+          <p:cNvSpPr txBox="1"/>
+          <p:nvPr/>
+        </p:nvSpPr>
+        <p:spPr>
+          <a:xfrm>
+            <a:off x="745200" y="3492000"/>
+            <a:ext cx="2988000" cy="1548000"/>
+          </a:xfrm>
+          <a:prstGeom prst="rect">
+            <a:avLst/>
+          </a:prstGeom>
+          <a:noFill/>
+        </p:spPr>
+        <p:txBody>
+          <a:bodyPr/>
+          <a:lstStyle/>
+          <a:p>
+            <a:r>
+              <a:rPr lang="en-US" sz="1800">
+                <a:solidFill>
+                  <a:srgbClr val="333333"/>
+                </a:solidFill>
+                <a:latin typeface="Calibri"/>
+                <a:ea typeface="Calibri"/>
+              </a:rPr>
+              <a:t>You don't even know what to test.</a:t>
+            </a:r>
+          </a:p>
+        </p:txBody>
+      </p:sp>
+      <p:sp>
+        <p:nvSpPr>
+          <p:cNvPr id="100026" name="Card2"/>
+          <p:cNvSpPr/>
+          <p:nvPr/>
+        </p:nvSpPr>
+        <p:spPr>
+          <a:xfrm>
+            <a:off x="4309200" y="1620000"/>
+            <a:ext cx="3578400" cy="3564000"/>
+          </a:xfrm>
+          <a:prstGeom prst="roundRect">
+            <a:avLst/>
+          </a:prstGeom>
+          <a:solidFill>
+            <a:srgbClr val="F4F7FB"/>
+          </a:solidFill>
+          <a:ln>
+            <a:solidFill>
+              <a:srgbClr val="E8EEF6"/>
+            </a:solidFill>
+          </a:ln>
+        </p:spPr>
+        <p:txBody>
+          <a:bodyPr/>
+          <a:lstStyle/>
+          <a:p>
+            <a:endParaRPr/>
+          </a:p>
+        </p:txBody>
+      </p:sp>
+      <p:sp>
+        <p:nvSpPr>
+          <p:cNvPr id="100027" name="Icon2"/>
+          <p:cNvSpPr/>
+          <p:nvPr/>
+        </p:nvSpPr>
+        <p:spPr>
+          <a:xfrm>
+            <a:off x="4597200" y="1908000"/>
+            <a:ext cx="756000" cy="756000"/>
+          </a:xfrm>
+          <a:prstGeom prst="ellipse">
+            <a:avLst/>
+          </a:prstGeom>
+          <a:solidFill>
+            <a:srgbClr val="C0392B"/>
+          </a:solidFill>
+        </p:spPr>
+        <p:txBody>
+          <a:bodyPr/>
+          <a:lstStyle/>
+          <a:p>
+            <a:pPr algn="ctr"/>
+            <a:r>
+              <a:rPr lang="en-US" sz="2800" b="1">
+                <a:solidFill>
+                  <a:srgbClr val="FFFFFF"/>
+                </a:solidFill>
+                <a:latin typeface="Calibri"/>
+                <a:ea typeface="Calibri"/>
+              </a:rPr>
+              <a:t>X</a:t>
+            </a:r>
+          </a:p>
+        </p:txBody>
+      </p:sp>
+      <p:sp>
+        <p:nvSpPr>
+          <p:cNvPr id="100028" name="TextBox 8"/>
+          <p:cNvSpPr txBox="1"/>
+          <p:nvPr/>
+        </p:nvSpPr>
+        <p:spPr>
+          <a:xfrm>
+            <a:off x="4597200" y="2664000"/>
+            <a:ext cx="2988000" cy="792000"/>
+          </a:xfrm>
+          <a:prstGeom prst="rect">
+            <a:avLst/>
+          </a:prstGeom>
+          <a:noFill/>
+        </p:spPr>
+        <p:txBody>
+          <a:bodyPr/>
+          <a:lstStyle/>
+          <a:p>
+            <a:r>
+              <a:rPr lang="en-US" sz="2400" b="1">
+                <a:solidFill>
+                  <a:srgbClr val="1B365D"/>
+                </a:solidFill>
+                <a:latin typeface="Trebuchet MS"/>
+                <a:ea typeface="Trebuchet MS"/>
+              </a:rPr>
+              <a:t>Testing the wrong things</a:t>
+            </a:r>
+          </a:p>
+        </p:txBody>
+      </p:sp>
+      <p:sp>
+        <p:nvSpPr>
+          <p:cNvPr id="100029" name="TextBox 9"/>
+          <p:cNvSpPr txBox="1"/>
+          <p:nvPr/>
+        </p:nvSpPr>
+        <p:spPr>
+          <a:xfrm>
+            <a:off x="4597200" y="3492000"/>
+            <a:ext cx="2988000" cy="1548000"/>
+          </a:xfrm>
+          <a:prstGeom prst="rect">
+            <a:avLst/>
+          </a:prstGeom>
+          <a:noFill/>
+        </p:spPr>
+        <p:txBody>
+          <a:bodyPr/>
+          <a:lstStyle/>
+          <a:p>
+            <a:r>
+              <a:rPr lang="en-US" sz="1800">
+                <a:solidFill>
+                  <a:srgbClr val="333333"/>
+                </a:solidFill>
+                <a:latin typeface="Calibri"/>
+                <a:ea typeface="Calibri"/>
+              </a:rPr>
+              <a:t>Generic checks miss what actually matters – regressions slip through until a customer complains.</a:t>
+            </a:r>
+          </a:p>
+        </p:txBody>
+      </p:sp>
+      <p:sp>
+        <p:nvSpPr>
+          <p:cNvPr id="100030" name="Card3"/>
+          <p:cNvSpPr/>
+          <p:nvPr/>
+        </p:nvSpPr>
+        <p:spPr>
+          <a:xfrm>
+            <a:off x="8159040" y="1620000"/>
+            <a:ext cx="3578400" cy="3564000"/>
+          </a:xfrm>
+          <a:prstGeom prst="roundRect">
+            <a:avLst/>
+          </a:prstGeom>
+          <a:solidFill>
+            <a:srgbClr val="F4F7FB"/>
+          </a:solidFill>
+          <a:ln>
+            <a:solidFill>
+              <a:srgbClr val="E8EEF6"/>
+            </a:solidFill>
+          </a:ln>
+        </p:spPr>
+        <p:txBody>
+          <a:bodyPr/>
+          <a:lstStyle/>
+          <a:p>
+            <a:endParaRPr/>
+          </a:p>
+        </p:txBody>
+      </p:sp>
+      <p:sp>
+        <p:nvSpPr>
+          <p:cNvPr id="100031" name="Icon3"/>
+          <p:cNvSpPr/>
+          <p:nvPr/>
+        </p:nvSpPr>
+        <p:spPr>
+          <a:xfrm>
+            <a:off x="8447040" y="1908000"/>
+            <a:ext cx="756000" cy="756000"/>
+          </a:xfrm>
+          <a:prstGeom prst="ellipse">
+            <a:avLst/>
+          </a:prstGeom>
+          <a:solidFill>
+            <a:srgbClr val="004C97"/>
+          </a:solidFill>
+        </p:spPr>
+        <p:txBody>
+          <a:bodyPr/>
+          <a:lstStyle/>
+          <a:p>
+            <a:pPr algn="ctr"/>
+            <a:r>
+              <a:rPr lang="en-US" sz="2800" b="1">
+                <a:solidFill>
+                  <a:srgbClr val="FFFFFF"/>
+                </a:solidFill>
+                <a:latin typeface="Calibri"/>
+                <a:ea typeface="Calibri"/>
+              </a:rPr>
+              <a:t>–</a:t>
+            </a:r>
+          </a:p>
+        </p:txBody>
+      </p:sp>
+      <p:sp>
+        <p:nvSpPr>
+          <p:cNvPr id="100032" name="TextBox 12"/>
+          <p:cNvSpPr txBox="1"/>
+          <p:nvPr/>
+        </p:nvSpPr>
+        <p:spPr>
+          <a:xfrm>
+            <a:off x="8447040" y="2664000"/>
+            <a:ext cx="2988000" cy="792000"/>
+          </a:xfrm>
+          <a:prstGeom prst="rect">
+            <a:avLst/>
+          </a:prstGeom>
+          <a:noFill/>
+        </p:spPr>
+        <p:txBody>
+          <a:bodyPr/>
+          <a:lstStyle/>
+          <a:p>
+            <a:r>
+              <a:rPr lang="en-US" sz="2400" b="1">
+                <a:solidFill>
+                  <a:srgbClr val="1B365D"/>
+                </a:solidFill>
+                <a:latin typeface="Trebuchet MS"/>
+                <a:ea typeface="Trebuchet MS"/>
+              </a:rPr>
+              <a:t>No signal once you do</a:t>
+            </a:r>
+          </a:p>
+        </p:txBody>
+      </p:sp>
+      <p:sp>
+        <p:nvSpPr>
+          <p:cNvPr id="100033" name="TextBox 13"/>
+          <p:cNvSpPr txBox="1"/>
+          <p:nvPr/>
+        </p:nvSpPr>
+        <p:spPr>
+          <a:xfrm>
+            <a:off x="8447040" y="3492000"/>
+            <a:ext cx="2988000" cy="1548000"/>
+          </a:xfrm>
+          <a:prstGeom prst="rect">
+            <a:avLst/>
+          </a:prstGeom>
+          <a:noFill/>
+        </p:spPr>
+        <p:txBody>
+          <a:bodyPr/>
+          <a:lstStyle/>
+          <a:p>
+            <a:r>
+              <a:rPr lang="en-US" sz="1800">
+                <a:solidFill>
+                  <a:srgbClr val="333333"/>
+                </a:solidFill>
+                <a:latin typeface="Calibri"/>
+                <a:ea typeface="Calibri"/>
+              </a:rPr>
+              <a:t>A pass/fail flag doesn't tell you why. Root-causing becomes a manual scavenger hunt.</a:t>
+            </a:r>
+          </a:p>
+        </p:txBody>
+      </p:sp>
+      <p:sp>
+        <p:nvSpPr>
+          <p:cNvPr id="100034" name="TextBox 14"/>
+          <p:cNvSpPr txBox="1"/>
+          <p:nvPr/>
+        </p:nvSpPr>
+        <p:spPr>
+          <a:xfrm>
+            <a:off x="540000" y="5436000"/>
+            <a:ext cx="10800000" cy="576000"/>
+          </a:xfrm>
+          <a:prstGeom prst="rect">
+            <a:avLst/>
+          </a:prstGeom>
+          <a:noFill/>
+        </p:spPr>
+        <p:txBody>
+          <a:bodyPr/>
+          <a:lstStyle/>
+          <a:p>
+            <a:pPr algn="ctr"/>
+            <a:r>
+              <a:rPr lang="en-US" sz="2200" b="1">
+                <a:solidFill>
+                  <a:srgbClr val="0087AE"/>
+                </a:solidFill>
+                <a:latin typeface="Calibri"/>
+                <a:ea typeface="Calibri"/>
+              </a:rPr>
+              <a:t>No objective basis for shipping the next update.</a:t>
             </a:r>
           </a:p>
         </p:txBody>
@@ -5857,8 +7101,8 @@
       </p:grpSpPr>
       <p:sp>
         <p:nvSpPr>
-          <p:cNvPr id="100021" name="TextBox 1"/>
-          <p:cNvSpPr txBox="1"/>
+          <p:cNvPr id="100166" name="TextBox 1"/>
+          <p:cNvSpPr/>
           <p:nvPr/>
         </p:nvSpPr>
         <p:spPr>
@@ -5883,21 +7127,21 @@
                 <a:latin typeface="Trebuchet MS"/>
                 <a:ea typeface="Trebuchet MS"/>
               </a:rPr>
-              <a:t>Evaluating AI agents is hard.</a:t>
-            </a:r>
-          </a:p>
-        </p:txBody>
-      </p:sp>
-      <p:sp>
-        <p:nvSpPr>
-          <p:cNvPr id="100022" name="Card1"/>
+              <a:t>What AgentScore is (and isn't)</a:t>
+            </a:r>
+          </a:p>
+        </p:txBody>
+      </p:sp>
+      <p:sp>
+        <p:nvSpPr>
+          <p:cNvPr id="100167" name="TextBox 2"/>
           <p:cNvSpPr/>
           <p:nvPr/>
         </p:nvSpPr>
         <p:spPr>
           <a:xfrm>
-            <a:off x="457200" y="1620000"/>
-            <a:ext cx="3578400" cy="3564000"/>
+            <a:off x="626400" y="2340000"/>
+            <a:ext cx="2520000" cy="1080000"/>
           </a:xfrm>
           <a:prstGeom prst="roundRect">
             <a:avLst/>
@@ -5912,125 +7156,46 @@
           </a:ln>
         </p:spPr>
         <p:txBody>
-          <a:bodyPr/>
-          <a:lstStyle/>
-          <a:p>
-            <a:endParaRPr/>
-          </a:p>
-        </p:txBody>
-      </p:sp>
-      <p:sp>
-        <p:nvSpPr>
-          <p:cNvPr id="100023" name="Icon1"/>
+          <a:bodyPr anchor="ctr"/>
+          <a:lstStyle/>
+          <a:p>
+            <a:pPr algn="ctr"/>
+            <a:r>
+              <a:rPr lang="en-US" sz="1700" b="1">
+                <a:solidFill>
+                  <a:srgbClr val="1B365D"/>
+                </a:solidFill>
+                <a:latin typeface="Calibri"/>
+                <a:ea typeface="Calibri"/>
+              </a:rPr>
+              <a:t>Test driver</a:t>
+            </a:r>
+          </a:p>
+          <a:p>
+            <a:pPr algn="ctr"/>
+            <a:r>
+              <a:rPr lang="en-US" sz="1700" b="1">
+                <a:solidFill>
+                  <a:srgbClr val="1B365D"/>
+                </a:solidFill>
+                <a:latin typeface="Calibri"/>
+                <a:ea typeface="Calibri"/>
+              </a:rPr>
+              <a:t>(Tosca / scripts / real traffic)</a:t>
+            </a:r>
+          </a:p>
+        </p:txBody>
+      </p:sp>
+      <p:sp>
+        <p:nvSpPr>
+          <p:cNvPr id="100169" name="TextBox 4"/>
           <p:cNvSpPr/>
           <p:nvPr/>
         </p:nvSpPr>
         <p:spPr>
           <a:xfrm>
-            <a:off x="745200" y="1908000"/>
-            <a:ext cx="756000" cy="756000"/>
-          </a:xfrm>
-          <a:prstGeom prst="ellipse">
-            <a:avLst/>
-          </a:prstGeom>
-          <a:solidFill>
-            <a:srgbClr val="FF6C0E"/>
-          </a:solidFill>
-        </p:spPr>
-        <p:txBody>
-          <a:bodyPr/>
-          <a:lstStyle/>
-          <a:p>
-            <a:pPr algn="ctr"/>
-            <a:r>
-              <a:rPr lang="en-US" sz="2800" b="1">
-                <a:solidFill>
-                  <a:srgbClr val="FFFFFF"/>
-                </a:solidFill>
-                <a:latin typeface="Calibri"/>
-                <a:ea typeface="Calibri"/>
-              </a:rPr>
-              <a:t>?</a:t>
-            </a:r>
-          </a:p>
-        </p:txBody>
-      </p:sp>
-      <p:sp>
-        <p:nvSpPr>
-          <p:cNvPr id="100024" name="TextBox 4"/>
-          <p:cNvSpPr txBox="1"/>
-          <p:nvPr/>
-        </p:nvSpPr>
-        <p:spPr>
-          <a:xfrm>
-            <a:off x="745200" y="2664000"/>
-            <a:ext cx="2988000" cy="792000"/>
-          </a:xfrm>
-          <a:prstGeom prst="rect">
-            <a:avLst/>
-          </a:prstGeom>
-          <a:noFill/>
-        </p:spPr>
-        <p:txBody>
-          <a:bodyPr/>
-          <a:lstStyle/>
-          <a:p>
-            <a:r>
-              <a:rPr lang="en-US" sz="2400" b="1">
-                <a:solidFill>
-                  <a:srgbClr val="1B365D"/>
-                </a:solidFill>
-                <a:latin typeface="Trebuchet MS"/>
-                <a:ea typeface="Trebuchet MS"/>
-              </a:rPr>
-              <a:t>The blank-page problem</a:t>
-            </a:r>
-          </a:p>
-        </p:txBody>
-      </p:sp>
-      <p:sp>
-        <p:nvSpPr>
-          <p:cNvPr id="100025" name="TextBox 5"/>
-          <p:cNvSpPr txBox="1"/>
-          <p:nvPr/>
-        </p:nvSpPr>
-        <p:spPr>
-          <a:xfrm>
-            <a:off x="745200" y="3492000"/>
-            <a:ext cx="2988000" cy="1548000"/>
-          </a:xfrm>
-          <a:prstGeom prst="rect">
-            <a:avLst/>
-          </a:prstGeom>
-          <a:noFill/>
-        </p:spPr>
-        <p:txBody>
-          <a:bodyPr/>
-          <a:lstStyle/>
-          <a:p>
-            <a:r>
-              <a:rPr lang="en-US" sz="1800">
-                <a:solidFill>
-                  <a:srgbClr val="333333"/>
-                </a:solidFill>
-                <a:latin typeface="Calibri"/>
-                <a:ea typeface="Calibri"/>
-              </a:rPr>
-              <a:t>You don't even know what to test.</a:t>
-            </a:r>
-          </a:p>
-        </p:txBody>
-      </p:sp>
-      <p:sp>
-        <p:nvSpPr>
-          <p:cNvPr id="100026" name="Card2"/>
-          <p:cNvSpPr/>
-          <p:nvPr/>
-        </p:nvSpPr>
-        <p:spPr>
-          <a:xfrm>
-            <a:off x="4309200" y="1620000"/>
-            <a:ext cx="3578400" cy="3564000"/>
+            <a:off x="3434400" y="2340000"/>
+            <a:ext cx="2520000" cy="1080000"/>
           </a:xfrm>
           <a:prstGeom prst="roundRect">
             <a:avLst/>
@@ -6045,125 +7210,33 @@
           </a:ln>
         </p:spPr>
         <p:txBody>
-          <a:bodyPr/>
-          <a:lstStyle/>
-          <a:p>
-            <a:endParaRPr/>
-          </a:p>
-        </p:txBody>
-      </p:sp>
-      <p:sp>
-        <p:nvSpPr>
-          <p:cNvPr id="100027" name="Icon2"/>
+          <a:bodyPr anchor="ctr"/>
+          <a:lstStyle/>
+          <a:p>
+            <a:pPr algn="ctr"/>
+            <a:r>
+              <a:rPr lang="en-US" sz="1700" b="1">
+                <a:solidFill>
+                  <a:srgbClr val="1B365D"/>
+                </a:solidFill>
+                <a:latin typeface="Calibri"/>
+                <a:ea typeface="Calibri"/>
+              </a:rPr>
+              <a:t>Agent</a:t>
+            </a:r>
+          </a:p>
+        </p:txBody>
+      </p:sp>
+      <p:sp>
+        <p:nvSpPr>
+          <p:cNvPr id="100171" name="TextBox 6"/>
           <p:cNvSpPr/>
           <p:nvPr/>
         </p:nvSpPr>
         <p:spPr>
           <a:xfrm>
-            <a:off x="4597200" y="1908000"/>
-            <a:ext cx="756000" cy="756000"/>
-          </a:xfrm>
-          <a:prstGeom prst="ellipse">
-            <a:avLst/>
-          </a:prstGeom>
-          <a:solidFill>
-            <a:srgbClr val="C0392B"/>
-          </a:solidFill>
-        </p:spPr>
-        <p:txBody>
-          <a:bodyPr/>
-          <a:lstStyle/>
-          <a:p>
-            <a:pPr algn="ctr"/>
-            <a:r>
-              <a:rPr lang="en-US" sz="2800" b="1">
-                <a:solidFill>
-                  <a:srgbClr val="FFFFFF"/>
-                </a:solidFill>
-                <a:latin typeface="Calibri"/>
-                <a:ea typeface="Calibri"/>
-              </a:rPr>
-              <a:t>X</a:t>
-            </a:r>
-          </a:p>
-        </p:txBody>
-      </p:sp>
-      <p:sp>
-        <p:nvSpPr>
-          <p:cNvPr id="100028" name="TextBox 8"/>
-          <p:cNvSpPr txBox="1"/>
-          <p:nvPr/>
-        </p:nvSpPr>
-        <p:spPr>
-          <a:xfrm>
-            <a:off x="4597200" y="2664000"/>
-            <a:ext cx="2988000" cy="792000"/>
-          </a:xfrm>
-          <a:prstGeom prst="rect">
-            <a:avLst/>
-          </a:prstGeom>
-          <a:noFill/>
-        </p:spPr>
-        <p:txBody>
-          <a:bodyPr/>
-          <a:lstStyle/>
-          <a:p>
-            <a:r>
-              <a:rPr lang="en-US" sz="2400" b="1">
-                <a:solidFill>
-                  <a:srgbClr val="1B365D"/>
-                </a:solidFill>
-                <a:latin typeface="Trebuchet MS"/>
-                <a:ea typeface="Trebuchet MS"/>
-              </a:rPr>
-              <a:t>Testing the wrong things</a:t>
-            </a:r>
-          </a:p>
-        </p:txBody>
-      </p:sp>
-      <p:sp>
-        <p:nvSpPr>
-          <p:cNvPr id="100029" name="TextBox 9"/>
-          <p:cNvSpPr txBox="1"/>
-          <p:nvPr/>
-        </p:nvSpPr>
-        <p:spPr>
-          <a:xfrm>
-            <a:off x="4597200" y="3492000"/>
-            <a:ext cx="2988000" cy="1548000"/>
-          </a:xfrm>
-          <a:prstGeom prst="rect">
-            <a:avLst/>
-          </a:prstGeom>
-          <a:noFill/>
-        </p:spPr>
-        <p:txBody>
-          <a:bodyPr/>
-          <a:lstStyle/>
-          <a:p>
-            <a:r>
-              <a:rPr lang="en-US" sz="1800">
-                <a:solidFill>
-                  <a:srgbClr val="333333"/>
-                </a:solidFill>
-                <a:latin typeface="Calibri"/>
-                <a:ea typeface="Calibri"/>
-              </a:rPr>
-              <a:t>Generic checks miss what actually matters – regressions slip through until a customer complains.</a:t>
-            </a:r>
-          </a:p>
-        </p:txBody>
-      </p:sp>
-      <p:sp>
-        <p:nvSpPr>
-          <p:cNvPr id="100030" name="Card3"/>
-          <p:cNvSpPr/>
-          <p:nvPr/>
-        </p:nvSpPr>
-        <p:spPr>
-          <a:xfrm>
-            <a:off x="8159040" y="1620000"/>
-            <a:ext cx="3578400" cy="3564000"/>
+            <a:off x="6242400" y="2340000"/>
+            <a:ext cx="2520000" cy="1080000"/>
           </a:xfrm>
           <a:prstGeom prst="roundRect">
             <a:avLst/>
@@ -6178,59 +7251,74 @@
           </a:ln>
         </p:spPr>
         <p:txBody>
-          <a:bodyPr/>
-          <a:lstStyle/>
-          <a:p>
-            <a:endParaRPr/>
-          </a:p>
-        </p:txBody>
-      </p:sp>
-      <p:sp>
-        <p:nvSpPr>
-          <p:cNvPr id="100031" name="Icon3"/>
+          <a:bodyPr anchor="ctr"/>
+          <a:lstStyle/>
+          <a:p>
+            <a:pPr algn="ctr"/>
+            <a:r>
+              <a:rPr lang="en-US" sz="1700" b="1">
+                <a:solidFill>
+                  <a:srgbClr val="1B365D"/>
+                </a:solidFill>
+                <a:latin typeface="Calibri"/>
+                <a:ea typeface="Calibri"/>
+              </a:rPr>
+              <a:t>OpenTelemetry traces</a:t>
+            </a:r>
+          </a:p>
+        </p:txBody>
+      </p:sp>
+      <p:sp>
+        <p:nvSpPr>
+          <p:cNvPr id="100173" name="TextBox 8"/>
           <p:cNvSpPr/>
           <p:nvPr/>
         </p:nvSpPr>
         <p:spPr>
           <a:xfrm>
-            <a:off x="8447040" y="1908000"/>
-            <a:ext cx="756000" cy="756000"/>
-          </a:xfrm>
-          <a:prstGeom prst="ellipse">
+            <a:off x="9050400" y="2340000"/>
+            <a:ext cx="2520000" cy="1080000"/>
+          </a:xfrm>
+          <a:prstGeom prst="roundRect">
             <a:avLst/>
           </a:prstGeom>
           <a:solidFill>
-            <a:srgbClr val="004C97"/>
+            <a:srgbClr val="1B365D"/>
           </a:solidFill>
-        </p:spPr>
-        <p:txBody>
-          <a:bodyPr/>
+          <a:ln>
+            <a:solidFill>
+              <a:srgbClr val="1B365D"/>
+            </a:solidFill>
+          </a:ln>
+        </p:spPr>
+        <p:txBody>
+          <a:bodyPr anchor="ctr"/>
           <a:lstStyle/>
           <a:p>
             <a:pPr algn="ctr"/>
             <a:r>
-              <a:rPr lang="en-US" sz="2800" b="1">
+              <a:rPr lang="en-US" sz="1700" b="1">
                 <a:solidFill>
                   <a:srgbClr val="FFFFFF"/>
                 </a:solidFill>
                 <a:latin typeface="Calibri"/>
                 <a:ea typeface="Calibri"/>
               </a:rPr>
-              <a:t>–</a:t>
-            </a:r>
-          </a:p>
-        </p:txBody>
-      </p:sp>
-      <p:sp>
-        <p:nvSpPr>
-          <p:cNvPr id="100032" name="TextBox 12"/>
-          <p:cNvSpPr txBox="1"/>
-          <p:nvPr/>
-        </p:nvSpPr>
-        <p:spPr>
-          <a:xfrm>
-            <a:off x="8447040" y="2664000"/>
-            <a:ext cx="2988000" cy="792000"/>
+              <a:t>AgentScore grades</a:t>
+            </a:r>
+          </a:p>
+        </p:txBody>
+      </p:sp>
+      <p:sp>
+        <p:nvSpPr>
+          <p:cNvPr id="100174" name="TextBox 9"/>
+          <p:cNvSpPr/>
+          <p:nvPr/>
+        </p:nvSpPr>
+        <p:spPr>
+          <a:xfrm>
+            <a:off x="720000" y="4140000"/>
+            <a:ext cx="10753200" cy="1440000"/>
           </a:xfrm>
           <a:prstGeom prst="rect">
             <a:avLst/>
@@ -6241,86 +7329,115 @@
           <a:bodyPr/>
           <a:lstStyle/>
           <a:p>
+            <a:pPr algn="ctr"/>
             <a:r>
               <a:rPr lang="en-US" sz="2400" b="1">
                 <a:solidFill>
-                  <a:srgbClr val="1B365D"/>
-                </a:solidFill>
-                <a:latin typeface="Trebuchet MS"/>
-                <a:ea typeface="Trebuchet MS"/>
-              </a:rPr>
-              <a:t>No signal once you do</a:t>
-            </a:r>
-          </a:p>
-        </p:txBody>
-      </p:sp>
-      <p:sp>
-        <p:nvSpPr>
-          <p:cNvPr id="100033" name="TextBox 13"/>
-          <p:cNvSpPr txBox="1"/>
-          <p:nvPr/>
-        </p:nvSpPr>
-        <p:spPr>
-          <a:xfrm>
-            <a:off x="8447040" y="3492000"/>
-            <a:ext cx="2988000" cy="1548000"/>
-          </a:xfrm>
-          <a:prstGeom prst="rect">
-            <a:avLst/>
-          </a:prstGeom>
-          <a:noFill/>
-        </p:spPr>
-        <p:txBody>
-          <a:bodyPr/>
-          <a:lstStyle/>
-          <a:p>
-            <a:r>
-              <a:rPr lang="en-US" sz="1800">
-                <a:solidFill>
                   <a:srgbClr val="333333"/>
                 </a:solidFill>
                 <a:latin typeface="Calibri"/>
                 <a:ea typeface="Calibri"/>
               </a:rPr>
-              <a:t>A pass/fail flag doesn't tell you why. Root-causing becomes a manual scavenger hunt.</a:t>
-            </a:r>
-          </a:p>
-        </p:txBody>
-      </p:sp>
-      <p:sp>
-        <p:nvSpPr>
-          <p:cNvPr id="100034" name="TextBox 14"/>
-          <p:cNvSpPr txBox="1"/>
-          <p:nvPr/>
-        </p:nvSpPr>
-        <p:spPr>
-          <a:xfrm>
-            <a:off x="540000" y="5436000"/>
-            <a:ext cx="10800000" cy="576000"/>
-          </a:xfrm>
-          <a:prstGeom prst="rect">
-            <a:avLst/>
-          </a:prstGeom>
-          <a:noFill/>
-        </p:spPr>
-        <p:txBody>
-          <a:bodyPr/>
-          <a:lstStyle/>
-          <a:p>
-            <a:pPr algn="ctr"/>
-            <a:r>
-              <a:rPr lang="en-US" sz="2200" b="1">
-                <a:solidFill>
-                  <a:srgbClr val="0087AE"/>
-                </a:solidFill>
-                <a:latin typeface="Calibri"/>
-                <a:ea typeface="Calibri"/>
-              </a:rPr>
-              <a:t>No objective basis for shipping the next update.</a:t>
-            </a:r>
-          </a:p>
-        </p:txBody>
-      </p:sp>
+              <a:t>AgentScore </a:t>
+            </a:r>
+            <a:r>
+              <a:rPr lang="en-US" sz="2400" b="1">
+                <a:solidFill>
+                  <a:srgbClr val="FF6C0E"/>
+                </a:solidFill>
+                <a:latin typeface="Calibri"/>
+                <a:ea typeface="Calibri"/>
+              </a:rPr>
+              <a:t>does not author or run tests.</a:t>
+            </a:r>
+            <a:r>
+              <a:rPr lang="en-US" sz="2400" b="1">
+                <a:solidFill>
+                  <a:srgbClr val="333333"/>
+                </a:solidFill>
+                <a:latin typeface="Calibri"/>
+                <a:ea typeface="Calibri"/>
+              </a:rPr>
+              <a:t> It grades what your agent actually did – continuously, across six dimensions, with a root cause when it fails.</a:t>
+            </a:r>
+          </a:p>
+        </p:txBody>
+      </p:sp>
+      <p:cxnSp>
+        <p:nvCxnSpPr>
+          <p:cNvPr id="100175" name="Connector 1"/>
+          <p:cNvCxnSpPr>
+            <a:stCxn id="100167" idx="0"/>
+            <a:endCxn id="100169" idx="0"/>
+          </p:cNvCxnSpPr>
+          <p:nvPr/>
+        </p:nvCxnSpPr>
+        <p:spPr>
+          <a:xfrm>
+            <a:off x="3146400" y="2880000"/>
+            <a:ext cx="288000" cy="0"/>
+          </a:xfrm>
+          <a:prstGeom prst="straightConnector1">
+            <a:avLst/>
+          </a:prstGeom>
+          <a:ln w="25400">
+            <a:solidFill>
+              <a:srgbClr val="6B7B93"/>
+            </a:solidFill>
+            <a:tailEnd type="triangle"/>
+          </a:ln>
+        </p:spPr>
+      </p:cxnSp>
+      <p:cxnSp>
+        <p:nvCxnSpPr>
+          <p:cNvPr id="100176" name="Connector 2"/>
+          <p:cNvCxnSpPr>
+            <a:stCxn id="100169" idx="0"/>
+            <a:endCxn id="100171" idx="0"/>
+          </p:cNvCxnSpPr>
+          <p:nvPr/>
+        </p:nvCxnSpPr>
+        <p:spPr>
+          <a:xfrm>
+            <a:off x="5954400" y="2880000"/>
+            <a:ext cx="288000" cy="0"/>
+          </a:xfrm>
+          <a:prstGeom prst="straightConnector1">
+            <a:avLst/>
+          </a:prstGeom>
+          <a:ln w="25400">
+            <a:solidFill>
+              <a:srgbClr val="6B7B93"/>
+            </a:solidFill>
+            <a:tailEnd type="triangle"/>
+          </a:ln>
+        </p:spPr>
+      </p:cxnSp>
+      <p:cxnSp>
+        <p:nvCxnSpPr>
+          <p:cNvPr id="100177" name="Connector 3"/>
+          <p:cNvCxnSpPr>
+            <a:stCxn id="100171" idx="0"/>
+            <a:endCxn id="100173" idx="0"/>
+          </p:cNvCxnSpPr>
+          <p:nvPr/>
+        </p:nvCxnSpPr>
+        <p:spPr>
+          <a:xfrm>
+            <a:off x="8762400" y="2880000"/>
+            <a:ext cx="288000" cy="0"/>
+          </a:xfrm>
+          <a:prstGeom prst="straightConnector1">
+            <a:avLst/>
+          </a:prstGeom>
+          <a:ln w="25400">
+            <a:solidFill>
+              <a:srgbClr val="6B7B93"/>
+            </a:solidFill>
+            <a:tailEnd type="triangle"/>
+          </a:ln>
+        </p:spPr>
+      </p:cxnSp>
     </p:spTree>
   </p:cSld>
   <p:clrMapOvr>
@@ -6615,7 +7732,7 @@
                 <a:latin typeface="Trebuchet MS"/>
                 <a:ea typeface="Trebuchet MS"/>
               </a:rPr>
-              <a:t>The shared evaluation layer for every agent on the team.</a:t>
+              <a:t>The shared grading layer for every agent on the team.</a:t>
             </a:r>
           </a:p>
         </p:txBody>
@@ -7580,7 +8697,7 @@
 </file>
 
 <file path=ppt/slides/slide7.xml><?xml version="1.0" encoding="utf-8"?>
-<p:sld xmlns:c="http://schemas.openxmlformats.org/drawingml/2006/chart" xmlns:a="http://schemas.openxmlformats.org/drawingml/2006/main" xmlns:r="http://schemas.openxmlformats.org/officeDocument/2006/relationships" xmlns:p="http://schemas.openxmlformats.org/presentationml/2006/main">
+<p:sld xmlns:a="http://schemas.openxmlformats.org/drawingml/2006/main" xmlns:r="http://schemas.openxmlformats.org/officeDocument/2006/relationships" xmlns:p="http://schemas.openxmlformats.org/presentationml/2006/main">
   <p:cSld>
     <p:bg>
       <p:bgPr>
@@ -7951,13 +9068,13 @@
       </p:grpSpPr>
       <p:sp>
         <p:nvSpPr>
-          <p:cNvPr id="100082" name="TextBox 1"/>
-          <p:cNvSpPr txBox="1"/>
-          <p:nvPr/>
-        </p:nvSpPr>
-        <p:spPr>
-          <a:xfrm>
-            <a:off x="540000" y="540000"/>
+          <p:cNvPr id="100178" name="TextBox 1"/>
+          <p:cNvSpPr/>
+          <p:nvPr/>
+        </p:nvSpPr>
+        <p:spPr>
+          <a:xfrm>
+            <a:off x="540000" y="432000"/>
             <a:ext cx="10800000" cy="792000"/>
           </a:xfrm>
           <a:prstGeom prst="rect">
@@ -7969,39 +9086,67 @@
           <a:bodyPr/>
           <a:lstStyle/>
           <a:p>
-            <a:pPr algn="ctr"/>
-            <a:r>
-              <a:rPr lang="en-US" sz="3600" b="1">
+            <a:r>
+              <a:rPr lang="en-US" sz="4000" b="1">
                 <a:solidFill>
                   <a:srgbClr val="1B365D"/>
                 </a:solidFill>
                 <a:latin typeface="Trebuchet MS"/>
                 <a:ea typeface="Trebuchet MS"/>
               </a:rPr>
-              <a:t>Know why, not just what</a:t>
-            </a:r>
-          </a:p>
-        </p:txBody>
-      </p:sp>
-      <p:sp>
-        <p:nvSpPr>
-          <p:cNvPr id="100083" name="step1"/>
+              <a:t>How we know it's accurate</a:t>
+            </a:r>
+          </a:p>
+        </p:txBody>
+      </p:sp>
+      <p:sp>
+        <p:nvSpPr>
+          <p:cNvPr id="100179" name="TextBox 2"/>
           <p:cNvSpPr/>
           <p:nvPr/>
         </p:nvSpPr>
         <p:spPr>
           <a:xfrm>
-            <a:off x="1598400" y="2160000"/>
-            <a:ext cx="1980000" cy="864000"/>
+            <a:off x="457200" y="1620000"/>
+            <a:ext cx="3578400" cy="3564000"/>
           </a:xfrm>
           <a:prstGeom prst="roundRect">
-            <a:avLst>
-              <a:gd name="adj" fmla="val 12000"/>
-            </a:avLst>
+            <a:avLst/>
           </a:prstGeom>
           <a:solidFill>
-            <a:srgbClr val="E8EEF6"/>
+            <a:srgbClr val="F4F7FB"/>
           </a:solidFill>
+          <a:ln>
+            <a:solidFill>
+              <a:srgbClr val="E8EEF6"/>
+            </a:solidFill>
+          </a:ln>
+        </p:spPr>
+        <p:txBody>
+          <a:bodyPr/>
+          <a:lstStyle/>
+          <a:p>
+            <a:endParaRPr/>
+          </a:p>
+        </p:txBody>
+      </p:sp>
+      <p:sp>
+        <p:nvSpPr>
+          <p:cNvPr id="100180" name="TextBox 3"/>
+          <p:cNvSpPr/>
+          <p:nvPr/>
+        </p:nvSpPr>
+        <p:spPr>
+          <a:xfrm>
+            <a:off x="745200" y="1908000"/>
+            <a:ext cx="756000" cy="756000"/>
+          </a:xfrm>
+          <a:prstGeom prst="ellipse">
+            <a:avLst/>
+          </a:prstGeom>
+          <a:solidFill>
+            <a:srgbClr val="004C97"/>
+          </a:solidFill>
         </p:spPr>
         <p:txBody>
           <a:bodyPr/>
@@ -8009,33 +9154,261 @@
           <a:p>
             <a:pPr algn="ctr"/>
             <a:r>
-              <a:rPr lang="en-US" sz="1700" b="1">
+              <a:rPr lang="en-US" sz="2800" b="1">
+                <a:solidFill>
+                  <a:srgbClr val="FFFFFF"/>
+                </a:solidFill>
+                <a:latin typeface="Calibri"/>
+                <a:ea typeface="Calibri"/>
+              </a:rPr>
+              <a:t>1</a:t>
+            </a:r>
+          </a:p>
+        </p:txBody>
+      </p:sp>
+      <p:sp>
+        <p:nvSpPr>
+          <p:cNvPr id="100181" name="TextBox 4"/>
+          <p:cNvSpPr/>
+          <p:nvPr/>
+        </p:nvSpPr>
+        <p:spPr>
+          <a:xfrm>
+            <a:off x="745200" y="2664000"/>
+            <a:ext cx="2988000" cy="792000"/>
+          </a:xfrm>
+          <a:prstGeom prst="rect">
+            <a:avLst/>
+          </a:prstGeom>
+          <a:noFill/>
+        </p:spPr>
+        <p:txBody>
+          <a:bodyPr/>
+          <a:lstStyle/>
+          <a:p>
+            <a:r>
+              <a:rPr lang="en-US" sz="2200" b="1">
                 <a:solidFill>
                   <a:srgbClr val="1B365D"/>
                 </a:solidFill>
-                <a:latin typeface="Calibri"/>
-                <a:ea typeface="Calibri"/>
-              </a:rPr>
-              <a:t>Session fails</a:t>
-            </a:r>
-          </a:p>
-        </p:txBody>
-      </p:sp>
-      <p:sp>
-        <p:nvSpPr>
-          <p:cNvPr id="100084" name="step2"/>
+                <a:latin typeface="Trebuchet MS"/>
+                <a:ea typeface="Trebuchet MS"/>
+              </a:rPr>
+              <a:t>Deterministic &amp; hybrid checks</a:t>
+            </a:r>
+          </a:p>
+        </p:txBody>
+      </p:sp>
+      <p:sp>
+        <p:nvSpPr>
+          <p:cNvPr id="100182" name="TextBox 5"/>
           <p:cNvSpPr/>
           <p:nvPr/>
         </p:nvSpPr>
         <p:spPr>
           <a:xfrm>
-            <a:off x="3938400" y="2160000"/>
-            <a:ext cx="1980000" cy="864000"/>
+            <a:off x="745200" y="3492000"/>
+            <a:ext cx="2988000" cy="1548000"/>
+          </a:xfrm>
+          <a:prstGeom prst="rect">
+            <a:avLst/>
+          </a:prstGeom>
+          <a:noFill/>
+        </p:spPr>
+        <p:txBody>
+          <a:bodyPr/>
+          <a:lstStyle/>
+          <a:p>
+            <a:r>
+              <a:rPr lang="en-US" sz="1800">
+                <a:solidFill>
+                  <a:srgbClr val="333333"/>
+                </a:solidFill>
+                <a:latin typeface="Calibri"/>
+                <a:ea typeface="Calibri"/>
+              </a:rPr>
+              <a:t>Where ground truth exists, checks are exact – no LLM judgment needed.</a:t>
+            </a:r>
+          </a:p>
+        </p:txBody>
+      </p:sp>
+      <p:sp>
+        <p:nvSpPr>
+          <p:cNvPr id="100183" name="TextBox 6"/>
+          <p:cNvSpPr/>
+          <p:nvPr/>
+        </p:nvSpPr>
+        <p:spPr>
+          <a:xfrm>
+            <a:off x="4309200" y="1620000"/>
+            <a:ext cx="3578400" cy="3564000"/>
           </a:xfrm>
           <a:prstGeom prst="roundRect">
-            <a:avLst>
-              <a:gd name="adj" fmla="val 12000"/>
-            </a:avLst>
+            <a:avLst/>
+          </a:prstGeom>
+          <a:solidFill>
+            <a:srgbClr val="F4F7FB"/>
+          </a:solidFill>
+          <a:ln>
+            <a:solidFill>
+              <a:srgbClr val="E8EEF6"/>
+            </a:solidFill>
+          </a:ln>
+        </p:spPr>
+        <p:txBody>
+          <a:bodyPr/>
+          <a:lstStyle/>
+          <a:p>
+            <a:endParaRPr/>
+          </a:p>
+        </p:txBody>
+      </p:sp>
+      <p:sp>
+        <p:nvSpPr>
+          <p:cNvPr id="100184" name="TextBox 7"/>
+          <p:cNvSpPr/>
+          <p:nvPr/>
+        </p:nvSpPr>
+        <p:spPr>
+          <a:xfrm>
+            <a:off x="4597200" y="1908000"/>
+            <a:ext cx="756000" cy="756000"/>
+          </a:xfrm>
+          <a:prstGeom prst="ellipse">
+            <a:avLst/>
+          </a:prstGeom>
+          <a:solidFill>
+            <a:srgbClr val="0087AE"/>
+          </a:solidFill>
+        </p:spPr>
+        <p:txBody>
+          <a:bodyPr/>
+          <a:lstStyle/>
+          <a:p>
+            <a:pPr algn="ctr"/>
+            <a:r>
+              <a:rPr lang="en-US" sz="2800" b="1">
+                <a:solidFill>
+                  <a:srgbClr val="FFFFFF"/>
+                </a:solidFill>
+                <a:latin typeface="Calibri"/>
+                <a:ea typeface="Calibri"/>
+              </a:rPr>
+              <a:t>2</a:t>
+            </a:r>
+          </a:p>
+        </p:txBody>
+      </p:sp>
+      <p:sp>
+        <p:nvSpPr>
+          <p:cNvPr id="100185" name="TextBox 8"/>
+          <p:cNvSpPr/>
+          <p:nvPr/>
+        </p:nvSpPr>
+        <p:spPr>
+          <a:xfrm>
+            <a:off x="4597200" y="2664000"/>
+            <a:ext cx="2988000" cy="792000"/>
+          </a:xfrm>
+          <a:prstGeom prst="rect">
+            <a:avLst/>
+          </a:prstGeom>
+          <a:noFill/>
+        </p:spPr>
+        <p:txBody>
+          <a:bodyPr/>
+          <a:lstStyle/>
+          <a:p>
+            <a:r>
+              <a:rPr lang="en-US" sz="2200" b="1">
+                <a:solidFill>
+                  <a:srgbClr val="1B365D"/>
+                </a:solidFill>
+                <a:latin typeface="Trebuchet MS"/>
+                <a:ea typeface="Trebuchet MS"/>
+              </a:rPr>
+              <a:t>LLM judge with confidence intervals</a:t>
+            </a:r>
+          </a:p>
+        </p:txBody>
+      </p:sp>
+      <p:sp>
+        <p:nvSpPr>
+          <p:cNvPr id="100186" name="TextBox 9"/>
+          <p:cNvSpPr/>
+          <p:nvPr/>
+        </p:nvSpPr>
+        <p:spPr>
+          <a:xfrm>
+            <a:off x="4597200" y="3492000"/>
+            <a:ext cx="2988000" cy="1782000"/>
+          </a:xfrm>
+          <a:prstGeom prst="rect">
+            <a:avLst/>
+          </a:prstGeom>
+          <a:noFill/>
+        </p:spPr>
+        <p:txBody>
+          <a:bodyPr/>
+          <a:lstStyle/>
+          <a:p>
+            <a:r>
+              <a:rPr lang="en-US" sz="1800">
+                <a:solidFill>
+                  <a:srgbClr val="333333"/>
+                </a:solidFill>
+                <a:latin typeface="Calibri"/>
+                <a:ea typeface="Calibri"/>
+              </a:rPr>
+              <a:t>Where ground truth doesn't exist, statistical rigor keeps scores honest: confidence intervals, pass@k, minimum-sample gating.</a:t>
+            </a:r>
+          </a:p>
+        </p:txBody>
+      </p:sp>
+      <p:sp>
+        <p:nvSpPr>
+          <p:cNvPr id="100187" name="TextBox 10"/>
+          <p:cNvSpPr/>
+          <p:nvPr/>
+        </p:nvSpPr>
+        <p:spPr>
+          <a:xfrm>
+            <a:off x="8159040" y="1620000"/>
+            <a:ext cx="3578400" cy="3564000"/>
+          </a:xfrm>
+          <a:prstGeom prst="roundRect">
+            <a:avLst/>
+          </a:prstGeom>
+          <a:solidFill>
+            <a:srgbClr val="F4F7FB"/>
+          </a:solidFill>
+          <a:ln>
+            <a:solidFill>
+              <a:srgbClr val="E8EEF6"/>
+            </a:solidFill>
+          </a:ln>
+        </p:spPr>
+        <p:txBody>
+          <a:bodyPr/>
+          <a:lstStyle/>
+          <a:p>
+            <a:endParaRPr/>
+          </a:p>
+        </p:txBody>
+      </p:sp>
+      <p:sp>
+        <p:nvSpPr>
+          <p:cNvPr id="100188" name="TextBox 11"/>
+          <p:cNvSpPr/>
+          <p:nvPr/>
+        </p:nvSpPr>
+        <p:spPr>
+          <a:xfrm>
+            <a:off x="8447040" y="1908000"/>
+            <a:ext cx="756000" cy="756000"/>
+          </a:xfrm>
+          <a:prstGeom prst="ellipse">
+            <a:avLst/>
           </a:prstGeom>
           <a:solidFill>
             <a:srgbClr val="FF6C0E"/>
@@ -8047,37 +9420,99 @@
           <a:p>
             <a:pPr algn="ctr"/>
             <a:r>
-              <a:rPr lang="en-US" sz="1700" b="1">
+              <a:rPr lang="en-US" sz="2800" b="1">
                 <a:solidFill>
                   <a:srgbClr val="FFFFFF"/>
                 </a:solidFill>
                 <a:latin typeface="Calibri"/>
                 <a:ea typeface="Calibri"/>
               </a:rPr>
-              <a:t>Agent calls the wrong tool</a:t>
-            </a:r>
-          </a:p>
-        </p:txBody>
-      </p:sp>
-      <p:sp>
-        <p:nvSpPr>
-          <p:cNvPr id="100085" name="step3"/>
+              <a:t>3</a:t>
+            </a:r>
+          </a:p>
+        </p:txBody>
+      </p:sp>
+      <p:sp>
+        <p:nvSpPr>
+          <p:cNvPr id="100189" name="TextBox 12"/>
           <p:cNvSpPr/>
           <p:nvPr/>
         </p:nvSpPr>
         <p:spPr>
           <a:xfrm>
-            <a:off x="6278400" y="2160000"/>
-            <a:ext cx="1980000" cy="864000"/>
-          </a:xfrm>
-          <a:prstGeom prst="roundRect">
-            <a:avLst>
-              <a:gd name="adj" fmla="val 12000"/>
-            </a:avLst>
-          </a:prstGeom>
-          <a:solidFill>
-            <a:srgbClr val="E8EEF6"/>
-          </a:solidFill>
+            <a:off x="8447040" y="2664000"/>
+            <a:ext cx="2988000" cy="792000"/>
+          </a:xfrm>
+          <a:prstGeom prst="rect">
+            <a:avLst/>
+          </a:prstGeom>
+          <a:noFill/>
+        </p:spPr>
+        <p:txBody>
+          <a:bodyPr/>
+          <a:lstStyle/>
+          <a:p>
+            <a:r>
+              <a:rPr lang="en-US" sz="2200" b="1">
+                <a:solidFill>
+                  <a:srgbClr val="1B365D"/>
+                </a:solidFill>
+                <a:latin typeface="Trebuchet MS"/>
+                <a:ea typeface="Trebuchet MS"/>
+              </a:rPr>
+              <a:t>Golden-dataset comparison</a:t>
+            </a:r>
+          </a:p>
+        </p:txBody>
+      </p:sp>
+      <p:sp>
+        <p:nvSpPr>
+          <p:cNvPr id="100190" name="TextBox 13"/>
+          <p:cNvSpPr/>
+          <p:nvPr/>
+        </p:nvSpPr>
+        <p:spPr>
+          <a:xfrm>
+            <a:off x="8447040" y="3492000"/>
+            <a:ext cx="2988000" cy="1548000"/>
+          </a:xfrm>
+          <a:prstGeom prst="rect">
+            <a:avLst/>
+          </a:prstGeom>
+          <a:noFill/>
+        </p:spPr>
+        <p:txBody>
+          <a:bodyPr/>
+          <a:lstStyle/>
+          <a:p>
+            <a:r>
+              <a:rPr lang="en-US" sz="1800">
+                <a:solidFill>
+                  <a:srgbClr val="333333"/>
+                </a:solidFill>
+                <a:latin typeface="Calibri"/>
+                <a:ea typeface="Calibri"/>
+              </a:rPr>
+              <a:t>Curated example sets, refined via admin override, anchor scoring to what your team actually considers correct.</a:t>
+            </a:r>
+          </a:p>
+        </p:txBody>
+      </p:sp>
+      <p:sp>
+        <p:nvSpPr>
+          <p:cNvPr id="100191" name="TextBox 14"/>
+          <p:cNvSpPr/>
+          <p:nvPr/>
+        </p:nvSpPr>
+        <p:spPr>
+          <a:xfrm>
+            <a:off x="540000" y="5436000"/>
+            <a:ext cx="10800000" cy="576000"/>
+          </a:xfrm>
+          <a:prstGeom prst="rect">
+            <a:avLst/>
+          </a:prstGeom>
+          <a:noFill/>
         </p:spPr>
         <p:txBody>
           <a:bodyPr/>
@@ -8085,233 +9520,14 @@
           <a:p>
             <a:pPr algn="ctr"/>
             <a:r>
-              <a:rPr lang="en-US" sz="1700" b="1">
-                <a:solidFill>
-                  <a:srgbClr val="1B365D"/>
-                </a:solidFill>
-                <a:latin typeface="Calibri"/>
-                <a:ea typeface="Calibri"/>
-              </a:rPr>
-              <a:t>Bad data returned</a:t>
-            </a:r>
-          </a:p>
-        </p:txBody>
-      </p:sp>
-      <p:sp>
-        <p:nvSpPr>
-          <p:cNvPr id="100086" name="step4"/>
-          <p:cNvSpPr/>
-          <p:nvPr/>
-        </p:nvSpPr>
-        <p:spPr>
-          <a:xfrm>
-            <a:off x="8618400" y="2160000"/>
-            <a:ext cx="1980000" cy="864000"/>
-          </a:xfrm>
-          <a:prstGeom prst="roundRect">
-            <a:avLst>
-              <a:gd name="adj" fmla="val 12000"/>
-            </a:avLst>
-          </a:prstGeom>
-          <a:solidFill>
-            <a:srgbClr val="E8EEF6"/>
-          </a:solidFill>
-        </p:spPr>
-        <p:txBody>
-          <a:bodyPr/>
-          <a:lstStyle/>
-          <a:p>
-            <a:pPr algn="ctr"/>
-            <a:r>
-              <a:rPr lang="en-US" sz="1700" b="1">
-                <a:solidFill>
-                  <a:srgbClr val="1B365D"/>
-                </a:solidFill>
-                <a:latin typeface="Calibri"/>
-                <a:ea typeface="Calibri"/>
-              </a:rPr>
-              <a:t>Response sent to user</a:t>
-            </a:r>
-          </a:p>
-        </p:txBody>
-      </p:sp>
-      <p:cxnSp>
-        <p:nvCxnSpPr>
-          <p:cNvPr id="100087" name="Connector 1"/>
-          <p:cNvCxnSpPr>
-            <a:stCxn id="100083" idx="0"/>
-            <a:endCxn id="100084" idx="0"/>
-          </p:cNvCxnSpPr>
-          <p:nvPr/>
-        </p:nvCxnSpPr>
-        <p:spPr>
-          <a:xfrm>
-            <a:off x="3578400" y="2592000"/>
-            <a:ext cx="360000" cy="0"/>
-          </a:xfrm>
-          <a:prstGeom prst="straightConnector1">
-            <a:avLst/>
-          </a:prstGeom>
-          <a:ln w="25400">
-            <a:solidFill>
-              <a:srgbClr val="1B365D"/>
-            </a:solidFill>
-            <a:tailEnd type="triangle"/>
-          </a:ln>
-        </p:spPr>
-      </p:cxnSp>
-      <p:cxnSp>
-        <p:nvCxnSpPr>
-          <p:cNvPr id="100088" name="Connector 2"/>
-          <p:cNvCxnSpPr>
-            <a:stCxn id="100084" idx="0"/>
-            <a:endCxn id="100085" idx="0"/>
-          </p:cNvCxnSpPr>
-          <p:nvPr/>
-        </p:nvCxnSpPr>
-        <p:spPr>
-          <a:xfrm>
-            <a:off x="5918400" y="2592000"/>
-            <a:ext cx="360000" cy="0"/>
-          </a:xfrm>
-          <a:prstGeom prst="straightConnector1">
-            <a:avLst/>
-          </a:prstGeom>
-          <a:ln w="25400">
-            <a:solidFill>
-              <a:srgbClr val="1B365D"/>
-            </a:solidFill>
-            <a:tailEnd type="triangle"/>
-          </a:ln>
-        </p:spPr>
-      </p:cxnSp>
-      <p:cxnSp>
-        <p:nvCxnSpPr>
-          <p:cNvPr id="100089" name="Connector 3"/>
-          <p:cNvCxnSpPr>
-            <a:stCxn id="100085" idx="0"/>
-            <a:endCxn id="100086" idx="0"/>
-          </p:cNvCxnSpPr>
-          <p:nvPr/>
-        </p:nvCxnSpPr>
-        <p:spPr>
-          <a:xfrm>
-            <a:off x="8258400" y="2592000"/>
-            <a:ext cx="360000" cy="0"/>
-          </a:xfrm>
-          <a:prstGeom prst="straightConnector1">
-            <a:avLst/>
-          </a:prstGeom>
-          <a:ln w="25400">
-            <a:solidFill>
-              <a:srgbClr val="1B365D"/>
-            </a:solidFill>
-            <a:tailEnd type="triangle"/>
-          </a:ln>
-        </p:spPr>
-      </p:cxnSp>
-      <p:sp>
-        <p:nvSpPr>
-          <p:cNvPr id="100090" name="TextBox 6"/>
-          <p:cNvSpPr/>
-          <p:nvPr/>
-        </p:nvSpPr>
-        <p:spPr>
-          <a:xfrm>
-            <a:off x="3420000" y="3780000"/>
-            <a:ext cx="3240000" cy="720000"/>
-          </a:xfrm>
-          <a:prstGeom prst="roundRect">
-            <a:avLst>
-              <a:gd name="adj" fmla="val 50000"/>
-            </a:avLst>
-          </a:prstGeom>
-          <a:solidFill>
-            <a:srgbClr val="FDE8E6"/>
-          </a:solidFill>
-        </p:spPr>
-        <p:txBody>
-          <a:bodyPr/>
-          <a:lstStyle/>
-          <a:p>
-            <a:pPr algn="ctr"/>
-            <a:r>
-              <a:rPr lang="en-US" sz="2000" b="1">
-                <a:solidFill>
-                  <a:srgbClr val="E55C00"/>
-                </a:solidFill>
-                <a:latin typeface="Calibri"/>
-                <a:ea typeface="Calibri"/>
-              </a:rPr>
-              <a:t>Root cause: Tool misuse</a:t>
-            </a:r>
-          </a:p>
-        </p:txBody>
-      </p:sp>
-      <p:sp>
-        <p:nvSpPr>
-          <p:cNvPr id="100091" name="TextBox 7"/>
-          <p:cNvSpPr txBox="1"/>
-          <p:nvPr/>
-        </p:nvSpPr>
-        <p:spPr>
-          <a:xfrm>
-            <a:off x="6840000" y="3780000"/>
-            <a:ext cx="2160000" cy="612000"/>
-          </a:xfrm>
-          <a:prstGeom prst="rect">
-            <a:avLst/>
-          </a:prstGeom>
-          <a:noFill/>
-        </p:spPr>
-        <p:txBody>
-          <a:bodyPr/>
-          <a:lstStyle/>
-          <a:p>
-            <a:pPr algn="ctr"/>
-            <a:r>
-              <a:rPr lang="en-US" sz="2000" b="1">
+              <a:rPr lang="en-US" sz="2200" b="1">
                 <a:solidFill>
                   <a:srgbClr val="0087AE"/>
                 </a:solidFill>
                 <a:latin typeface="Calibri"/>
                 <a:ea typeface="Calibri"/>
               </a:rPr>
-              <a:t>92% confidence</a:t>
-            </a:r>
-          </a:p>
-        </p:txBody>
-      </p:sp>
-      <p:sp>
-        <p:nvSpPr>
-          <p:cNvPr id="100092" name="TextBox 8"/>
-          <p:cNvSpPr txBox="1"/>
-          <p:nvPr/>
-        </p:nvSpPr>
-        <p:spPr>
-          <a:xfrm>
-            <a:off x="720000" y="4824000"/>
-            <a:ext cx="10753200" cy="504000"/>
-          </a:xfrm>
-          <a:prstGeom prst="rect">
-            <a:avLst/>
-          </a:prstGeom>
-          <a:noFill/>
-        </p:spPr>
-        <p:txBody>
-          <a:bodyPr/>
-          <a:lstStyle/>
-          <a:p>
-            <a:pPr algn="ctr"/>
-            <a:r>
-              <a:rPr lang="en-US" sz="2000">
-                <a:solidFill>
-                  <a:srgbClr val="333333"/>
-                </a:solidFill>
-                <a:latin typeface="Calibri"/>
-                <a:ea typeface="Calibri"/>
-              </a:rPr>
-              <a:t>Evidence chain, step by step – plus a recommended fix.</a:t>
+              <a:t>Three tiers of rigor – not a single black-box score.</a:t>
             </a:r>
           </a:p>
         </p:txBody>
@@ -8330,7 +9546,7 @@
     <p:bg>
       <p:bgPr>
         <a:solidFill>
-          <a:srgbClr val="F4F7FB"/>
+          <a:srgbClr val="FFFFFF"/>
         </a:solidFill>
         <a:effectLst/>
       </p:bgPr>
@@ -8351,13 +9567,13 @@
       </p:grpSpPr>
       <p:sp>
         <p:nvSpPr>
-          <p:cNvPr id="100093" name="TextBox 1"/>
+          <p:cNvPr id="100082" name="TextBox 1"/>
           <p:cNvSpPr txBox="1"/>
           <p:nvPr/>
         </p:nvSpPr>
         <p:spPr>
           <a:xfrm>
-            <a:off x="540000" y="468000"/>
+            <a:off x="540000" y="540000"/>
             <a:ext cx="10800000" cy="792000"/>
           </a:xfrm>
           <a:prstGeom prst="rect">
@@ -8378,331 +9594,64 @@
                 <a:latin typeface="Trebuchet MS"/>
                 <a:ea typeface="Trebuchet MS"/>
               </a:rPr>
-              <a:t>How it fits your stack</a:t>
-            </a:r>
-          </a:p>
-        </p:txBody>
-      </p:sp>
-      <p:sp>
-        <p:nvSpPr>
-          <p:cNvPr id="100094" name="Flow1"/>
+              <a:t>Know why, not just what</a:t>
+            </a:r>
+          </a:p>
+        </p:txBody>
+      </p:sp>
+      <p:sp>
+        <p:nvSpPr>
+          <p:cNvPr id="100083" name="step1"/>
           <p:cNvSpPr/>
           <p:nvPr/>
         </p:nvSpPr>
         <p:spPr>
           <a:xfrm>
-            <a:off x="457200" y="1620000"/>
-            <a:ext cx="3577320" cy="2340000"/>
+            <a:off x="1598400" y="2160000"/>
+            <a:ext cx="1980000" cy="864000"/>
           </a:xfrm>
           <a:prstGeom prst="roundRect">
             <a:avLst>
-              <a:gd name="adj" fmla="val 6000"/>
+              <a:gd name="adj" fmla="val 12000"/>
             </a:avLst>
           </a:prstGeom>
           <a:solidFill>
-            <a:srgbClr val="FFFFFF"/>
+            <a:srgbClr val="E8EEF6"/>
           </a:solidFill>
-          <a:ln w="25400">
-            <a:solidFill>
-              <a:srgbClr val="004C97"/>
-            </a:solidFill>
-          </a:ln>
-        </p:spPr>
-        <p:txBody>
-          <a:bodyPr/>
-          <a:lstStyle/>
-          <a:p>
-            <a:endParaRPr/>
-          </a:p>
-        </p:txBody>
-      </p:sp>
-      <p:sp>
-        <p:nvSpPr>
-          <p:cNvPr id="100095" name="TextBox 3"/>
+        </p:spPr>
+        <p:txBody>
+          <a:bodyPr/>
+          <a:lstStyle/>
+          <a:p>
+            <a:pPr algn="ctr"/>
+            <a:r>
+              <a:rPr lang="en-US" sz="1700" b="1">
+                <a:solidFill>
+                  <a:srgbClr val="1B365D"/>
+                </a:solidFill>
+                <a:latin typeface="Calibri"/>
+                <a:ea typeface="Calibri"/>
+              </a:rPr>
+              <a:t>Session fails</a:t>
+            </a:r>
+          </a:p>
+        </p:txBody>
+      </p:sp>
+      <p:sp>
+        <p:nvSpPr>
+          <p:cNvPr id="100084" name="step2"/>
           <p:cNvSpPr/>
           <p:nvPr/>
         </p:nvSpPr>
         <p:spPr>
           <a:xfrm>
-            <a:off x="1886400" y="1872000"/>
-            <a:ext cx="720000" cy="720000"/>
-          </a:xfrm>
-          <a:prstGeom prst="ellipse">
-            <a:avLst/>
-          </a:prstGeom>
-          <a:solidFill>
-            <a:srgbClr val="004C97"/>
-          </a:solidFill>
-        </p:spPr>
-        <p:txBody>
-          <a:bodyPr/>
-          <a:lstStyle/>
-          <a:p>
-            <a:pPr algn="ctr"/>
-            <a:r>
-              <a:rPr lang="en-US" sz="2800" b="1">
-                <a:solidFill>
-                  <a:srgbClr val="FFFFFF"/>
-                </a:solidFill>
-                <a:latin typeface="Calibri"/>
-                <a:ea typeface="Calibri"/>
-              </a:rPr>
-              <a:t>1</a:t>
-            </a:r>
-          </a:p>
-        </p:txBody>
-      </p:sp>
-      <p:sp>
-        <p:nvSpPr>
-          <p:cNvPr id="100096" name="TextBox 4"/>
-          <p:cNvSpPr txBox="1"/>
-          <p:nvPr/>
-        </p:nvSpPr>
-        <p:spPr>
-          <a:xfrm>
-            <a:off x="457200" y="2772000"/>
-            <a:ext cx="3577320" cy="504000"/>
-          </a:xfrm>
-          <a:prstGeom prst="rect">
-            <a:avLst/>
-          </a:prstGeom>
-          <a:noFill/>
-        </p:spPr>
-        <p:txBody>
-          <a:bodyPr/>
-          <a:lstStyle/>
-          <a:p>
-            <a:pPr algn="ctr"/>
-            <a:r>
-              <a:rPr lang="en-US" sz="2600" b="1">
-                <a:solidFill>
-                  <a:srgbClr val="1B365D"/>
-                </a:solidFill>
-                <a:latin typeface="Trebuchet MS"/>
-                <a:ea typeface="Trebuchet MS"/>
-              </a:rPr>
-              <a:t>Connect</a:t>
-            </a:r>
-          </a:p>
-        </p:txBody>
-      </p:sp>
-      <p:sp>
-        <p:nvSpPr>
-          <p:cNvPr id="100097" name="TextBox 5"/>
-          <p:cNvSpPr txBox="1"/>
-          <p:nvPr/>
-        </p:nvSpPr>
-        <p:spPr>
-          <a:xfrm>
-            <a:off x="457200" y="3276000"/>
-            <a:ext cx="3577320" cy="360000"/>
-          </a:xfrm>
-          <a:prstGeom prst="rect">
-            <a:avLst/>
-          </a:prstGeom>
-          <a:noFill/>
-        </p:spPr>
-        <p:txBody>
-          <a:bodyPr/>
-          <a:lstStyle/>
-          <a:p>
-            <a:pPr algn="ctr"/>
-            <a:r>
-              <a:rPr lang="en-US" sz="1700">
-                <a:solidFill>
-                  <a:srgbClr val="0087AE"/>
-                </a:solidFill>
-                <a:latin typeface="Calibri"/>
-                <a:ea typeface="Calibri"/>
-              </a:rPr>
-              <a:t>via OpenTelemetry</a:t>
-            </a:r>
-          </a:p>
-        </p:txBody>
-      </p:sp>
-      <p:sp>
-        <p:nvSpPr>
-          <p:cNvPr id="100098" name="Flow2"/>
-          <p:cNvSpPr/>
-          <p:nvPr/>
-        </p:nvSpPr>
-        <p:spPr>
-          <a:xfrm>
-            <a:off x="4308120" y="1620000"/>
-            <a:ext cx="3577320" cy="2340000"/>
+            <a:off x="3938400" y="2160000"/>
+            <a:ext cx="1980000" cy="864000"/>
           </a:xfrm>
           <a:prstGeom prst="roundRect">
             <a:avLst>
-              <a:gd name="adj" fmla="val 6000"/>
+              <a:gd name="adj" fmla="val 12000"/>
             </a:avLst>
-          </a:prstGeom>
-          <a:solidFill>
-            <a:srgbClr val="FFFFFF"/>
-          </a:solidFill>
-          <a:ln w="25400">
-            <a:solidFill>
-              <a:srgbClr val="0087AE"/>
-            </a:solidFill>
-          </a:ln>
-        </p:spPr>
-        <p:txBody>
-          <a:bodyPr/>
-          <a:lstStyle/>
-          <a:p>
-            <a:endParaRPr/>
-          </a:p>
-        </p:txBody>
-      </p:sp>
-      <p:sp>
-        <p:nvSpPr>
-          <p:cNvPr id="100099" name="TextBox 7"/>
-          <p:cNvSpPr/>
-          <p:nvPr/>
-        </p:nvSpPr>
-        <p:spPr>
-          <a:xfrm>
-            <a:off x="5737320" y="1872000"/>
-            <a:ext cx="720000" cy="720000"/>
-          </a:xfrm>
-          <a:prstGeom prst="ellipse">
-            <a:avLst/>
-          </a:prstGeom>
-          <a:solidFill>
-            <a:srgbClr val="0087AE"/>
-          </a:solidFill>
-        </p:spPr>
-        <p:txBody>
-          <a:bodyPr/>
-          <a:lstStyle/>
-          <a:p>
-            <a:pPr algn="ctr"/>
-            <a:r>
-              <a:rPr lang="en-US" sz="2800" b="1">
-                <a:solidFill>
-                  <a:srgbClr val="FFFFFF"/>
-                </a:solidFill>
-                <a:latin typeface="Calibri"/>
-                <a:ea typeface="Calibri"/>
-              </a:rPr>
-              <a:t>2</a:t>
-            </a:r>
-          </a:p>
-        </p:txBody>
-      </p:sp>
-      <p:sp>
-        <p:nvSpPr>
-          <p:cNvPr id="100100" name="TextBox 8"/>
-          <p:cNvSpPr txBox="1"/>
-          <p:nvPr/>
-        </p:nvSpPr>
-        <p:spPr>
-          <a:xfrm>
-            <a:off x="4308120" y="2772000"/>
-            <a:ext cx="3577320" cy="504000"/>
-          </a:xfrm>
-          <a:prstGeom prst="rect">
-            <a:avLst/>
-          </a:prstGeom>
-          <a:noFill/>
-        </p:spPr>
-        <p:txBody>
-          <a:bodyPr/>
-          <a:lstStyle/>
-          <a:p>
-            <a:pPr algn="ctr"/>
-            <a:r>
-              <a:rPr lang="en-US" sz="2600" b="1">
-                <a:solidFill>
-                  <a:srgbClr val="1B365D"/>
-                </a:solidFill>
-                <a:latin typeface="Trebuchet MS"/>
-                <a:ea typeface="Trebuchet MS"/>
-              </a:rPr>
-              <a:t>Gate</a:t>
-            </a:r>
-          </a:p>
-        </p:txBody>
-      </p:sp>
-      <p:sp>
-        <p:nvSpPr>
-          <p:cNvPr id="100101" name="TextBox 9"/>
-          <p:cNvSpPr txBox="1"/>
-          <p:nvPr/>
-        </p:nvSpPr>
-        <p:spPr>
-          <a:xfrm>
-            <a:off x="4308120" y="3276000"/>
-            <a:ext cx="3577320" cy="360000"/>
-          </a:xfrm>
-          <a:prstGeom prst="rect">
-            <a:avLst/>
-          </a:prstGeom>
-          <a:noFill/>
-        </p:spPr>
-        <p:txBody>
-          <a:bodyPr/>
-          <a:lstStyle/>
-          <a:p>
-            <a:pPr algn="ctr"/>
-            <a:r>
-              <a:rPr lang="en-US" sz="1700">
-                <a:solidFill>
-                  <a:srgbClr val="0087AE"/>
-                </a:solidFill>
-                <a:latin typeface="Calibri"/>
-                <a:ea typeface="Calibri"/>
-              </a:rPr>
-              <a:t>your CI pipeline</a:t>
-            </a:r>
-          </a:p>
-        </p:txBody>
-      </p:sp>
-      <p:sp>
-        <p:nvSpPr>
-          <p:cNvPr id="100102" name="Flow3"/>
-          <p:cNvSpPr/>
-          <p:nvPr/>
-        </p:nvSpPr>
-        <p:spPr>
-          <a:xfrm>
-            <a:off x="8159040" y="1620000"/>
-            <a:ext cx="3577320" cy="2340000"/>
-          </a:xfrm>
-          <a:prstGeom prst="roundRect">
-            <a:avLst>
-              <a:gd name="adj" fmla="val 6000"/>
-            </a:avLst>
-          </a:prstGeom>
-          <a:solidFill>
-            <a:srgbClr val="FFFFFF"/>
-          </a:solidFill>
-          <a:ln w="25400">
-            <a:solidFill>
-              <a:srgbClr val="FF6C0E"/>
-            </a:solidFill>
-          </a:ln>
-        </p:spPr>
-        <p:txBody>
-          <a:bodyPr/>
-          <a:lstStyle/>
-          <a:p>
-            <a:endParaRPr/>
-          </a:p>
-        </p:txBody>
-      </p:sp>
-      <p:sp>
-        <p:nvSpPr>
-          <p:cNvPr id="100103" name="TextBox 11"/>
-          <p:cNvSpPr/>
-          <p:nvPr/>
-        </p:nvSpPr>
-        <p:spPr>
-          <a:xfrm>
-            <a:off x="9588240" y="1872000"/>
-            <a:ext cx="720000" cy="720000"/>
-          </a:xfrm>
-          <a:prstGeom prst="ellipse">
-            <a:avLst/>
           </a:prstGeom>
           <a:solidFill>
             <a:srgbClr val="FF6C0E"/>
@@ -8714,33 +9663,37 @@
           <a:p>
             <a:pPr algn="ctr"/>
             <a:r>
-              <a:rPr lang="en-US" sz="2800" b="1">
+              <a:rPr lang="en-US" sz="1700" b="1">
                 <a:solidFill>
                   <a:srgbClr val="FFFFFF"/>
                 </a:solidFill>
                 <a:latin typeface="Calibri"/>
                 <a:ea typeface="Calibri"/>
               </a:rPr>
-              <a:t>3</a:t>
-            </a:r>
-          </a:p>
-        </p:txBody>
-      </p:sp>
-      <p:sp>
-        <p:nvSpPr>
-          <p:cNvPr id="100104" name="TextBox 12"/>
-          <p:cNvSpPr txBox="1"/>
-          <p:nvPr/>
-        </p:nvSpPr>
-        <p:spPr>
-          <a:xfrm>
-            <a:off x="8159040" y="2772000"/>
-            <a:ext cx="3577320" cy="504000"/>
-          </a:xfrm>
-          <a:prstGeom prst="rect">
-            <a:avLst/>
-          </a:prstGeom>
-          <a:noFill/>
+              <a:t>Agent calls the wrong tool</a:t>
+            </a:r>
+          </a:p>
+        </p:txBody>
+      </p:sp>
+      <p:sp>
+        <p:nvSpPr>
+          <p:cNvPr id="100085" name="step3"/>
+          <p:cNvSpPr/>
+          <p:nvPr/>
+        </p:nvSpPr>
+        <p:spPr>
+          <a:xfrm>
+            <a:off x="6278400" y="2160000"/>
+            <a:ext cx="1980000" cy="864000"/>
+          </a:xfrm>
+          <a:prstGeom prst="roundRect">
+            <a:avLst>
+              <a:gd name="adj" fmla="val 12000"/>
+            </a:avLst>
+          </a:prstGeom>
+          <a:solidFill>
+            <a:srgbClr val="E8EEF6"/>
+          </a:solidFill>
         </p:spPr>
         <p:txBody>
           <a:bodyPr/>
@@ -8748,33 +9701,37 @@
           <a:p>
             <a:pPr algn="ctr"/>
             <a:r>
-              <a:rPr lang="en-US" sz="2600" b="1">
+              <a:rPr lang="en-US" sz="1700" b="1">
                 <a:solidFill>
                   <a:srgbClr val="1B365D"/>
                 </a:solidFill>
-                <a:latin typeface="Trebuchet MS"/>
-                <a:ea typeface="Trebuchet MS"/>
-              </a:rPr>
-              <a:t>Track</a:t>
-            </a:r>
-          </a:p>
-        </p:txBody>
-      </p:sp>
-      <p:sp>
-        <p:nvSpPr>
-          <p:cNvPr id="100105" name="TextBox 13"/>
-          <p:cNvSpPr txBox="1"/>
-          <p:nvPr/>
-        </p:nvSpPr>
-        <p:spPr>
-          <a:xfrm>
-            <a:off x="8159040" y="3276000"/>
-            <a:ext cx="3577320" cy="360000"/>
-          </a:xfrm>
-          <a:prstGeom prst="rect">
-            <a:avLst/>
-          </a:prstGeom>
-          <a:noFill/>
+                <a:latin typeface="Calibri"/>
+                <a:ea typeface="Calibri"/>
+              </a:rPr>
+              <a:t>Bad data returned</a:t>
+            </a:r>
+          </a:p>
+        </p:txBody>
+      </p:sp>
+      <p:sp>
+        <p:nvSpPr>
+          <p:cNvPr id="100086" name="step4"/>
+          <p:cNvSpPr/>
+          <p:nvPr/>
+        </p:nvSpPr>
+        <p:spPr>
+          <a:xfrm>
+            <a:off x="8618400" y="2160000"/>
+            <a:ext cx="1980000" cy="864000"/>
+          </a:xfrm>
+          <a:prstGeom prst="roundRect">
+            <a:avLst>
+              <a:gd name="adj" fmla="val 12000"/>
+            </a:avLst>
+          </a:prstGeom>
+          <a:solidFill>
+            <a:srgbClr val="E8EEF6"/>
+          </a:solidFill>
         </p:spPr>
         <p:txBody>
           <a:bodyPr/>
@@ -8782,31 +9739,31 @@
           <a:p>
             <a:pPr algn="ctr"/>
             <a:r>
-              <a:rPr lang="en-US" sz="1700">
-                <a:solidFill>
-                  <a:srgbClr val="0087AE"/>
-                </a:solidFill>
-                <a:latin typeface="Calibri"/>
-                <a:ea typeface="Calibri"/>
-              </a:rPr>
-              <a:t>quality over time</a:t>
+              <a:rPr lang="en-US" sz="1700" b="1">
+                <a:solidFill>
+                  <a:srgbClr val="1B365D"/>
+                </a:solidFill>
+                <a:latin typeface="Calibri"/>
+                <a:ea typeface="Calibri"/>
+              </a:rPr>
+              <a:t>Response sent to user</a:t>
             </a:r>
           </a:p>
         </p:txBody>
       </p:sp>
       <p:cxnSp>
         <p:nvCxnSpPr>
-          <p:cNvPr id="100106" name="Connector 1"/>
+          <p:cNvPr id="100087" name="Connector 1"/>
           <p:cNvCxnSpPr>
-            <a:stCxn id="100094" idx="0"/>
-            <a:endCxn id="100098" idx="0"/>
+            <a:stCxn id="100083" idx="0"/>
+            <a:endCxn id="100084" idx="0"/>
           </p:cNvCxnSpPr>
           <p:nvPr/>
         </p:nvCxnSpPr>
         <p:spPr>
           <a:xfrm>
-            <a:off x="4034520" y="2790000"/>
-            <a:ext cx="273600" cy="0"/>
+            <a:off x="3578400" y="2592000"/>
+            <a:ext cx="360000" cy="0"/>
           </a:xfrm>
           <a:prstGeom prst="straightConnector1">
             <a:avLst/>
@@ -8821,17 +9778,17 @@
       </p:cxnSp>
       <p:cxnSp>
         <p:nvCxnSpPr>
-          <p:cNvPr id="100107" name="Connector 2"/>
+          <p:cNvPr id="100088" name="Connector 2"/>
           <p:cNvCxnSpPr>
-            <a:stCxn id="100098" idx="0"/>
-            <a:endCxn id="100102" idx="0"/>
+            <a:stCxn id="100084" idx="0"/>
+            <a:endCxn id="100085" idx="0"/>
           </p:cNvCxnSpPr>
           <p:nvPr/>
         </p:nvCxnSpPr>
         <p:spPr>
           <a:xfrm>
-            <a:off x="7885440" y="2790000"/>
-            <a:ext cx="273600" cy="0"/>
+            <a:off x="5918400" y="2592000"/>
+            <a:ext cx="360000" cy="0"/>
           </a:xfrm>
           <a:prstGeom prst="straightConnector1">
             <a:avLst/>
@@ -8844,15 +9801,112 @@
           </a:ln>
         </p:spPr>
       </p:cxnSp>
-      <p:sp>
-        <p:nvSpPr>
-          <p:cNvPr id="100108" name="TextBox 14"/>
+      <p:cxnSp>
+        <p:nvCxnSpPr>
+          <p:cNvPr id="100089" name="Connector 3"/>
+          <p:cNvCxnSpPr>
+            <a:stCxn id="100085" idx="0"/>
+            <a:endCxn id="100086" idx="0"/>
+          </p:cNvCxnSpPr>
+          <p:nvPr/>
+        </p:nvCxnSpPr>
+        <p:spPr>
+          <a:xfrm>
+            <a:off x="8258400" y="2592000"/>
+            <a:ext cx="360000" cy="0"/>
+          </a:xfrm>
+          <a:prstGeom prst="straightConnector1">
+            <a:avLst/>
+          </a:prstGeom>
+          <a:ln w="25400">
+            <a:solidFill>
+              <a:srgbClr val="1B365D"/>
+            </a:solidFill>
+            <a:tailEnd type="triangle"/>
+          </a:ln>
+        </p:spPr>
+      </p:cxnSp>
+      <p:sp>
+        <p:nvSpPr>
+          <p:cNvPr id="100090" name="TextBox 6"/>
+          <p:cNvSpPr/>
+          <p:nvPr/>
+        </p:nvSpPr>
+        <p:spPr>
+          <a:xfrm>
+            <a:off x="3420000" y="3780000"/>
+            <a:ext cx="3240000" cy="720000"/>
+          </a:xfrm>
+          <a:prstGeom prst="roundRect">
+            <a:avLst>
+              <a:gd name="adj" fmla="val 50000"/>
+            </a:avLst>
+          </a:prstGeom>
+          <a:solidFill>
+            <a:srgbClr val="FDE8E6"/>
+          </a:solidFill>
+        </p:spPr>
+        <p:txBody>
+          <a:bodyPr/>
+          <a:lstStyle/>
+          <a:p>
+            <a:pPr algn="ctr"/>
+            <a:r>
+              <a:rPr lang="en-US" sz="2000" b="1">
+                <a:solidFill>
+                  <a:srgbClr val="E55C00"/>
+                </a:solidFill>
+                <a:latin typeface="Calibri"/>
+                <a:ea typeface="Calibri"/>
+              </a:rPr>
+              <a:t>Root cause: Tool misuse</a:t>
+            </a:r>
+          </a:p>
+        </p:txBody>
+      </p:sp>
+      <p:sp>
+        <p:nvSpPr>
+          <p:cNvPr id="100091" name="TextBox 7"/>
           <p:cNvSpPr txBox="1"/>
           <p:nvPr/>
         </p:nvSpPr>
         <p:spPr>
           <a:xfrm>
-            <a:off x="720000" y="4536000"/>
+            <a:off x="6840000" y="3780000"/>
+            <a:ext cx="2160000" cy="612000"/>
+          </a:xfrm>
+          <a:prstGeom prst="rect">
+            <a:avLst/>
+          </a:prstGeom>
+          <a:noFill/>
+        </p:spPr>
+        <p:txBody>
+          <a:bodyPr/>
+          <a:lstStyle/>
+          <a:p>
+            <a:pPr algn="ctr"/>
+            <a:r>
+              <a:rPr lang="en-US" sz="2000" b="1">
+                <a:solidFill>
+                  <a:srgbClr val="0087AE"/>
+                </a:solidFill>
+                <a:latin typeface="Calibri"/>
+                <a:ea typeface="Calibri"/>
+              </a:rPr>
+              <a:t>92% confidence</a:t>
+            </a:r>
+          </a:p>
+        </p:txBody>
+      </p:sp>
+      <p:sp>
+        <p:nvSpPr>
+          <p:cNvPr id="100092" name="TextBox 8"/>
+          <p:cNvSpPr txBox="1"/>
+          <p:nvPr/>
+        </p:nvSpPr>
+        <p:spPr>
+          <a:xfrm>
+            <a:off x="720000" y="4824000"/>
             <a:ext cx="10753200" cy="504000"/>
           </a:xfrm>
           <a:prstGeom prst="rect">
@@ -8873,41 +9927,7 @@
                 <a:latin typeface="Calibri"/>
                 <a:ea typeface="Calibri"/>
               </a:rPr>
-              <a:t>Surfaced inside Tosca, qTest, and AI Workspace – no new tool to learn.</a:t>
-            </a:r>
-          </a:p>
-        </p:txBody>
-      </p:sp>
-      <p:sp>
-        <p:nvSpPr>
-          <p:cNvPr id="100109" name="TextBox 15"/>
-          <p:cNvSpPr txBox="1"/>
-          <p:nvPr/>
-        </p:nvSpPr>
-        <p:spPr>
-          <a:xfrm>
-            <a:off x="720000" y="5184000"/>
-            <a:ext cx="10753200" cy="648000"/>
-          </a:xfrm>
-          <a:prstGeom prst="rect">
-            <a:avLst/>
-          </a:prstGeom>
-          <a:noFill/>
-        </p:spPr>
-        <p:txBody>
-          <a:bodyPr/>
-          <a:lstStyle/>
-          <a:p>
-            <a:pPr algn="ctr"/>
-            <a:r>
-              <a:rPr lang="en-US" sz="2800" b="1">
-                <a:solidFill>
-                  <a:srgbClr val="FF6C0E"/>
-                </a:solidFill>
-                <a:latin typeface="Trebuchet MS"/>
-                <a:ea typeface="Trebuchet MS"/>
-              </a:rPr>
-              <a:t>One shared standard, for every agent, on every team.</a:t>
+              <a:t>Evidence chain, step by step – plus a recommended fix.</a:t>
             </a:r>
           </a:p>
         </p:txBody>
